--- a/submission/prezentaciya-promezhutochnaya.pptx
+++ b/submission/prezentaciya-promezhutochnaya.pptx
@@ -19,9 +19,10 @@
     <p:sldId id="267" r:id="rId13"/>
     <p:sldId id="268" r:id="rId14"/>
     <p:sldId id="269" r:id="rId15"/>
+    <p:sldId id="270" r:id="rId16"/>
   </p:sldIdLst>
   <p:notesMasterIdLst>
-    <p:notesMasterId r:id="rId16"/>
+    <p:notesMasterId r:id="rId17"/>
   </p:notesMasterIdLst>
   <p:sldSz cx="12192000" cy="6858000"/>
   <p:notesSz cx="6858000" cy="12192000"/>
@@ -515,7 +516,7 @@
           <a:p>
             <a:r>
               <a:rPr lang="en-US" dirty="0"/>
-              <a:t>Промежуточная сдача. Главный результат — не найденный сигнал, а понимание того, что измеряет метрика кейса.</a:t>
+              <a:t>Промежуточная сдача. Заголовок кейса оставлен как есть, но подзаголовок сразу задаёт честную рамку: выигрыш от угадывания дня в данных мал и незначим, а измеримое содержание сигнала другое — «не жди». Главный результат — не найденный сигнал, а понимание того, что измеряет метрика кейса.</a:t>
             </a:r>
             <a:endParaRPr lang="en-US" dirty="0"/>
           </a:p>
@@ -603,7 +604,7 @@
           <a:p>
             <a:r>
               <a:rPr lang="en-US" dirty="0"/>
-              <a:t>Ни одна политика не даёт значимого плюса по клиентской метрике: интервалы пересекают ноль, захвачено 2-8 % потолка.</a:t>
+              <a:t>Итог модели складывается из окон, где сигнал промолчал: из +12 бп срабатывания дают минус 24, а молчание плюс 36. Показывать итог без этого разложения нельзя. Правильный контрфакт для срабатываний внутри окна меняет знак, но не даёт значимости: 53 окна, ДИ [−71; +401]. Считать надо ровно те окна, где ПЕРВОЕ срабатывание пришлось на дни 1-5 — политика переводит деньги по первому сигналу.</a:t>
             </a:r>
             <a:endParaRPr lang="en-US" dirty="0"/>
           </a:p>
@@ -691,7 +692,7 @@
           <a:p>
             <a:r>
               <a:rPr lang="en-US" dirty="0"/>
-              <a:t>Устойчивость, измеренная на тех же годах, по которым модель и выбиралась, ничего не значит. Разрыв между двумя сериями — 66 б. п. — и есть цена выбора по тесту.</a:t>
+              <a:t>Устойчивость, измеренная на тех же годах, по которым модель и выбиралась, ничего не значит. Поэтому продуктовый критерий устойчивости нельзя применять постфактум к тестовой таблице - его надо встраивать в саму процедуру отбора.</a:t>
             </a:r>
             <a:endParaRPr lang="en-US" dirty="0"/>
           </a:p>
@@ -997,6 +998,94 @@
 </p:notes>
 </file>
 
+<file path=ppt/notesSlides/notesSlide15.xml><?xml version="1.0" encoding="utf-8"?>
+<p:notes xmlns:a="http://schemas.openxmlformats.org/drawingml/2006/main" xmlns:r="http://schemas.openxmlformats.org/officeDocument/2006/relationships" xmlns:p="http://schemas.openxmlformats.org/presentationml/2006/main">
+  <p:cSld>
+    <p:spTree>
+      <p:nvGrpSpPr>
+        <p:cNvPr id="1" name=""/>
+        <p:cNvGrpSpPr/>
+        <p:nvPr/>
+      </p:nvGrpSpPr>
+      <p:grpSpPr>
+        <a:xfrm>
+          <a:off x="0" y="0"/>
+          <a:ext cx="0" cy="0"/>
+          <a:chOff x="0" y="0"/>
+          <a:chExt cx="0" cy="0"/>
+        </a:xfrm>
+      </p:grpSpPr>
+      <p:sp>
+        <p:nvSpPr>
+          <p:cNvPr id="2" name="Slide Image Placeholder 1"/>
+          <p:cNvSpPr>
+            <a:spLocks noGrp="1" noRot="1" noChangeAspect="1"/>
+          </p:cNvSpPr>
+          <p:nvPr>
+            <p:ph type="sldImg"/>
+          </p:nvPr>
+        </p:nvSpPr>
+        <p:spPr/>
+      </p:sp>
+      <p:sp>
+        <p:nvSpPr>
+          <p:cNvPr id="3" name="Notes Placeholder 2"/>
+          <p:cNvSpPr>
+            <a:spLocks noGrp="1"/>
+          </p:cNvSpPr>
+          <p:nvPr>
+            <p:ph type="body" idx="1"/>
+          </p:nvPr>
+        </p:nvSpPr>
+        <p:spPr/>
+        <p:txBody>
+          <a:bodyPr/>
+          <a:lstStyle/>
+          <a:p>
+            <a:r>
+              <a:rPr lang="en-US" dirty="0"/>
+              <a:t>Закрываем не результатом модели, а решением, которое нужно от заказчика. Три вопроса выбраны так, что ответ на каждый меняет содержание работы к финалу, а не только её объём.</a:t>
+            </a:r>
+            <a:endParaRPr lang="en-US" dirty="0"/>
+          </a:p>
+        </p:txBody>
+      </p:sp>
+      <p:sp>
+        <p:nvSpPr>
+          <p:cNvPr id="4" name="Slide Number Placeholder 3"/>
+          <p:cNvSpPr>
+            <a:spLocks noGrp="1"/>
+          </p:cNvSpPr>
+          <p:nvPr>
+            <p:ph type="sldNum" sz="quarter" idx="10"/>
+          </p:nvPr>
+        </p:nvSpPr>
+        <p:spPr/>
+        <p:txBody>
+          <a:bodyPr/>
+          <a:lstStyle/>
+          <a:p>
+            <a:fld id="{F7021451-1387-4CA6-816F-3879F97B5CBC}" type="slidenum">
+              <a:rPr lang="en-US"/>
+              <a:t>15</a:t>
+            </a:fld>
+            <a:endParaRPr lang="en-US"/>
+          </a:p>
+        </p:txBody>
+      </p:sp>
+    </p:spTree>
+    <p:extLst>
+      <p:ext uri="{BB962C8B-B14F-4D97-AF65-F5344CB8AC3E}">
+        <p14:creationId xmlns:p14="http://schemas.microsoft.com/office/powerpoint/2010/main" val="1024086991"/>
+      </p:ext>
+    </p:extLst>
+  </p:cSld>
+  <p:clrMapOvr>
+    <a:masterClrMapping/>
+  </p:clrMapOvr>
+</p:notes>
+</file>
+
 <file path=ppt/notesSlides/notesSlide2.xml><?xml version="1.0" encoding="utf-8"?>
 <p:notes xmlns:a="http://schemas.openxmlformats.org/drawingml/2006/main" xmlns:r="http://schemas.openxmlformats.org/officeDocument/2006/relationships" xmlns:p="http://schemas.openxmlformats.org/presentationml/2006/main">
   <p:cSld>
@@ -1043,7 +1132,7 @@
           <a:p>
             <a:r>
               <a:rPr lang="en-US" dirty="0"/>
-              <a:t>Три цифры измерены нами на данных ЦБ 2019–2026. Потолок 22–30 бп — это то, что клиент реально может забрать в своём окне.</a:t>
+              <a:t>Первые три цифры считает run_product_numbers.py на данных ЦБ 2019-2026. Потолок +143 бп требует знания будущего; лучшие реальные политики берут от него 8-12 процентов. Четвёртая — «0 массовых сервисов» — не расчёт по данным, а наш обзор рынка: мы не нашли массового сервиса переводов в СНГ, который шлёт push о моменте перевода. Это утверждение об отсутствии, к финалу его надо подкрепить ссылками — см. docs/01, раздел 2.</a:t>
             </a:r>
             <a:endParaRPr lang="en-US" dirty="0"/>
           </a:p>
@@ -1219,7 +1308,7 @@
           <a:p>
             <a:r>
               <a:rPr lang="en-US" dirty="0"/>
-              <a:t>Метрика кейса монотонна по одному признаку. ML к ней не добавляет ничего — это факт о метрике, а не о моделях.</a:t>
+              <a:t>Метрика кейса монотонна по одному признаку. ML к ней не добавляет ничего - это факт о метрике, а не о моделях. Комплаенс-блокер на следующем уровне: для оптимума метрики допустимого текста пуша не существует. Если спросят про lift: на базе, известной в момент решения, 1,39 у правила падает до 1,00 - метрика кейса держится на глобальном знаменателе. Достижимую выгоду +63 бп это не отменяет, она от знаменателя не зависит. Именно поэтому мы считаем главной величиной деньги, а не lift.</a:t>
             </a:r>
             <a:endParaRPr lang="en-US" dirty="0"/>
           </a:p>
@@ -1395,7 +1484,7 @@
           <a:p>
             <a:r>
               <a:rPr lang="en-US" dirty="0"/>
-              <a:t>Ни одно правило ТЗ не даёт одновременно lift выше 1 и положительную достижимую выгоду. Модель даёт.</a:t>
+              <a:t>Ни один индикатор ТЗ не даёт одновременно lift выше 1 и положительную достижимую выгоду. Модель даёт +24, однострочное правило +63.</a:t>
             </a:r>
             <a:endParaRPr lang="en-US" dirty="0"/>
           </a:p>
@@ -2173,6 +2262,26 @@
             </a:r>
             <a:endParaRPr lang="en-US" sz="1500" dirty="0"/>
           </a:p>
+          <a:p>
+            <a:pPr indent="0" marL="0">
+              <a:lnSpc>
+                <a:spcPts val="2400"/>
+              </a:lnSpc>
+              <a:buNone/>
+            </a:pPr>
+            <a:r>
+              <a:rPr lang="en-US" sz="1500" dirty="0">
+                <a:solidFill>
+                  <a:srgbClr val="C7CFD8"/>
+                </a:solidFill>
+                <a:latin typeface="Calibri" pitchFamily="34" charset="0"/>
+                <a:ea typeface="Calibri" pitchFamily="34" charset="-122"/>
+                <a:cs typeface="Calibri" pitchFamily="34" charset="-120"/>
+              </a:rPr>
+              <a:t>Промежуточный вывод: момент ловится — но не там, где его ищет метрика кейса</a:t>
+            </a:r>
+            <a:endParaRPr lang="en-US" sz="1500" dirty="0"/>
+          </a:p>
         </p:txBody>
       </p:sp>
       <p:sp>
@@ -2465,7 +2574,7 @@
                 <a:ea typeface="Calibri" pitchFamily="34" charset="-122"/>
                 <a:cs typeface="Calibri" pitchFamily="34" charset="-120"/>
               </a:rPr>
-              <a:t>При равной частоте срабатывания: 1,30 у модели против 1,30 у правила pct ≥ 85, и +18 против +17 бп для семьи. Различий нет.</a:t>
+              <a:t>1,35 у модели против 1,39 у правила, и +12 против +11 бп для семьи. Различий нет, интервалы пересекают ноль. Обе — 0,6-0,7 сигнала в неделю при полосе 1–2.</a:t>
             </a:r>
             <a:endParaRPr lang="en-US" sz="1250" dirty="0"/>
           </a:p>
@@ -2520,13 +2629,13 @@
             <a:r>
               <a:rPr lang="en-US" sz="1550" b="1" dirty="0">
                 <a:solidFill>
-                  <a:srgbClr val="16674F"/>
+                  <a:srgbClr val="9C5B12"/>
                 </a:solidFill>
                 <a:latin typeface="Cambria" pitchFamily="34" charset="0"/>
                 <a:ea typeface="Cambria" pitchFamily="34" charset="-122"/>
                 <a:cs typeface="Cambria" pitchFamily="34" charset="-120"/>
               </a:rPr>
-              <a:t>Добавление признаков только вредит</a:t>
+              <a:t>Правильный контрфакт меняет знак</a:t>
             </a:r>
             <a:endParaRPr lang="en-US" sz="1550" dirty="0"/>
           </a:p>
@@ -2568,7 +2677,7 @@
                 <a:ea typeface="Calibri" pitchFamily="34" charset="-122"/>
                 <a:cs typeface="Calibri" pitchFamily="34" charset="-120"/>
               </a:rPr>
-              <a:t>80 признаков дают 1,14, один с ограничением монотонности — 1,30. Метрика монотонна по уровню, и учить тут нечего.</a:t>
+              <a:t>Клиент на дне 3 не может перевести в день 0. Против «продолжать ждать» сигнал даёт +133 бп, ДИ [−71; +401] на 53 окнах: знак верный, значимости нет. Рамка меняется, доказательство впереди.</a:t>
             </a:r>
             <a:endParaRPr lang="en-US" sz="1250" dirty="0"/>
           </a:p>
@@ -2751,12 +2860,12 @@
           <a:p>
             <a:pPr indent="0" marL="0">
               <a:lnSpc>
-                <a:spcPts val="1900"/>
+                <a:spcPts val="1800"/>
               </a:lnSpc>
               <a:buNone/>
             </a:pPr>
             <a:r>
-              <a:rPr lang="en-US" sz="1300" dirty="0">
+              <a:rPr lang="en-US" sz="1250" b="1" dirty="0">
                 <a:solidFill>
                   <a:srgbClr val="4E5966"/>
                 </a:solidFill>
@@ -2764,16 +2873,16 @@
                 <a:ea typeface="Calibri" pitchFamily="34" charset="-122"/>
                 <a:cs typeface="Calibri" pitchFamily="34" charset="-120"/>
               </a:rPr>
-              <a:t>Зелёные столбцы — конфигурация, выигравшая конкурс из десяти на тестовых данных: +57 б. п. в среднем за год. </a:t>
+              <a:t>Оранжевые — конфигурация, зафиксированная ДО теста: пять лет из шести в плюсе, +24 б. п. на всём периоде. </a:t>
             </a:r>
             <a:pPr indent="0" marL="0">
               <a:lnSpc>
-                <a:spcPts val="1900"/>
+                <a:spcPts val="1800"/>
               </a:lnSpc>
               <a:buNone/>
             </a:pPr>
             <a:r>
-              <a:rPr lang="en-US" sz="1300" b="1" dirty="0">
+              <a:rPr lang="en-US" sz="1250" dirty="0">
                 <a:solidFill>
                   <a:srgbClr val="4E5966"/>
                 </a:solidFill>
@@ -2781,16 +2890,16 @@
                 <a:ea typeface="Calibri" pitchFamily="34" charset="-122"/>
                 <a:cs typeface="Calibri" pitchFamily="34" charset="-120"/>
               </a:rPr>
-              <a:t>Оранжевые — та, что зафиксирована ДО теста: −9 б. п. и два года из шести в плюсе. </a:t>
+              <a:t>Зелёные — победитель конкурса из десяти на тестовых данных. Правый график показывает, почему его столбцы почти везде отсутствуют: </a:t>
             </a:r>
             <a:pPr indent="0" marL="0">
               <a:lnSpc>
-                <a:spcPts val="1900"/>
+                <a:spcPts val="1800"/>
               </a:lnSpc>
               <a:buNone/>
             </a:pPr>
             <a:r>
-              <a:rPr lang="en-US" sz="1300" dirty="0">
+              <a:rPr lang="en-US" sz="1250" b="1" dirty="0">
                 <a:solidFill>
                   <a:srgbClr val="4E5966"/>
                 </a:solidFill>
@@ -2798,9 +2907,26 @@
                 <a:ea typeface="Calibri" pitchFamily="34" charset="-122"/>
                 <a:cs typeface="Calibri" pitchFamily="34" charset="-120"/>
               </a:rPr>
-              <a:t>Поэтому конфигурация фиксируется до теста, а максимум по тесту мы показываем отдельно и результатом не считаем.</a:t>
-            </a:r>
-            <a:endParaRPr lang="en-US" sz="1300" dirty="0"/>
+              <a:t>в трёх годах из шести у него 5–10 срабатываний, и оценить год не на чем. </a:t>
+            </a:r>
+            <a:pPr indent="0" marL="0">
+              <a:lnSpc>
+                <a:spcPts val="1800"/>
+              </a:lnSpc>
+              <a:buNone/>
+            </a:pPr>
+            <a:r>
+              <a:rPr lang="en-US" sz="1250" dirty="0">
+                <a:solidFill>
+                  <a:srgbClr val="4E5966"/>
+                </a:solidFill>
+                <a:latin typeface="Calibri" pitchFamily="34" charset="0"/>
+                <a:ea typeface="Calibri" pitchFamily="34" charset="-122"/>
+                <a:cs typeface="Calibri" pitchFamily="34" charset="-120"/>
+              </a:rPr>
+              <a:t>Пустые годы — это отсутствие данных, а не отсутствие эффекта, и «устойчивость» такой строки посчитать не на чем: честная запись — «3 года из 3 оценённых», а не «3 из 6». Разрыв в результате — 22 / 18 / 19 / 25 / 85 б. п. по горизонтам 1 / 3 / 5 / 10 / 20, всегда в одну сторону, — и есть цена выбора победителя по тесту.</a:t>
+            </a:r>
+            <a:endParaRPr lang="en-US" sz="1250" dirty="0"/>
           </a:p>
         </p:txBody>
       </p:sp>
@@ -3031,7 +3157,7 @@
                 <a:ea typeface="Calibri" pitchFamily="34" charset="-122"/>
                 <a:cs typeface="Calibri" pitchFamily="34" charset="-120"/>
               </a:rPr>
-              <a:t>Три состояния по положению курса в квартальном диапазоне: дёшево — нейтрально — дорого.</a:t>
+              <a:t>Положение курса в квартальном диапазоне как факт, без обещания выгоды.</a:t>
             </a:r>
             <a:endParaRPr lang="en-US" sz="1250" dirty="0"/>
           </a:p>
@@ -3060,7 +3186,7 @@
                 <a:ea typeface="Calibri" pitchFamily="34" charset="-122"/>
                 <a:cs typeface="Calibri" pitchFamily="34" charset="-120"/>
               </a:rPr>
-              <a:t>Это факт, а не прогноз. Считается одной формулой, работает с первого дня.</a:t>
+              <a:t>Цвет не означает «выгодно»: по достижимой выгоде значимо только состояние «дорого», и его смысл — «не жди».</a:t>
             </a:r>
             <a:endParaRPr lang="en-US" sz="1250" dirty="0"/>
           </a:p>
@@ -3414,32 +3540,32 @@
           <a:p>
             <a:pPr indent="0" marL="0">
               <a:lnSpc>
-                <a:spcPts val="1900"/>
+                <a:spcPts val="1700"/>
               </a:lnSpc>
               <a:buNone/>
             </a:pPr>
             <a:r>
-              <a:rPr lang="en-US" sz="1250" b="1" dirty="0">
-                <a:solidFill>
-                  <a:srgbClr val="16674F"/>
+              <a:rPr lang="en-US" sz="1200" dirty="0">
+                <a:solidFill>
+                  <a:srgbClr val="4E5966"/>
                 </a:solidFill>
                 <a:latin typeface="Calibri" pitchFamily="34" charset="0"/>
                 <a:ea typeface="Calibri" pitchFamily="34" charset="-122"/>
                 <a:cs typeface="Calibri" pitchFamily="34" charset="-120"/>
               </a:rPr>
-              <a:t>Нижний дециль: +52 б. п.</a:t>
-            </a:r>
-            <a:endParaRPr lang="en-US" sz="1250" dirty="0"/>
+              <a:t>По достижимой выгоде — той, что клиент может забрать:</a:t>
+            </a:r>
+            <a:endParaRPr lang="en-US" sz="1200" dirty="0"/>
           </a:p>
           <a:p>
             <a:pPr indent="0" marL="0">
               <a:lnSpc>
-                <a:spcPts val="1900"/>
+                <a:spcPts val="1700"/>
               </a:lnSpc>
               <a:buNone/>
             </a:pPr>
             <a:r>
-              <a:rPr lang="en-US" sz="1250" dirty="0">
+              <a:rPr lang="en-US" sz="1200" b="1" dirty="0">
                 <a:solidFill>
                   <a:srgbClr val="4E5966"/>
                 </a:solidFill>
@@ -3447,49 +3573,69 @@
                 <a:ea typeface="Calibri" pitchFamily="34" charset="-122"/>
                 <a:cs typeface="Calibri" pitchFamily="34" charset="-120"/>
               </a:rPr>
-              <a:t>Середина, 65 % дней: выгода ≈ 0 — честный серый</a:t>
-            </a:r>
-            <a:endParaRPr lang="en-US" sz="1250" dirty="0"/>
+              <a:t>Нижний дециль («дёшево»): −1 б. п., ДИ [−26; +24] — от нуля неотличим</a:t>
+            </a:r>
+            <a:endParaRPr lang="en-US" sz="1200" dirty="0"/>
           </a:p>
           <a:p>
             <a:pPr indent="0" marL="0">
               <a:lnSpc>
-                <a:spcPts val="1900"/>
+                <a:spcPts val="1700"/>
               </a:lnSpc>
               <a:buNone/>
             </a:pPr>
             <a:r>
-              <a:rPr lang="en-US" sz="1250" b="1" dirty="0">
-                <a:solidFill>
-                  <a:srgbClr val="9E3226"/>
+              <a:rPr lang="en-US" sz="1200" dirty="0">
+                <a:solidFill>
+                  <a:srgbClr val="4E5966"/>
                 </a:solidFill>
                 <a:latin typeface="Calibri" pitchFamily="34" charset="0"/>
                 <a:ea typeface="Calibri" pitchFamily="34" charset="-122"/>
                 <a:cs typeface="Calibri" pitchFamily="34" charset="-120"/>
               </a:rPr>
-              <a:t>Верхний дециль: −55 б. п.</a:t>
-            </a:r>
-            <a:endParaRPr lang="en-US" sz="1250" dirty="0"/>
+              <a:t>Середина, 66 % дней: −7 б. п. — честный серый</a:t>
+            </a:r>
+            <a:endParaRPr lang="en-US" sz="1200" dirty="0"/>
           </a:p>
           <a:p>
             <a:pPr indent="0" marL="0">
               <a:lnSpc>
-                <a:spcPts val="1900"/>
+                <a:spcPts val="1700"/>
               </a:lnSpc>
               <a:buNone/>
             </a:pPr>
             <a:r>
-              <a:rPr lang="en-US" sz="1250" dirty="0">
-                <a:solidFill>
-                  <a:srgbClr val="4E5966"/>
+              <a:rPr lang="en-US" sz="1200" b="1" dirty="0">
+                <a:solidFill>
+                  <a:srgbClr val="16674F"/>
                 </a:solidFill>
                 <a:latin typeface="Calibri" pitchFamily="34" charset="0"/>
                 <a:ea typeface="Calibri" pitchFamily="34" charset="-122"/>
                 <a:cs typeface="Calibri" pitchFamily="34" charset="-120"/>
               </a:rPr>
-              <a:t>Три состояния, а не пять: данные различают только края. Серый на две трети дней — причина доверять зелёному.</a:t>
-            </a:r>
-            <a:endParaRPr lang="en-US" sz="1250" dirty="0"/>
+              <a:t>Верхний дециль («дорого»): +48 б. п., ДИ [+22; +75] — единственное значимое состояние</a:t>
+            </a:r>
+            <a:endParaRPr lang="en-US" sz="1200" dirty="0"/>
+          </a:p>
+          <a:p>
+            <a:pPr indent="0" marL="0">
+              <a:lnSpc>
+                <a:spcPts val="1700"/>
+              </a:lnSpc>
+              <a:buNone/>
+            </a:pPr>
+            <a:r>
+              <a:rPr lang="en-US" sz="1200" dirty="0">
+                <a:solidFill>
+                  <a:srgbClr val="4E5966"/>
+                </a:solidFill>
+                <a:latin typeface="Calibri" pitchFamily="34" charset="0"/>
+                <a:ea typeface="Calibri" pitchFamily="34" charset="-122"/>
+                <a:cs typeface="Calibri" pitchFamily="34" charset="-120"/>
+              </a:rPr>
+              <a:t>Интуитивная раскраска «зелёный, когда дёшево» противоречит данным. Информативно ровно одно состояние. Допустимое его содержание — факт о прошлом: «ожидание из таких дней раньше не окупалось». Сказать «дальше будет хуже» кейс запрещает.</a:t>
+            </a:r>
+            <a:endParaRPr lang="en-US" sz="1200" dirty="0"/>
           </a:p>
         </p:txBody>
       </p:sp>
@@ -3702,7 +3848,7 @@
                 <a:ea typeface="Calibri" pitchFamily="34" charset="-122"/>
                 <a:cs typeface="Calibri" pitchFamily="34" charset="-120"/>
               </a:rPr>
-              <a:t>Масштаб эффекта — десятки базисных пунктов: около 84 ₽ на переводе 30 000 ₽</a:t>
+              <a:t>Масштаб эффекта — десятки базисных пунктов: 72–189 ₽ на переводе 30 000 ₽. Порог запуска: +30 б. п. (90 ₽)</a:t>
             </a:r>
             <a:endParaRPr lang="en-US" sz="1150" dirty="0"/>
           </a:p>
@@ -3774,7 +3920,7 @@
                 <a:ea typeface="Calibri" pitchFamily="34" charset="-122"/>
                 <a:cs typeface="Calibri" pitchFamily="34" charset="-120"/>
               </a:rPr>
-              <a:t>2022 год — 13 % наблюдений и 58–64 % всей дисперсии</a:t>
+              <a:t>2022 год — 13,1 % наблюдений и 57,6 % всей дисперсии доходностей</a:t>
             </a:r>
             <a:endParaRPr lang="en-US" sz="1150" dirty="0"/>
           </a:p>
@@ -3798,7 +3944,7 @@
                 <a:ea typeface="Calibri" pitchFamily="34" charset="-122"/>
                 <a:cs typeface="Calibri" pitchFamily="34" charset="-120"/>
               </a:rPr>
-              <a:t>Нет данных клиентов: эластичность и доля «гибких» не измеримы до пилота</a:t>
+              <a:t>Пять коридоров — не пять подтверждений: корреляция внутри даты 0,86</a:t>
             </a:r>
             <a:endParaRPr lang="en-US" sz="1150" dirty="0"/>
           </a:p>
@@ -3822,71 +3968,10 @@
                 <a:ea typeface="Calibri" pitchFamily="34" charset="-122"/>
                 <a:cs typeface="Calibri" pitchFamily="34" charset="-120"/>
               </a:rPr>
-              <a:t>Курс приложения ≠ курс ЦБ, работаем на прокси</a:t>
+              <a:t>Поправки на множественные сравнения нет — интервалы некорректированные</a:t>
             </a:r>
             <a:endParaRPr lang="en-US" sz="1150" dirty="0"/>
           </a:p>
-        </p:txBody>
-      </p:sp>
-      <p:sp>
-        <p:nvSpPr>
-          <p:cNvPr id="7" name="Text 5"/>
-          <p:cNvSpPr txBox="1"/>
-          <p:nvPr/>
-        </p:nvSpPr>
-        <p:spPr>
-          <a:xfrm>
-            <a:off x="6153912" y="1170432"/>
-            <a:ext cx="5367528" cy="329184"/>
-          </a:xfrm>
-          <a:prstGeom prst="rect">
-            <a:avLst/>
-          </a:prstGeom>
-          <a:noFill/>
-          <a:ln/>
-        </p:spPr>
-        <p:txBody>
-          <a:bodyPr wrap="square" lIns="0" tIns="0" rIns="0" bIns="0" rtlCol="0" anchor="ctr"/>
-          <a:lstStyle/>
-          <a:p>
-            <a:pPr indent="0" marL="0">
-              <a:buNone/>
-            </a:pPr>
-            <a:r>
-              <a:rPr lang="en-US" sz="1600" b="1" dirty="0">
-                <a:solidFill>
-                  <a:srgbClr val="16674F"/>
-                </a:solidFill>
-                <a:latin typeface="Cambria" pitchFamily="34" charset="0"/>
-                <a:ea typeface="Cambria" pitchFamily="34" charset="-122"/>
-                <a:cs typeface="Cambria" pitchFamily="34" charset="-120"/>
-              </a:rPr>
-              <a:t>План до 07.09</a:t>
-            </a:r>
-            <a:endParaRPr lang="en-US" sz="1600" dirty="0"/>
-          </a:p>
-        </p:txBody>
-      </p:sp>
-      <p:sp>
-        <p:nvSpPr>
-          <p:cNvPr id="8" name="Text 6"/>
-          <p:cNvSpPr txBox="1"/>
-          <p:nvPr/>
-        </p:nvSpPr>
-        <p:spPr>
-          <a:xfrm>
-            <a:off x="6153912" y="1572768"/>
-            <a:ext cx="5367528" cy="2487168"/>
-          </a:xfrm>
-          <a:prstGeom prst="rect">
-            <a:avLst/>
-          </a:prstGeom>
-          <a:noFill/>
-          <a:ln/>
-        </p:spPr>
-        <p:txBody>
-          <a:bodyPr wrap="square" lIns="0" tIns="0" rIns="0" bIns="0" rtlCol="0" anchor="t"/>
-          <a:lstStyle/>
           <a:p>
             <a:pPr marL="342900" indent="-342900">
               <a:lnSpc>
@@ -3907,7 +3992,7 @@
                 <a:ea typeface="Calibri" pitchFamily="34" charset="-122"/>
                 <a:cs typeface="Calibri" pitchFamily="34" charset="-120"/>
               </a:rPr>
-              <a:t>Пт: публичный signals_as_of(T), signals.csv, правило комбинирования, экономика в рублях</a:t>
+              <a:t>Нет данных клиентов: эластичность и доля «гибких» не измеримы до пилота</a:t>
             </a:r>
             <a:endParaRPr lang="en-US" sz="1150" dirty="0"/>
           </a:p>
@@ -3931,7 +4016,116 @@
                 <a:ea typeface="Calibri" pitchFamily="34" charset="-122"/>
                 <a:cs typeface="Calibri" pitchFamily="34" charset="-120"/>
               </a:rPr>
-              <a:t>Сб: калибровка светофора по коридорам, тексты уведомлений, прототип экрана, дизайн пилота</a:t>
+              <a:t>Курс приложения ≠ курс ЦБ, работаем на прокси</a:t>
+            </a:r>
+            <a:endParaRPr lang="en-US" sz="1150" dirty="0"/>
+          </a:p>
+        </p:txBody>
+      </p:sp>
+      <p:sp>
+        <p:nvSpPr>
+          <p:cNvPr id="7" name="Text 5"/>
+          <p:cNvSpPr txBox="1"/>
+          <p:nvPr/>
+        </p:nvSpPr>
+        <p:spPr>
+          <a:xfrm>
+            <a:off x="6153912" y="1170432"/>
+            <a:ext cx="5367528" cy="329184"/>
+          </a:xfrm>
+          <a:prstGeom prst="rect">
+            <a:avLst/>
+          </a:prstGeom>
+          <a:noFill/>
+          <a:ln/>
+        </p:spPr>
+        <p:txBody>
+          <a:bodyPr wrap="square" lIns="0" tIns="0" rIns="0" bIns="0" rtlCol="0" anchor="ctr"/>
+          <a:lstStyle/>
+          <a:p>
+            <a:pPr indent="0" marL="0">
+              <a:buNone/>
+            </a:pPr>
+            <a:r>
+              <a:rPr lang="en-US" sz="1600" b="1" dirty="0">
+                <a:solidFill>
+                  <a:srgbClr val="16674F"/>
+                </a:solidFill>
+                <a:latin typeface="Cambria" pitchFamily="34" charset="0"/>
+                <a:ea typeface="Cambria" pitchFamily="34" charset="-122"/>
+                <a:cs typeface="Cambria" pitchFamily="34" charset="-120"/>
+              </a:rPr>
+              <a:t>План до 07.09</a:t>
+            </a:r>
+            <a:endParaRPr lang="en-US" sz="1600" dirty="0"/>
+          </a:p>
+        </p:txBody>
+      </p:sp>
+      <p:sp>
+        <p:nvSpPr>
+          <p:cNvPr id="8" name="Text 6"/>
+          <p:cNvSpPr txBox="1"/>
+          <p:nvPr/>
+        </p:nvSpPr>
+        <p:spPr>
+          <a:xfrm>
+            <a:off x="6153912" y="1572768"/>
+            <a:ext cx="5367528" cy="2487168"/>
+          </a:xfrm>
+          <a:prstGeom prst="rect">
+            <a:avLst/>
+          </a:prstGeom>
+          <a:noFill/>
+          <a:ln/>
+        </p:spPr>
+        <p:txBody>
+          <a:bodyPr wrap="square" lIns="0" tIns="0" rIns="0" bIns="0" rtlCol="0" anchor="t"/>
+          <a:lstStyle/>
+          <a:p>
+            <a:pPr marL="342900" indent="-342900">
+              <a:lnSpc>
+                <a:spcPts val="1600"/>
+              </a:lnSpc>
+              <a:spcAft>
+                <a:spcPts val="400"/>
+              </a:spcAft>
+              <a:buSzPct val="100000"/>
+              <a:buChar char="•"/>
+            </a:pPr>
+            <a:r>
+              <a:rPr lang="en-US" sz="1150" dirty="0">
+                <a:solidFill>
+                  <a:srgbClr val="4E5966"/>
+                </a:solidFill>
+                <a:latin typeface="Calibri" pitchFamily="34" charset="0"/>
+                <a:ea typeface="Calibri" pitchFamily="34" charset="-122"/>
+                <a:cs typeface="Calibri" pitchFamily="34" charset="-120"/>
+              </a:rPr>
+              <a:t>Пт: signals.csv, правило комбинирования и добор до полосы частоты, экономика в рублях</a:t>
+            </a:r>
+            <a:endParaRPr lang="en-US" sz="1150" dirty="0"/>
+          </a:p>
+          <a:p>
+            <a:pPr marL="342900" indent="-342900">
+              <a:lnSpc>
+                <a:spcPts val="1600"/>
+              </a:lnSpc>
+              <a:spcAft>
+                <a:spcPts val="400"/>
+              </a:spcAft>
+              <a:buSzPct val="100000"/>
+              <a:buChar char="•"/>
+            </a:pPr>
+            <a:r>
+              <a:rPr lang="en-US" sz="1150" dirty="0">
+                <a:solidFill>
+                  <a:srgbClr val="4E5966"/>
+                </a:solidFill>
+                <a:latin typeface="Calibri" pitchFamily="34" charset="0"/>
+                <a:ea typeface="Calibri" pitchFamily="34" charset="-122"/>
+                <a:cs typeface="Calibri" pitchFamily="34" charset="-120"/>
+              </a:rPr>
+              <a:t>Сб: тексты уведомлений под рамку «перестань ждать», прототип экрана, дизайн пилота</a:t>
             </a:r>
             <a:endParaRPr lang="en-US" sz="1150" dirty="0"/>
           </a:p>
@@ -4624,7 +4818,7 @@
                 <a:ea typeface="Calibri" pitchFamily="34" charset="-122"/>
                 <a:cs typeface="Calibri" pitchFamily="34" charset="-120"/>
               </a:rPr>
-              <a:t>Загрузчик ЦБ с построчной нормировкой номинала · 79 признаков только по прошлому · доказательство отсутствия заглядывания в будущее и 16 автотестов · walk-forward с очисткой · воспроизводимость репозитория</a:t>
+              <a:t>Загрузчик ЦБ с построчной нормировкой номинала · 83 признака только по прошлому · доказательство отсутствия заглядывания в будущее и 44 автотеста · walk-forward с очисткой в публикациях · signals_as_of(T) · воспроизводимость репозитория</a:t>
             </a:r>
             <a:endParaRPr lang="en-US" sz="1100" dirty="0"/>
           </a:p>
@@ -4847,7 +5041,7 @@
                 <a:ea typeface="Calibri" pitchFamily="34" charset="-122"/>
                 <a:cs typeface="Calibri" pitchFamily="34" charset="-120"/>
               </a:rPr>
-              <a:t>Пять семейств моделей, включая CatBoost и XGBoost · честный отбор признаков · подбор конфигураций и диагностика провала на 80 признаках · две модели под две метрики · испытания результата</a:t>
+              <a:t>Пять семейств моделей, включая CatBoost и XGBoost · честный отбор признаков · подбор конфигураций и диагностика провала на всех признаках · две модели под две метрики · испытания результата</a:t>
             </a:r>
             <a:endParaRPr lang="en-US" sz="1100" dirty="0"/>
           </a:p>
@@ -4928,6 +5122,676 @@
               <a:t>Работа велась совместно, роли разделены по зонам ответственности; вклад участников сопоставим.</a:t>
             </a:r>
             <a:endParaRPr lang="en-US" sz="1050" dirty="0"/>
+          </a:p>
+        </p:txBody>
+      </p:sp>
+    </p:spTree>
+  </p:cSld>
+  <p:clrMapOvr>
+    <a:masterClrMapping/>
+  </p:clrMapOvr>
+</p:sld>
+</file>
+
+<file path=ppt/slides/slide15.xml><?xml version="1.0" encoding="utf-8"?>
+<p:sld xmlns:a="http://schemas.openxmlformats.org/drawingml/2006/main" xmlns:r="http://schemas.openxmlformats.org/officeDocument/2006/relationships" xmlns:p="http://schemas.openxmlformats.org/presentationml/2006/main">
+  <p:cSld name="Slide 15">
+    <p:spTree>
+      <p:nvGrpSpPr>
+        <p:cNvPr id="1" name=""/>
+        <p:cNvGrpSpPr/>
+        <p:nvPr/>
+      </p:nvGrpSpPr>
+      <p:grpSpPr>
+        <a:xfrm>
+          <a:off x="0" y="0"/>
+          <a:ext cx="0" cy="0"/>
+          <a:chOff x="0" y="0"/>
+          <a:chExt cx="0" cy="0"/>
+        </a:xfrm>
+      </p:grpSpPr>
+      <p:sp>
+        <p:nvSpPr>
+          <p:cNvPr id="2" name="Shape 0"/>
+          <p:cNvSpPr/>
+          <p:nvPr/>
+        </p:nvSpPr>
+        <p:spPr>
+          <a:xfrm>
+            <a:off x="0" y="0"/>
+            <a:ext cx="12188952" cy="6858000"/>
+          </a:xfrm>
+          <a:prstGeom prst="rect">
+            <a:avLst/>
+          </a:prstGeom>
+          <a:solidFill>
+            <a:srgbClr val="1A2530"/>
+          </a:solidFill>
+          <a:ln/>
+        </p:spPr>
+      </p:sp>
+      <p:sp>
+        <p:nvSpPr>
+          <p:cNvPr id="3" name="Text 1"/>
+          <p:cNvSpPr txBox="1"/>
+          <p:nvPr/>
+        </p:nvSpPr>
+        <p:spPr>
+          <a:xfrm>
+            <a:off x="640080" y="658368"/>
+            <a:ext cx="10881360" cy="292608"/>
+          </a:xfrm>
+          <a:prstGeom prst="rect">
+            <a:avLst/>
+          </a:prstGeom>
+          <a:noFill/>
+          <a:ln/>
+        </p:spPr>
+        <p:txBody>
+          <a:bodyPr wrap="square" lIns="0" tIns="0" rIns="0" bIns="0" rtlCol="0" anchor="ctr"/>
+          <a:lstStyle/>
+          <a:p>
+            <a:pPr indent="0" marL="0">
+              <a:buNone/>
+            </a:pPr>
+            <a:r>
+              <a:rPr lang="en-US" sz="1200" b="1" spc="200" kern="0" dirty="0">
+                <a:solidFill>
+                  <a:srgbClr val="9C5B12"/>
+                </a:solidFill>
+                <a:latin typeface="Calibri" pitchFamily="34" charset="0"/>
+                <a:ea typeface="Calibri" pitchFamily="34" charset="-122"/>
+                <a:cs typeface="Calibri" pitchFamily="34" charset="-120"/>
+              </a:rPr>
+              <a:t>ЧТО МЫ ПРОСИМ РЕШИТЬ</a:t>
+            </a:r>
+            <a:endParaRPr lang="en-US" sz="1200" dirty="0"/>
+          </a:p>
+        </p:txBody>
+      </p:sp>
+      <p:sp>
+        <p:nvSpPr>
+          <p:cNvPr id="4" name="Text 2"/>
+          <p:cNvSpPr txBox="1"/>
+          <p:nvPr/>
+        </p:nvSpPr>
+        <p:spPr>
+          <a:xfrm>
+            <a:off x="640080" y="1097280"/>
+            <a:ext cx="10881360" cy="1371600"/>
+          </a:xfrm>
+          <a:prstGeom prst="rect">
+            <a:avLst/>
+          </a:prstGeom>
+          <a:noFill/>
+          <a:ln/>
+        </p:spPr>
+        <p:txBody>
+          <a:bodyPr wrap="square" lIns="0" tIns="0" rIns="0" bIns="0" rtlCol="0" anchor="ctr"/>
+          <a:lstStyle/>
+          <a:p>
+            <a:pPr indent="0" marL="0">
+              <a:lnSpc>
+                <a:spcPts val="4400"/>
+              </a:lnSpc>
+              <a:buNone/>
+            </a:pPr>
+            <a:r>
+              <a:rPr lang="en-US" sz="3400" b="1" dirty="0">
+                <a:solidFill>
+                  <a:srgbClr val="FFFFFF"/>
+                </a:solidFill>
+                <a:latin typeface="Cambria" pitchFamily="34" charset="0"/>
+                <a:ea typeface="Cambria" pitchFamily="34" charset="-122"/>
+                <a:cs typeface="Cambria" pitchFamily="34" charset="-120"/>
+              </a:rPr>
+              <a:t>Момент ловится. Метрика кейса</a:t>
+            </a:r>
+            <a:endParaRPr lang="en-US" sz="3400" dirty="0"/>
+          </a:p>
+          <a:p>
+            <a:pPr indent="0" marL="0">
+              <a:lnSpc>
+                <a:spcPts val="4400"/>
+              </a:lnSpc>
+              <a:buNone/>
+            </a:pPr>
+            <a:r>
+              <a:rPr lang="en-US" sz="3400" b="1" dirty="0">
+                <a:solidFill>
+                  <a:srgbClr val="FFFFFF"/>
+                </a:solidFill>
+                <a:latin typeface="Cambria" pitchFamily="34" charset="0"/>
+                <a:ea typeface="Cambria" pitchFamily="34" charset="-122"/>
+                <a:cs typeface="Cambria" pitchFamily="34" charset="-120"/>
+              </a:rPr>
+              <a:t>измеряет не его.</a:t>
+            </a:r>
+            <a:endParaRPr lang="en-US" sz="3400" dirty="0"/>
+          </a:p>
+        </p:txBody>
+      </p:sp>
+      <p:sp>
+        <p:nvSpPr>
+          <p:cNvPr id="5" name="Text 3"/>
+          <p:cNvSpPr txBox="1"/>
+          <p:nvPr/>
+        </p:nvSpPr>
+        <p:spPr>
+          <a:xfrm>
+            <a:off x="640080" y="2615184"/>
+            <a:ext cx="10881360" cy="822960"/>
+          </a:xfrm>
+          <a:prstGeom prst="rect">
+            <a:avLst/>
+          </a:prstGeom>
+          <a:noFill/>
+          <a:ln/>
+        </p:spPr>
+        <p:txBody>
+          <a:bodyPr wrap="square" lIns="0" tIns="0" rIns="0" bIns="0" rtlCol="0" anchor="ctr"/>
+          <a:lstStyle/>
+          <a:p>
+            <a:pPr indent="0" marL="0">
+              <a:lnSpc>
+                <a:spcPts val="2000"/>
+              </a:lnSpc>
+              <a:buNone/>
+            </a:pPr>
+            <a:r>
+              <a:rPr lang="en-US" sz="1350" dirty="0">
+                <a:solidFill>
+                  <a:srgbClr val="C7CFD8"/>
+                </a:solidFill>
+                <a:latin typeface="Calibri" pitchFamily="34" charset="0"/>
+                <a:ea typeface="Calibri" pitchFamily="34" charset="-122"/>
+                <a:cs typeface="Calibri" pitchFamily="34" charset="-120"/>
+              </a:rPr>
+              <a:t>Оптимум заданной метрики — момент, когда валюта получателя дороже, чем в 99 % дней квартала, и допустимого текста для него не существует. </a:t>
+            </a:r>
+            <a:pPr indent="0" marL="0">
+              <a:lnSpc>
+                <a:spcPts val="2000"/>
+              </a:lnSpc>
+              <a:buNone/>
+            </a:pPr>
+            <a:r>
+              <a:rPr lang="en-US" sz="1350" b="1" dirty="0">
+                <a:solidFill>
+                  <a:srgbClr val="FFFFFF"/>
+                </a:solidFill>
+                <a:latin typeface="Calibri" pitchFamily="34" charset="0"/>
+                <a:ea typeface="Calibri" pitchFamily="34" charset="-122"/>
+                <a:cs typeface="Calibri" pitchFamily="34" charset="-120"/>
+              </a:rPr>
+              <a:t>Единственное состояние со значимой достижимой выгодой означает «не жди», а не «сейчас выгодно».</a:t>
+            </a:r>
+            <a:endParaRPr lang="en-US" sz="1350" dirty="0"/>
+          </a:p>
+        </p:txBody>
+      </p:sp>
+      <p:sp>
+        <p:nvSpPr>
+          <p:cNvPr id="6" name="Shape 4"/>
+          <p:cNvSpPr/>
+          <p:nvPr/>
+        </p:nvSpPr>
+        <p:spPr>
+          <a:xfrm>
+            <a:off x="640080" y="3703320"/>
+            <a:ext cx="3511296" cy="2148840"/>
+          </a:xfrm>
+          <a:prstGeom prst="roundRect">
+            <a:avLst>
+              <a:gd name="adj" fmla="val 2553"/>
+            </a:avLst>
+          </a:prstGeom>
+          <a:solidFill>
+            <a:srgbClr val="243040"/>
+          </a:solidFill>
+          <a:ln/>
+        </p:spPr>
+      </p:sp>
+      <p:sp>
+        <p:nvSpPr>
+          <p:cNvPr id="7" name="Text 5"/>
+          <p:cNvSpPr txBox="1"/>
+          <p:nvPr/>
+        </p:nvSpPr>
+        <p:spPr>
+          <a:xfrm>
+            <a:off x="896112" y="3877056"/>
+            <a:ext cx="548640" cy="365760"/>
+          </a:xfrm>
+          <a:prstGeom prst="rect">
+            <a:avLst/>
+          </a:prstGeom>
+          <a:noFill/>
+          <a:ln/>
+        </p:spPr>
+        <p:txBody>
+          <a:bodyPr wrap="square" lIns="0" tIns="0" rIns="0" bIns="0" rtlCol="0" anchor="ctr"/>
+          <a:lstStyle/>
+          <a:p>
+            <a:pPr indent="0" marL="0">
+              <a:buNone/>
+            </a:pPr>
+            <a:r>
+              <a:rPr lang="en-US" sz="2000" b="1" dirty="0">
+                <a:solidFill>
+                  <a:srgbClr val="9C5B12"/>
+                </a:solidFill>
+                <a:latin typeface="Cambria" pitchFamily="34" charset="0"/>
+                <a:ea typeface="Cambria" pitchFamily="34" charset="-122"/>
+                <a:cs typeface="Cambria" pitchFamily="34" charset="-120"/>
+              </a:rPr>
+              <a:t>1</a:t>
+            </a:r>
+            <a:endParaRPr lang="en-US" sz="2000" dirty="0"/>
+          </a:p>
+        </p:txBody>
+      </p:sp>
+      <p:sp>
+        <p:nvSpPr>
+          <p:cNvPr id="8" name="Text 6"/>
+          <p:cNvSpPr txBox="1"/>
+          <p:nvPr/>
+        </p:nvSpPr>
+        <p:spPr>
+          <a:xfrm>
+            <a:off x="896112" y="4297680"/>
+            <a:ext cx="2999232" cy="384048"/>
+          </a:xfrm>
+          <a:prstGeom prst="rect">
+            <a:avLst/>
+          </a:prstGeom>
+          <a:noFill/>
+          <a:ln/>
+        </p:spPr>
+        <p:txBody>
+          <a:bodyPr wrap="square" lIns="0" tIns="0" rIns="0" bIns="0" rtlCol="0" anchor="ctr"/>
+          <a:lstStyle/>
+          <a:p>
+            <a:pPr indent="0" marL="0">
+              <a:buNone/>
+            </a:pPr>
+            <a:r>
+              <a:rPr lang="en-US" sz="1400" b="1" dirty="0">
+                <a:solidFill>
+                  <a:srgbClr val="FFFFFF"/>
+                </a:solidFill>
+                <a:latin typeface="Cambria" pitchFamily="34" charset="0"/>
+                <a:ea typeface="Cambria" pitchFamily="34" charset="-122"/>
+                <a:cs typeface="Cambria" pitchFamily="34" charset="-120"/>
+              </a:rPr>
+              <a:t>Позиция по метрике</a:t>
+            </a:r>
+            <a:endParaRPr lang="en-US" sz="1400" dirty="0"/>
+          </a:p>
+        </p:txBody>
+      </p:sp>
+      <p:sp>
+        <p:nvSpPr>
+          <p:cNvPr id="9" name="Text 7"/>
+          <p:cNvSpPr txBox="1"/>
+          <p:nvPr/>
+        </p:nvSpPr>
+        <p:spPr>
+          <a:xfrm>
+            <a:off x="896112" y="4718304"/>
+            <a:ext cx="2999232" cy="969264"/>
+          </a:xfrm>
+          <a:prstGeom prst="rect">
+            <a:avLst/>
+          </a:prstGeom>
+          <a:noFill/>
+          <a:ln/>
+        </p:spPr>
+        <p:txBody>
+          <a:bodyPr wrap="square" lIns="0" tIns="0" rIns="0" bIns="0" rtlCol="0" anchor="ctr"/>
+          <a:lstStyle/>
+          <a:p>
+            <a:pPr indent="0" marL="0">
+              <a:lnSpc>
+                <a:spcPts val="1500"/>
+              </a:lnSpc>
+              <a:buNone/>
+            </a:pPr>
+            <a:r>
+              <a:rPr lang="en-US" sz="1100" dirty="0">
+                <a:solidFill>
+                  <a:srgbClr val="C7CFD8"/>
+                </a:solidFill>
+                <a:latin typeface="Calibri" pitchFamily="34" charset="0"/>
+                <a:ea typeface="Calibri" pitchFamily="34" charset="-122"/>
+                <a:cs typeface="Calibri" pitchFamily="34" charset="-120"/>
+              </a:rPr>
+              <a:t>Оставляем «выгоду момента» ±h как техническую или заменяем достижимой половиной? От этого зависит, какой сигнал оптимизируется.</a:t>
+            </a:r>
+            <a:endParaRPr lang="en-US" sz="1100" dirty="0"/>
+          </a:p>
+        </p:txBody>
+      </p:sp>
+      <p:sp>
+        <p:nvSpPr>
+          <p:cNvPr id="10" name="Shape 8"/>
+          <p:cNvSpPr/>
+          <p:nvPr/>
+        </p:nvSpPr>
+        <p:spPr>
+          <a:xfrm>
+            <a:off x="4325112" y="3703320"/>
+            <a:ext cx="3511296" cy="2148840"/>
+          </a:xfrm>
+          <a:prstGeom prst="roundRect">
+            <a:avLst>
+              <a:gd name="adj" fmla="val 2553"/>
+            </a:avLst>
+          </a:prstGeom>
+          <a:solidFill>
+            <a:srgbClr val="243040"/>
+          </a:solidFill>
+          <a:ln/>
+        </p:spPr>
+      </p:sp>
+      <p:sp>
+        <p:nvSpPr>
+          <p:cNvPr id="11" name="Text 9"/>
+          <p:cNvSpPr txBox="1"/>
+          <p:nvPr/>
+        </p:nvSpPr>
+        <p:spPr>
+          <a:xfrm>
+            <a:off x="4581144" y="3877056"/>
+            <a:ext cx="548640" cy="365760"/>
+          </a:xfrm>
+          <a:prstGeom prst="rect">
+            <a:avLst/>
+          </a:prstGeom>
+          <a:noFill/>
+          <a:ln/>
+        </p:spPr>
+        <p:txBody>
+          <a:bodyPr wrap="square" lIns="0" tIns="0" rIns="0" bIns="0" rtlCol="0" anchor="ctr"/>
+          <a:lstStyle/>
+          <a:p>
+            <a:pPr indent="0" marL="0">
+              <a:buNone/>
+            </a:pPr>
+            <a:r>
+              <a:rPr lang="en-US" sz="2000" b="1" dirty="0">
+                <a:solidFill>
+                  <a:srgbClr val="9C5B12"/>
+                </a:solidFill>
+                <a:latin typeface="Cambria" pitchFamily="34" charset="0"/>
+                <a:ea typeface="Cambria" pitchFamily="34" charset="-122"/>
+                <a:cs typeface="Cambria" pitchFamily="34" charset="-120"/>
+              </a:rPr>
+              <a:t>2</a:t>
+            </a:r>
+            <a:endParaRPr lang="en-US" sz="2000" dirty="0"/>
+          </a:p>
+        </p:txBody>
+      </p:sp>
+      <p:sp>
+        <p:nvSpPr>
+          <p:cNvPr id="12" name="Text 10"/>
+          <p:cNvSpPr txBox="1"/>
+          <p:nvPr/>
+        </p:nvSpPr>
+        <p:spPr>
+          <a:xfrm>
+            <a:off x="4581144" y="4297680"/>
+            <a:ext cx="2999232" cy="384048"/>
+          </a:xfrm>
+          <a:prstGeom prst="rect">
+            <a:avLst/>
+          </a:prstGeom>
+          <a:noFill/>
+          <a:ln/>
+        </p:spPr>
+        <p:txBody>
+          <a:bodyPr wrap="square" lIns="0" tIns="0" rIns="0" bIns="0" rtlCol="0" anchor="ctr"/>
+          <a:lstStyle/>
+          <a:p>
+            <a:pPr indent="0" marL="0">
+              <a:buNone/>
+            </a:pPr>
+            <a:r>
+              <a:rPr lang="en-US" sz="1400" b="1" dirty="0">
+                <a:solidFill>
+                  <a:srgbClr val="FFFFFF"/>
+                </a:solidFill>
+                <a:latin typeface="Cambria" pitchFamily="34" charset="0"/>
+                <a:ea typeface="Cambria" pitchFamily="34" charset="-122"/>
+                <a:cs typeface="Cambria" pitchFamily="34" charset="-120"/>
+              </a:rPr>
+              <a:t>Доля коммуникационного лимита</a:t>
+            </a:r>
+            <a:endParaRPr lang="en-US" sz="1400" dirty="0"/>
+          </a:p>
+        </p:txBody>
+      </p:sp>
+      <p:sp>
+        <p:nvSpPr>
+          <p:cNvPr id="13" name="Text 11"/>
+          <p:cNvSpPr txBox="1"/>
+          <p:nvPr/>
+        </p:nvSpPr>
+        <p:spPr>
+          <a:xfrm>
+            <a:off x="4581144" y="4718304"/>
+            <a:ext cx="2999232" cy="969264"/>
+          </a:xfrm>
+          <a:prstGeom prst="rect">
+            <a:avLst/>
+          </a:prstGeom>
+          <a:noFill/>
+          <a:ln/>
+        </p:spPr>
+        <p:txBody>
+          <a:bodyPr wrap="square" lIns="0" tIns="0" rIns="0" bIns="0" rtlCol="0" anchor="ctr"/>
+          <a:lstStyle/>
+          <a:p>
+            <a:pPr indent="0" marL="0">
+              <a:lnSpc>
+                <a:spcPts val="1500"/>
+              </a:lnSpc>
+              <a:buNone/>
+            </a:pPr>
+            <a:r>
+              <a:rPr lang="en-US" sz="1100" dirty="0">
+                <a:solidFill>
+                  <a:srgbClr val="C7CFD8"/>
+                </a:solidFill>
+                <a:latin typeface="Calibri" pitchFamily="34" charset="0"/>
+                <a:ea typeface="Calibri" pitchFamily="34" charset="-122"/>
+                <a:cs typeface="Calibri" pitchFamily="34" charset="-120"/>
+              </a:rPr>
+              <a:t>Сколько пушей на клиента в месяц продукт может занять? Полоса 1–2 в неделю на коридор из данных не выполняется.</a:t>
+            </a:r>
+            <a:endParaRPr lang="en-US" sz="1100" dirty="0"/>
+          </a:p>
+        </p:txBody>
+      </p:sp>
+      <p:sp>
+        <p:nvSpPr>
+          <p:cNvPr id="14" name="Shape 12"/>
+          <p:cNvSpPr/>
+          <p:nvPr/>
+        </p:nvSpPr>
+        <p:spPr>
+          <a:xfrm>
+            <a:off x="8010144" y="3703320"/>
+            <a:ext cx="3511296" cy="2148840"/>
+          </a:xfrm>
+          <a:prstGeom prst="roundRect">
+            <a:avLst>
+              <a:gd name="adj" fmla="val 2553"/>
+            </a:avLst>
+          </a:prstGeom>
+          <a:solidFill>
+            <a:srgbClr val="243040"/>
+          </a:solidFill>
+          <a:ln/>
+        </p:spPr>
+      </p:sp>
+      <p:sp>
+        <p:nvSpPr>
+          <p:cNvPr id="15" name="Text 13"/>
+          <p:cNvSpPr txBox="1"/>
+          <p:nvPr/>
+        </p:nvSpPr>
+        <p:spPr>
+          <a:xfrm>
+            <a:off x="8266176" y="3877056"/>
+            <a:ext cx="548640" cy="365760"/>
+          </a:xfrm>
+          <a:prstGeom prst="rect">
+            <a:avLst/>
+          </a:prstGeom>
+          <a:noFill/>
+          <a:ln/>
+        </p:spPr>
+        <p:txBody>
+          <a:bodyPr wrap="square" lIns="0" tIns="0" rIns="0" bIns="0" rtlCol="0" anchor="ctr"/>
+          <a:lstStyle/>
+          <a:p>
+            <a:pPr indent="0" marL="0">
+              <a:buNone/>
+            </a:pPr>
+            <a:r>
+              <a:rPr lang="en-US" sz="2000" b="1" dirty="0">
+                <a:solidFill>
+                  <a:srgbClr val="9C5B12"/>
+                </a:solidFill>
+                <a:latin typeface="Cambria" pitchFamily="34" charset="0"/>
+                <a:ea typeface="Cambria" pitchFamily="34" charset="-122"/>
+                <a:cs typeface="Cambria" pitchFamily="34" charset="-120"/>
+              </a:rPr>
+              <a:t>3</a:t>
+            </a:r>
+            <a:endParaRPr lang="en-US" sz="2000" dirty="0"/>
+          </a:p>
+        </p:txBody>
+      </p:sp>
+      <p:sp>
+        <p:nvSpPr>
+          <p:cNvPr id="16" name="Text 14"/>
+          <p:cNvSpPr txBox="1"/>
+          <p:nvPr/>
+        </p:nvSpPr>
+        <p:spPr>
+          <a:xfrm>
+            <a:off x="8266176" y="4297680"/>
+            <a:ext cx="2999232" cy="384048"/>
+          </a:xfrm>
+          <a:prstGeom prst="rect">
+            <a:avLst/>
+          </a:prstGeom>
+          <a:noFill/>
+          <a:ln/>
+        </p:spPr>
+        <p:txBody>
+          <a:bodyPr wrap="square" lIns="0" tIns="0" rIns="0" bIns="0" rtlCol="0" anchor="ctr"/>
+          <a:lstStyle/>
+          <a:p>
+            <a:pPr indent="0" marL="0">
+              <a:buNone/>
+            </a:pPr>
+            <a:r>
+              <a:rPr lang="en-US" sz="1400" b="1" dirty="0">
+                <a:solidFill>
+                  <a:srgbClr val="FFFFFF"/>
+                </a:solidFill>
+                <a:latin typeface="Cambria" pitchFamily="34" charset="0"/>
+                <a:ea typeface="Cambria" pitchFamily="34" charset="-122"/>
+                <a:cs typeface="Cambria" pitchFamily="34" charset="-120"/>
+              </a:rPr>
+              <a:t>Курс и данные клиентов</a:t>
+            </a:r>
+            <a:endParaRPr lang="en-US" sz="1400" dirty="0"/>
+          </a:p>
+        </p:txBody>
+      </p:sp>
+      <p:sp>
+        <p:nvSpPr>
+          <p:cNvPr id="17" name="Text 15"/>
+          <p:cNvSpPr txBox="1"/>
+          <p:nvPr/>
+        </p:nvSpPr>
+        <p:spPr>
+          <a:xfrm>
+            <a:off x="8266176" y="4718304"/>
+            <a:ext cx="2999232" cy="969264"/>
+          </a:xfrm>
+          <a:prstGeom prst="rect">
+            <a:avLst/>
+          </a:prstGeom>
+          <a:noFill/>
+          <a:ln/>
+        </p:spPr>
+        <p:txBody>
+          <a:bodyPr wrap="square" lIns="0" tIns="0" rIns="0" bIns="0" rtlCol="0" anchor="ctr"/>
+          <a:lstStyle/>
+          <a:p>
+            <a:pPr indent="0" marL="0">
+              <a:lnSpc>
+                <a:spcPts val="1500"/>
+              </a:lnSpc>
+              <a:buNone/>
+            </a:pPr>
+            <a:r>
+              <a:rPr lang="en-US" sz="1100" dirty="0">
+                <a:solidFill>
+                  <a:srgbClr val="C7CFD8"/>
+                </a:solidFill>
+                <a:latin typeface="Calibri" pitchFamily="34" charset="0"/>
+                <a:ea typeface="Calibri" pitchFamily="34" charset="-122"/>
+                <a:cs typeface="Calibri" pitchFamily="34" charset="-120"/>
+              </a:rPr>
+              <a:t>Нужен курс приложения вместо ЦБ и доля клиентов, способных отложить перевод. Без второго пилот покажет ноль из-за разбавления.</a:t>
+            </a:r>
+            <a:endParaRPr lang="en-US" sz="1100" dirty="0"/>
+          </a:p>
+        </p:txBody>
+      </p:sp>
+      <p:sp>
+        <p:nvSpPr>
+          <p:cNvPr id="18" name="Text 16"/>
+          <p:cNvSpPr txBox="1"/>
+          <p:nvPr/>
+        </p:nvSpPr>
+        <p:spPr>
+          <a:xfrm>
+            <a:off x="640080" y="6144768"/>
+            <a:ext cx="10881360" cy="292608"/>
+          </a:xfrm>
+          <a:prstGeom prst="rect">
+            <a:avLst/>
+          </a:prstGeom>
+          <a:noFill/>
+          <a:ln/>
+        </p:spPr>
+        <p:txBody>
+          <a:bodyPr wrap="square" lIns="0" tIns="0" rIns="0" bIns="0" rtlCol="0" anchor="ctr"/>
+          <a:lstStyle/>
+          <a:p>
+            <a:pPr indent="0" marL="0">
+              <a:buNone/>
+            </a:pPr>
+            <a:r>
+              <a:rPr lang="en-US" sz="1150" dirty="0">
+                <a:solidFill>
+                  <a:srgbClr val="9C5B12"/>
+                </a:solidFill>
+                <a:latin typeface="Calibri" pitchFamily="34" charset="0"/>
+                <a:ea typeface="Calibri" pitchFamily="34" charset="-122"/>
+                <a:cs typeface="Calibri" pitchFamily="34" charset="-120"/>
+              </a:rPr>
+              <a:t>github.com/tarma3v/international_transfers_signals  ·  44 автотеста  ·  ворота на заглядывание вперёд пройдены</a:t>
+            </a:r>
+            <a:endParaRPr lang="en-US" sz="1150" dirty="0"/>
           </a:p>
         </p:txBody>
       </p:sp>
@@ -5097,7 +5961,7 @@
                 <a:ea typeface="Calibri" pitchFamily="34" charset="-122"/>
                 <a:cs typeface="Calibri" pitchFamily="34" charset="-120"/>
               </a:rPr>
-              <a:t>Разброс курса внутри месяца — 600–660 базисных пунктов. На переводе 30 000 ₽ это около 1 800–2 000 ₽ разницы между лучшим и худшим днём. Но забрать её целиком нельзя: клиент привязан к дате зарплаты.</a:t>
+              <a:t>Медианный разброс курса внутри месяца — 440–520 базисных пунктов. На переводе 30 000 ₽ это около 1 300–1 600 ₽ разницы между лучшим и худшим днём. Но забрать её целиком нельзя: клиент привязан к дате зарплаты.</a:t>
             </a:r>
             <a:endParaRPr lang="en-US" sz="1450" dirty="0"/>
           </a:p>
@@ -5158,7 +6022,7 @@
                 <a:ea typeface="Cambria" pitchFamily="34" charset="-122"/>
                 <a:cs typeface="Cambria" pitchFamily="34" charset="-120"/>
               </a:rPr>
-              <a:t>36–40 %</a:t>
+              <a:t>42–44 %</a:t>
             </a:r>
             <a:endParaRPr lang="en-US" sz="3700" dirty="0"/>
           </a:p>
@@ -5281,7 +6145,7 @@
                 <a:ea typeface="Cambria" pitchFamily="34" charset="-122"/>
                 <a:cs typeface="Cambria" pitchFamily="34" charset="-120"/>
               </a:rPr>
-              <a:t>22–30 б. п.</a:t>
+              <a:t>+143 б. п.</a:t>
             </a:r>
             <a:endParaRPr lang="en-US" sz="3700" dirty="0"/>
           </a:p>
@@ -5323,7 +6187,7 @@
                 <a:ea typeface="Calibri" pitchFamily="34" charset="-122"/>
                 <a:cs typeface="Calibri" pitchFamily="34" charset="-120"/>
               </a:rPr>
-              <a:t>честный потолок выгоды</a:t>
+              <a:t>потолок всеведущего оракула</a:t>
             </a:r>
             <a:endParaRPr lang="en-US" sz="1200" dirty="0"/>
           </a:p>
@@ -5343,7 +6207,7 @@
                 <a:ea typeface="Calibri" pitchFamily="34" charset="-122"/>
                 <a:cs typeface="Calibri" pitchFamily="34" charset="-120"/>
               </a:rPr>
-              <a:t>в реальном окне клиента</a:t>
+              <a:t>в окне клиента — берём 8–12 %</a:t>
             </a:r>
             <a:endParaRPr lang="en-US" sz="1200" dirty="0"/>
           </a:p>
@@ -5672,7 +6536,7 @@
                 <a:ea typeface="Calibri" pitchFamily="34" charset="-122"/>
                 <a:cs typeface="Calibri" pitchFamily="34" charset="-120"/>
               </a:rPr>
-              <a:t>Пересылают зарплату — привязаны к дате, ждать не могут, видят 36–40 % возможности. Переводят на траты — могут ждать. Вся измеримая ценность продукта сосредоточена во втором сегменте.</a:t>
+              <a:t>Пересылают зарплату — привязаны к дате, ждать не могут, видят 42–44 % возможности. Переводят на траты — могут ждать. Вся измеримая ценность продукта сосредоточена во втором сегменте.</a:t>
             </a:r>
             <a:endParaRPr lang="en-US" sz="1250" dirty="0"/>
           </a:p>
@@ -7005,7 +7869,7 @@
                 <a:ea typeface="Calibri" pitchFamily="34" charset="-122"/>
                 <a:cs typeface="Calibri" pitchFamily="34" charset="-120"/>
               </a:rPr>
-              <a:t>Мы обучили модель под метрику заказчика и сравнили с однострочным правилом при равной частоте срабатываний.</a:t>
+              <a:t>Правило pct_range_90 &gt;= 95 обгоняет все десять конфигураций по достижимой выгоде: +63 против +24 базисных пунктов,</a:t>
             </a:r>
             <a:endParaRPr lang="en-US" sz="1500" dirty="0"/>
           </a:p>
@@ -7025,7 +7889,7 @@
                 <a:ea typeface="Calibri" pitchFamily="34" charset="-122"/>
                 <a:cs typeface="Calibri" pitchFamily="34" charset="-120"/>
               </a:rPr>
-              <a:t>Они неразличимы: lift 1,30 против 1,30. Лучший результат по метрике даёт фиксированный порог — 1,42.</a:t>
+              <a:t>и по lift кейса тоже — 1,39 против 1,35, хотя на честном знаменателе этот lift падает до 1,00.</a:t>
             </a:r>
             <a:endParaRPr lang="en-US" sz="1500" dirty="0"/>
           </a:p>
@@ -7045,7 +7909,7 @@
                 <a:ea typeface="Calibri" pitchFamily="34" charset="-122"/>
                 <a:cs typeface="Calibri" pitchFamily="34" charset="-120"/>
               </a:rPr>
-              <a:t>Выгода для семьи при этом +18 против +17 базисных пунктов при потолке +143 и интервалах, пересекающих ноль.</a:t>
+              <a:t>И у максимума нет допустимого текста: он срабатывает на 99-м процентиле квартального диапазона.</a:t>
             </a:r>
             <a:endParaRPr lang="en-US" sz="1500" dirty="0"/>
           </a:p>
@@ -7228,12 +8092,12 @@
           <a:p>
             <a:pPr indent="0" marL="0">
               <a:lnSpc>
-                <a:spcPts val="1900"/>
+                <a:spcPts val="1800"/>
               </a:lnSpc>
               <a:buNone/>
             </a:pPr>
             <a:r>
-              <a:rPr lang="en-US" sz="1300" b="1" dirty="0">
+              <a:rPr lang="en-US" sz="1250" dirty="0">
                 <a:solidFill>
                   <a:srgbClr val="4E5966"/>
                 </a:solidFill>
@@ -7241,16 +8105,16 @@
                 <a:ea typeface="Calibri" pitchFamily="34" charset="-122"/>
                 <a:cs typeface="Calibri" pitchFamily="34" charset="-120"/>
               </a:rPr>
-              <a:t>Слева — что чувствует клиент. </a:t>
+              <a:t>Серые столбцы — симметричная «выгода момента» из ТЗ: дёшево +59, дорого −55. Оранжевые — её достижимая половина: знак переворачивается. </a:t>
             </a:r>
             <a:pPr indent="0" marL="0">
               <a:lnSpc>
-                <a:spcPts val="1900"/>
+                <a:spcPts val="1800"/>
               </a:lnSpc>
               <a:buNone/>
             </a:pPr>
             <a:r>
-              <a:rPr lang="en-US" sz="1300" dirty="0">
+              <a:rPr lang="en-US" sz="1250" b="1" dirty="0">
                 <a:solidFill>
                   <a:srgbClr val="4E5966"/>
                 </a:solidFill>
@@ -7258,9 +8122,9 @@
                 <a:ea typeface="Calibri" pitchFamily="34" charset="-122"/>
                 <a:cs typeface="Calibri" pitchFamily="34" charset="-120"/>
               </a:rPr>
-              <a:t>Справа — что показывает метрика кейса. Попадание растёт монотонно от дешёвых дней к дорогим: 24 % → 38 %. Ровно против выгоды.</a:t>
-            </a:r>
-            <a:endParaRPr lang="en-US" sz="1300" dirty="0"/>
+              <a:t>Справа — метрика кейса: попадание растёт от 24 % к 40 %, то есть согласно с достижимой выгодой и против симметричной.</a:t>
+            </a:r>
+            <a:endParaRPr lang="en-US" sz="1250" dirty="0"/>
           </a:p>
         </p:txBody>
       </p:sp>
@@ -7297,7 +8161,7 @@
                 <a:ea typeface="Calibri" pitchFamily="34" charset="-122"/>
                 <a:cs typeface="Calibri" pitchFamily="34" charset="-120"/>
               </a:rPr>
-              <a:t>Данные ЦБ 2019–2026, пять коридоров, h = 5. Доверительные интервалы краёв не пересекают ноль.</a:t>
+              <a:t>Данные ЦБ 2019–2026, пять коридоров, h = 5. По достижимой выгоде ноль не пересекает только край «дорого»: +48 б. п., ДИ [+22; +75]. У края «дёшево» −1 б. п., ДИ [−26; +24]. На одном тестовом периоде (с 2021) те же бакеты дают −3 / −8 / +51 б. п. [+23; +77] — знаки и порядок сохраняются.</a:t>
             </a:r>
             <a:endParaRPr lang="en-US" sz="1050" dirty="0"/>
           </a:p>
@@ -7583,7 +8447,7 @@
                 <a:ea typeface="Calibri" pitchFamily="34" charset="-122"/>
                 <a:cs typeface="Calibri" pitchFamily="34" charset="-120"/>
               </a:rPr>
-              <a:t>91 % этого — падение, которое уже случилось. Клиент его забрать не может.</a:t>
+              <a:t>Вся положительная выгода — падение, которое уже случилось: обратная половина +217 б. п.</a:t>
             </a:r>
             <a:endParaRPr lang="en-US" sz="1250" dirty="0"/>
           </a:p>
@@ -7612,7 +8476,7 @@
                 <a:ea typeface="Calibri" pitchFamily="34" charset="-122"/>
                 <a:cs typeface="Calibri" pitchFamily="34" charset="-120"/>
               </a:rPr>
-              <a:t>Остаётся −21 б. п., и доверительный интервал [−36; −7] целиком ниже нуля.</a:t>
+              <a:t>Вперёд остаётся −21 б. п. Причина: после падения трёх дней данные говорят «подожди ещё», а индикатор говорит «переводи».</a:t>
             </a:r>
             <a:endParaRPr lang="en-US" sz="1250" dirty="0"/>
           </a:p>
@@ -7919,7 +8783,7 @@
                 <a:ea typeface="Cambria" pitchFamily="34" charset="-122"/>
                 <a:cs typeface="Cambria" pitchFamily="34" charset="-120"/>
               </a:rPr>
-              <a:t>+28 б. п.</a:t>
+              <a:t>+63 б. п.</a:t>
             </a:r>
             <a:endParaRPr lang="en-US" sz="3700" dirty="0"/>
           </a:p>
@@ -7981,7 +8845,7 @@
                 <a:ea typeface="Calibri" pitchFamily="34" charset="-122"/>
                 <a:cs typeface="Calibri" pitchFamily="34" charset="-120"/>
               </a:rPr>
-              <a:t>модели на h = 5</a:t>
+              <a:t>однострочного правила</a:t>
             </a:r>
             <a:endParaRPr lang="en-US" sz="1200" dirty="0"/>
           </a:p>
@@ -8416,7 +9280,7 @@
                 <a:ea typeface="Calibri" pitchFamily="34" charset="-122"/>
                 <a:cs typeface="Calibri" pitchFamily="34" charset="-120"/>
               </a:rPr>
-              <a:t>79 признаков</a:t>
+              <a:t>83 признака</a:t>
             </a:r>
             <a:endParaRPr lang="en-US" sz="1050" dirty="0"/>
           </a:p>
@@ -9145,7 +10009,7 @@
                 <a:ea typeface="Calibri" pitchFamily="34" charset="-122"/>
                 <a:cs typeface="Calibri" pitchFamily="34" charset="-120"/>
               </a:rPr>
-              <a:t>Загрузчик, 79 признаков, доказательство честности, 16 автотестов, walk-forward с очисткой, пять моделей, отбор признаков, испытания результата.</a:t>
+              <a:t>Загрузчик, 83 признака, доказательство честности, 44 автотеста, walk-forward с очисткой в публикациях, пять моделей, отбор признаков, испытания результата, signals_as_of(T), разбивка по коридорам.</a:t>
             </a:r>
             <a:endParaRPr lang="en-US" sz="1250" dirty="0"/>
           </a:p>
@@ -9248,7 +10112,7 @@
                 <a:ea typeface="Calibri" pitchFamily="34" charset="-122"/>
                 <a:cs typeface="Calibri" pitchFamily="34" charset="-120"/>
               </a:rPr>
-              <a:t>Публичный signals_as_of(T), signals.csv, правило комбинирования и добор до полосы частоты, тексты уведомлений, прототип экрана, дизайн пилота.</a:t>
+              <a:t>signals.csv в финальном формате, правило комбинирования и добор до полосы частоты, тексты уведомлений, прототип экрана, дизайн пилота.</a:t>
             </a:r>
             <a:endParaRPr lang="en-US" sz="1250" dirty="0"/>
           </a:p>
@@ -9581,7 +10445,7 @@
                 <a:ea typeface="Cambria" pitchFamily="34" charset="-122"/>
                 <a:cs typeface="Cambria" pitchFamily="34" charset="-120"/>
               </a:rPr>
-              <a:t>Порча будущего</a:t>
+              <a:t>Две порчи будущего</a:t>
             </a:r>
             <a:endParaRPr lang="en-US" sz="1550" dirty="0"/>
           </a:p>
@@ -9623,7 +10487,7 @@
                 <a:ea typeface="Calibri" pitchFamily="34" charset="-122"/>
                 <a:cs typeface="Calibri" pitchFamily="34" charset="-120"/>
               </a:rPr>
-              <a:t>Все значения после даты среза умножаются на 3. Признаки в прошлом обязаны совпасть побитово. Ноль расхождений из 79 на двух срезах.</a:t>
+              <a:t>Масштаб ×3 и перестановка после даты среза. Признаки в прошлом обязаны совпасть побитово. Ноль расхождений на двух срезах. Две порчи, потому что масштаб слеп к знакам.</a:t>
             </a:r>
             <a:endParaRPr lang="en-US" sz="1250" dirty="0"/>
           </a:p>
@@ -9726,7 +10590,7 @@
                 <a:ea typeface="Calibri" pitchFamily="34" charset="-122"/>
                 <a:cs typeface="Calibri" pitchFamily="34" charset="-120"/>
               </a:rPr>
-              <a:t>В срез подставляется реальная ошибка — сдвиг на 5 дней вперёд. Проверка обязана её поймать.</a:t>
+              <a:t>В срез подставляется реальная ошибка — сдвиг на 5 дней вперёд. Проверка обязана её поймать. Плюс signals_as_of(T): срез на любую дату для проверки извне.</a:t>
             </a:r>
             <a:endParaRPr lang="en-US" sz="1250" dirty="0"/>
           </a:p>
@@ -9787,7 +10651,7 @@
                 <a:ea typeface="Cambria" pitchFamily="34" charset="-122"/>
                 <a:cs typeface="Cambria" pitchFamily="34" charset="-120"/>
               </a:rPr>
-              <a:t>Эпизод, который стоит рассказать</a:t>
+              <a:t>Почему проверка проверяет саму себя</a:t>
             </a:r>
             <a:endParaRPr lang="en-US" sz="1600" dirty="0"/>
           </a:p>
@@ -9829,7 +10693,7 @@
                 <a:ea typeface="Calibri" pitchFamily="34" charset="-122"/>
                 <a:cs typeface="Calibri" pitchFamily="34" charset="-120"/>
               </a:rPr>
-              <a:t>Первая версия проверки не работала: подставная утечка читала массив, захваченный до порчи, и проверка «проходила» всегда. Мы это обнаружили и исправили.</a:t>
+              <a:t>Ворота сначала доказывают, что УМЕЮТ ловить утечку: в срез подставляется реальная ошибка, и проверка обязана её поймать. Без этого шага вердикт «утечки нет» ничего не стоит — проверка, читающая массив, захваченный до порчи, «проходит» всегда.</a:t>
             </a:r>
             <a:endParaRPr lang="en-US" sz="1300" dirty="0"/>
           </a:p>
@@ -10487,7 +11351,7 @@
                           <a:ea typeface="Calibri" pitchFamily="34" charset="-122"/>
                           <a:cs typeface="Calibri" pitchFamily="34" charset="-120"/>
                         </a:rPr>
-                        <a:t>0,81</a:t>
+                        <a:t>0,79</a:t>
                       </a:r>
                       <a:endParaRPr lang="en-US" sz="1200" dirty="0">
                         <a:latin typeface="Calibri" charset="0"/>
@@ -10682,7 +11546,7 @@
                           <a:ea typeface="Calibri" pitchFamily="34" charset="-122"/>
                           <a:cs typeface="Calibri" pitchFamily="34" charset="-120"/>
                         </a:rPr>
-                        <a:t>[−36; −7]</a:t>
+                        <a:t>[−45; +3]</a:t>
                       </a:r>
                       <a:endParaRPr lang="en-US" sz="1200" dirty="0">
                         <a:latin typeface="Calibri" charset="0"/>
@@ -10814,7 +11678,7 @@
                           <a:ea typeface="Calibri" pitchFamily="34" charset="-122"/>
                           <a:cs typeface="Calibri" pitchFamily="34" charset="-120"/>
                         </a:rPr>
-                        <a:t>0,83</a:t>
+                        <a:t>0,81</a:t>
                       </a:r>
                       <a:endParaRPr lang="en-US" sz="1200" dirty="0">
                         <a:latin typeface="Calibri" charset="0"/>
@@ -11009,7 +11873,7 @@
                           <a:ea typeface="Calibri" pitchFamily="34" charset="-122"/>
                           <a:cs typeface="Calibri" pitchFamily="34" charset="-120"/>
                         </a:rPr>
-                        <a:t>[−16; +12]</a:t>
+                        <a:t>[−31; +26]</a:t>
                       </a:r>
                       <a:endParaRPr lang="en-US" sz="1200" dirty="0">
                         <a:latin typeface="Calibri" charset="0"/>
@@ -11141,7 +12005,7 @@
                           <a:ea typeface="Calibri" pitchFamily="34" charset="-122"/>
                           <a:cs typeface="Calibri" pitchFamily="34" charset="-120"/>
                         </a:rPr>
-                        <a:t>0,90</a:t>
+                        <a:t>0,87</a:t>
                       </a:r>
                       <a:endParaRPr lang="en-US" sz="1200" dirty="0">
                         <a:latin typeface="Calibri" charset="0"/>
@@ -11336,7 +12200,7 @@
                           <a:ea typeface="Calibri" pitchFamily="34" charset="-122"/>
                           <a:cs typeface="Calibri" pitchFamily="34" charset="-120"/>
                         </a:rPr>
-                        <a:t>[−7; +34]</a:t>
+                        <a:t>[−21; +51]</a:t>
                       </a:r>
                       <a:endParaRPr lang="en-US" sz="1200" dirty="0">
                         <a:latin typeface="Calibri" charset="0"/>
@@ -11468,7 +12332,7 @@
                           <a:ea typeface="Calibri" pitchFamily="34" charset="-122"/>
                           <a:cs typeface="Calibri" pitchFamily="34" charset="-120"/>
                         </a:rPr>
-                        <a:t>1,01</a:t>
+                        <a:t>0,98</a:t>
                       </a:r>
                       <a:endParaRPr lang="en-US" sz="1200" dirty="0">
                         <a:latin typeface="Calibri" charset="0"/>
@@ -11663,334 +12527,7 @@
                           <a:ea typeface="Calibri" pitchFamily="34" charset="-122"/>
                           <a:cs typeface="Calibri" pitchFamily="34" charset="-120"/>
                         </a:rPr>
-                        <a:t>[−27; +1]</a:t>
-                      </a:r>
-                      <a:endParaRPr lang="en-US" sz="1200" dirty="0">
-                        <a:latin typeface="Calibri" charset="0"/>
-                        <a:ea typeface="Calibri" charset="0"/>
-                        <a:cs typeface="Calibri" charset="0"/>
-                      </a:endParaRPr>
-                    </a:p>
-                  </a:txBody>
-                  <a:tcPr marL="91440" marR="91440" marT="45720" marB="45720" anchor="ctr">
-                    <a:lnL w="12700" cap="flat" cmpd="sng" algn="ctr">
-                      <a:solidFill>
-                        <a:srgbClr val="DDE3E9"/>
-                      </a:solidFill>
-                      <a:prstDash val="solid"/>
-                      <a:round/>
-                      <a:headEnd type="none" w="med" len="med"/>
-                      <a:tailEnd type="none" w="med" len="med"/>
-                    </a:lnL>
-                    <a:lnR w="12700" cap="flat" cmpd="sng" algn="ctr">
-                      <a:solidFill>
-                        <a:srgbClr val="DDE3E9"/>
-                      </a:solidFill>
-                      <a:prstDash val="solid"/>
-                      <a:round/>
-                      <a:headEnd type="none" w="med" len="med"/>
-                      <a:tailEnd type="none" w="med" len="med"/>
-                    </a:lnR>
-                    <a:lnT w="12700" cap="flat" cmpd="sng" algn="ctr">
-                      <a:solidFill>
-                        <a:srgbClr val="DDE3E9"/>
-                      </a:solidFill>
-                      <a:prstDash val="solid"/>
-                      <a:round/>
-                      <a:headEnd type="none" w="med" len="med"/>
-                      <a:tailEnd type="none" w="med" len="med"/>
-                    </a:lnT>
-                    <a:lnB w="12700" cap="flat" cmpd="sng" algn="ctr">
-                      <a:solidFill>
-                        <a:srgbClr val="DDE3E9"/>
-                      </a:solidFill>
-                      <a:prstDash val="solid"/>
-                      <a:round/>
-                      <a:headEnd type="none" w="med" len="med"/>
-                      <a:tailEnd type="none" w="med" len="med"/>
-                    </a:lnB>
-                  </a:tcPr>
-                </a:tc>
-              </a:tr>
-              <a:tr h="384048">
-                <a:tc>
-                  <a:txBody>
-                    <a:bodyPr/>
-                    <a:lstStyle/>
-                    <a:p>
-                      <a:pPr indent="0" marL="0">
-                        <a:buNone/>
-                      </a:pPr>
-                      <a:r>
-                        <a:rPr lang="en-US" sz="1200" i="1" dirty="0">
-                          <a:solidFill>
-                            <a:srgbClr val="6E7A88"/>
-                          </a:solidFill>
-                          <a:latin typeface="Calibri" pitchFamily="34" charset="0"/>
-                          <a:ea typeface="Calibri" pitchFamily="34" charset="-122"/>
-                          <a:cs typeface="Calibri" pitchFamily="34" charset="-120"/>
-                        </a:rPr>
-                        <a:t>контрпример: верхние 5 % диапазона</a:t>
-                      </a:r>
-                      <a:endParaRPr lang="en-US" sz="1200" dirty="0">
-                        <a:latin typeface="Calibri" charset="0"/>
-                        <a:ea typeface="Calibri" charset="0"/>
-                        <a:cs typeface="Calibri" charset="0"/>
-                      </a:endParaRPr>
-                    </a:p>
-                  </a:txBody>
-                  <a:tcPr marL="91440" marR="91440" marT="45720" marB="45720" anchor="ctr">
-                    <a:lnL w="12700" cap="flat" cmpd="sng" algn="ctr">
-                      <a:solidFill>
-                        <a:srgbClr val="DDE3E9"/>
-                      </a:solidFill>
-                      <a:prstDash val="solid"/>
-                      <a:round/>
-                      <a:headEnd type="none" w="med" len="med"/>
-                      <a:tailEnd type="none" w="med" len="med"/>
-                    </a:lnL>
-                    <a:lnR w="12700" cap="flat" cmpd="sng" algn="ctr">
-                      <a:solidFill>
-                        <a:srgbClr val="DDE3E9"/>
-                      </a:solidFill>
-                      <a:prstDash val="solid"/>
-                      <a:round/>
-                      <a:headEnd type="none" w="med" len="med"/>
-                      <a:tailEnd type="none" w="med" len="med"/>
-                    </a:lnR>
-                    <a:lnT w="12700" cap="flat" cmpd="sng" algn="ctr">
-                      <a:solidFill>
-                        <a:srgbClr val="DDE3E9"/>
-                      </a:solidFill>
-                      <a:prstDash val="solid"/>
-                      <a:round/>
-                      <a:headEnd type="none" w="med" len="med"/>
-                      <a:tailEnd type="none" w="med" len="med"/>
-                    </a:lnT>
-                    <a:lnB w="12700" cap="flat" cmpd="sng" algn="ctr">
-                      <a:solidFill>
-                        <a:srgbClr val="DDE3E9"/>
-                      </a:solidFill>
-                      <a:prstDash val="solid"/>
-                      <a:round/>
-                      <a:headEnd type="none" w="med" len="med"/>
-                      <a:tailEnd type="none" w="med" len="med"/>
-                    </a:lnB>
-                  </a:tcPr>
-                </a:tc>
-                <a:tc>
-                  <a:txBody>
-                    <a:bodyPr/>
-                    <a:lstStyle/>
-                    <a:p>
-                      <a:pPr algn="ctr" indent="0" marL="0">
-                        <a:buNone/>
-                      </a:pPr>
-                      <a:r>
-                        <a:rPr lang="en-US" sz="1200" i="1" dirty="0">
-                          <a:solidFill>
-                            <a:srgbClr val="6E7A88"/>
-                          </a:solidFill>
-                          <a:latin typeface="Calibri" pitchFamily="34" charset="0"/>
-                          <a:ea typeface="Calibri" pitchFamily="34" charset="-122"/>
-                          <a:cs typeface="Calibri" pitchFamily="34" charset="-120"/>
-                        </a:rPr>
-                        <a:t>1,42</a:t>
-                      </a:r>
-                      <a:endParaRPr lang="en-US" sz="1200" dirty="0">
-                        <a:latin typeface="Calibri" charset="0"/>
-                        <a:ea typeface="Calibri" charset="0"/>
-                        <a:cs typeface="Calibri" charset="0"/>
-                      </a:endParaRPr>
-                    </a:p>
-                  </a:txBody>
-                  <a:tcPr marL="91440" marR="91440" marT="45720" marB="45720" anchor="ctr">
-                    <a:lnL w="12700" cap="flat" cmpd="sng" algn="ctr">
-                      <a:solidFill>
-                        <a:srgbClr val="DDE3E9"/>
-                      </a:solidFill>
-                      <a:prstDash val="solid"/>
-                      <a:round/>
-                      <a:headEnd type="none" w="med" len="med"/>
-                      <a:tailEnd type="none" w="med" len="med"/>
-                    </a:lnL>
-                    <a:lnR w="12700" cap="flat" cmpd="sng" algn="ctr">
-                      <a:solidFill>
-                        <a:srgbClr val="DDE3E9"/>
-                      </a:solidFill>
-                      <a:prstDash val="solid"/>
-                      <a:round/>
-                      <a:headEnd type="none" w="med" len="med"/>
-                      <a:tailEnd type="none" w="med" len="med"/>
-                    </a:lnR>
-                    <a:lnT w="12700" cap="flat" cmpd="sng" algn="ctr">
-                      <a:solidFill>
-                        <a:srgbClr val="DDE3E9"/>
-                      </a:solidFill>
-                      <a:prstDash val="solid"/>
-                      <a:round/>
-                      <a:headEnd type="none" w="med" len="med"/>
-                      <a:tailEnd type="none" w="med" len="med"/>
-                    </a:lnT>
-                    <a:lnB w="12700" cap="flat" cmpd="sng" algn="ctr">
-                      <a:solidFill>
-                        <a:srgbClr val="DDE3E9"/>
-                      </a:solidFill>
-                      <a:prstDash val="solid"/>
-                      <a:round/>
-                      <a:headEnd type="none" w="med" len="med"/>
-                      <a:tailEnd type="none" w="med" len="med"/>
-                    </a:lnB>
-                  </a:tcPr>
-                </a:tc>
-                <a:tc>
-                  <a:txBody>
-                    <a:bodyPr/>
-                    <a:lstStyle/>
-                    <a:p>
-                      <a:pPr algn="ctr" indent="0" marL="0">
-                        <a:buNone/>
-                      </a:pPr>
-                      <a:r>
-                        <a:rPr lang="en-US" sz="1200" i="1" dirty="0">
-                          <a:solidFill>
-                            <a:srgbClr val="6E7A88"/>
-                          </a:solidFill>
-                          <a:latin typeface="Calibri" pitchFamily="34" charset="0"/>
-                          <a:ea typeface="Calibri" pitchFamily="34" charset="-122"/>
-                          <a:cs typeface="Calibri" pitchFamily="34" charset="-120"/>
-                        </a:rPr>
-                        <a:t>−60 б. п.</a:t>
-                      </a:r>
-                      <a:endParaRPr lang="en-US" sz="1200" dirty="0">
-                        <a:latin typeface="Calibri" charset="0"/>
-                        <a:ea typeface="Calibri" charset="0"/>
-                        <a:cs typeface="Calibri" charset="0"/>
-                      </a:endParaRPr>
-                    </a:p>
-                  </a:txBody>
-                  <a:tcPr marL="91440" marR="91440" marT="45720" marB="45720" anchor="ctr">
-                    <a:lnL w="12700" cap="flat" cmpd="sng" algn="ctr">
-                      <a:solidFill>
-                        <a:srgbClr val="DDE3E9"/>
-                      </a:solidFill>
-                      <a:prstDash val="solid"/>
-                      <a:round/>
-                      <a:headEnd type="none" w="med" len="med"/>
-                      <a:tailEnd type="none" w="med" len="med"/>
-                    </a:lnL>
-                    <a:lnR w="12700" cap="flat" cmpd="sng" algn="ctr">
-                      <a:solidFill>
-                        <a:srgbClr val="DDE3E9"/>
-                      </a:solidFill>
-                      <a:prstDash val="solid"/>
-                      <a:round/>
-                      <a:headEnd type="none" w="med" len="med"/>
-                      <a:tailEnd type="none" w="med" len="med"/>
-                    </a:lnR>
-                    <a:lnT w="12700" cap="flat" cmpd="sng" algn="ctr">
-                      <a:solidFill>
-                        <a:srgbClr val="DDE3E9"/>
-                      </a:solidFill>
-                      <a:prstDash val="solid"/>
-                      <a:round/>
-                      <a:headEnd type="none" w="med" len="med"/>
-                      <a:tailEnd type="none" w="med" len="med"/>
-                    </a:lnT>
-                    <a:lnB w="12700" cap="flat" cmpd="sng" algn="ctr">
-                      <a:solidFill>
-                        <a:srgbClr val="DDE3E9"/>
-                      </a:solidFill>
-                      <a:prstDash val="solid"/>
-                      <a:round/>
-                      <a:headEnd type="none" w="med" len="med"/>
-                      <a:tailEnd type="none" w="med" len="med"/>
-                    </a:lnB>
-                  </a:tcPr>
-                </a:tc>
-                <a:tc>
-                  <a:txBody>
-                    <a:bodyPr/>
-                    <a:lstStyle/>
-                    <a:p>
-                      <a:pPr algn="ctr" indent="0" marL="0">
-                        <a:buNone/>
-                      </a:pPr>
-                      <a:r>
-                        <a:rPr lang="en-US" sz="1200" i="1" dirty="0">
-                          <a:solidFill>
-                            <a:srgbClr val="6E7A88"/>
-                          </a:solidFill>
-                          <a:latin typeface="Calibri" pitchFamily="34" charset="0"/>
-                          <a:ea typeface="Calibri" pitchFamily="34" charset="-122"/>
-                          <a:cs typeface="Calibri" pitchFamily="34" charset="-120"/>
-                        </a:rPr>
-                        <a:t>+63 б. п.</a:t>
-                      </a:r>
-                      <a:endParaRPr lang="en-US" sz="1200" dirty="0">
-                        <a:latin typeface="Calibri" charset="0"/>
-                        <a:ea typeface="Calibri" charset="0"/>
-                        <a:cs typeface="Calibri" charset="0"/>
-                      </a:endParaRPr>
-                    </a:p>
-                  </a:txBody>
-                  <a:tcPr marL="91440" marR="91440" marT="45720" marB="45720" anchor="ctr">
-                    <a:lnL w="12700" cap="flat" cmpd="sng" algn="ctr">
-                      <a:solidFill>
-                        <a:srgbClr val="DDE3E9"/>
-                      </a:solidFill>
-                      <a:prstDash val="solid"/>
-                      <a:round/>
-                      <a:headEnd type="none" w="med" len="med"/>
-                      <a:tailEnd type="none" w="med" len="med"/>
-                    </a:lnL>
-                    <a:lnR w="12700" cap="flat" cmpd="sng" algn="ctr">
-                      <a:solidFill>
-                        <a:srgbClr val="DDE3E9"/>
-                      </a:solidFill>
-                      <a:prstDash val="solid"/>
-                      <a:round/>
-                      <a:headEnd type="none" w="med" len="med"/>
-                      <a:tailEnd type="none" w="med" len="med"/>
-                    </a:lnR>
-                    <a:lnT w="12700" cap="flat" cmpd="sng" algn="ctr">
-                      <a:solidFill>
-                        <a:srgbClr val="DDE3E9"/>
-                      </a:solidFill>
-                      <a:prstDash val="solid"/>
-                      <a:round/>
-                      <a:headEnd type="none" w="med" len="med"/>
-                      <a:tailEnd type="none" w="med" len="med"/>
-                    </a:lnT>
-                    <a:lnB w="12700" cap="flat" cmpd="sng" algn="ctr">
-                      <a:solidFill>
-                        <a:srgbClr val="DDE3E9"/>
-                      </a:solidFill>
-                      <a:prstDash val="solid"/>
-                      <a:round/>
-                      <a:headEnd type="none" w="med" len="med"/>
-                      <a:tailEnd type="none" w="med" len="med"/>
-                    </a:lnB>
-                  </a:tcPr>
-                </a:tc>
-                <a:tc>
-                  <a:txBody>
-                    <a:bodyPr/>
-                    <a:lstStyle/>
-                    <a:p>
-                      <a:pPr algn="ctr" indent="0" marL="0">
-                        <a:buNone/>
-                      </a:pPr>
-                      <a:r>
-                        <a:rPr lang="en-US" sz="1200" i="1" dirty="0">
-                          <a:solidFill>
-                            <a:srgbClr val="6E7A88"/>
-                          </a:solidFill>
-                          <a:latin typeface="Calibri" pitchFamily="34" charset="0"/>
-                          <a:ea typeface="Calibri" pitchFamily="34" charset="-122"/>
-                          <a:cs typeface="Calibri" pitchFamily="34" charset="-120"/>
-                        </a:rPr>
-                        <a:t>[+47; +80]</a:t>
+                        <a:t>[−39; +14]</a:t>
                       </a:r>
                       <a:endParaRPr lang="en-US" sz="1200" dirty="0">
                         <a:latin typeface="Calibri" charset="0"/>
@@ -12125,7 +12662,7 @@
                           <a:ea typeface="Calibri" pitchFamily="34" charset="-122"/>
                           <a:cs typeface="Calibri" pitchFamily="34" charset="-120"/>
                         </a:rPr>
-                        <a:t>1,21</a:t>
+                        <a:t>1,14</a:t>
                       </a:r>
                       <a:endParaRPr lang="en-US" sz="1200" dirty="0">
                         <a:latin typeface="Calibri" charset="0"/>
@@ -12193,7 +12730,7 @@
                           <a:ea typeface="Calibri" pitchFamily="34" charset="-122"/>
                           <a:cs typeface="Calibri" pitchFamily="34" charset="-120"/>
                         </a:rPr>
-                        <a:t>+28 б. п.</a:t>
+                        <a:t>+34 б. п.</a:t>
                       </a:r>
                       <a:endParaRPr lang="en-US" sz="1200" dirty="0">
                         <a:latin typeface="Calibri" charset="0"/>
@@ -12261,7 +12798,7 @@
                           <a:ea typeface="Calibri" pitchFamily="34" charset="-122"/>
                           <a:cs typeface="Calibri" pitchFamily="34" charset="-120"/>
                         </a:rPr>
-                        <a:t>+28 б. п.</a:t>
+                        <a:t>+24 б. п.</a:t>
                       </a:r>
                       <a:endParaRPr lang="en-US" sz="1200" dirty="0">
                         <a:latin typeface="Calibri" charset="0"/>
@@ -12329,7 +12866,7 @@
                           <a:ea typeface="Calibri" pitchFamily="34" charset="-122"/>
                           <a:cs typeface="Calibri" pitchFamily="34" charset="-120"/>
                         </a:rPr>
-                        <a:t>[+19; +36]</a:t>
+                        <a:t>[+3; +44]</a:t>
                       </a:r>
                       <a:endParaRPr lang="en-US" sz="1200" dirty="0">
                         <a:latin typeface="Calibri" charset="0"/>
@@ -12381,6 +12918,348 @@
                   </a:tcPr>
                 </a:tc>
               </a:tr>
+              <a:tr h="384048">
+                <a:tc>
+                  <a:txBody>
+                    <a:bodyPr/>
+                    <a:lstStyle/>
+                    <a:p>
+                      <a:pPr indent="0" marL="0">
+                        <a:buNone/>
+                      </a:pPr>
+                      <a:r>
+                        <a:rPr lang="en-US" sz="1200" b="1" dirty="0">
+                          <a:solidFill>
+                            <a:srgbClr val="1A2530"/>
+                          </a:solidFill>
+                          <a:latin typeface="Calibri" pitchFamily="34" charset="0"/>
+                          <a:ea typeface="Calibri" pitchFamily="34" charset="-122"/>
+                          <a:cs typeface="Calibri" pitchFamily="34" charset="-120"/>
+                        </a:rPr>
+                        <a:t>простое правило pct_range_90 ≥ 95</a:t>
+                      </a:r>
+                      <a:endParaRPr lang="en-US" sz="1200" dirty="0">
+                        <a:latin typeface="Calibri" charset="0"/>
+                        <a:ea typeface="Calibri" charset="0"/>
+                        <a:cs typeface="Calibri" charset="0"/>
+                      </a:endParaRPr>
+                    </a:p>
+                  </a:txBody>
+                  <a:tcPr marL="91440" marR="91440" marT="45720" marB="45720" anchor="ctr">
+                    <a:lnL w="12700" cap="flat" cmpd="sng" algn="ctr">
+                      <a:solidFill>
+                        <a:srgbClr val="DDE3E9"/>
+                      </a:solidFill>
+                      <a:prstDash val="solid"/>
+                      <a:round/>
+                      <a:headEnd type="none" w="med" len="med"/>
+                      <a:tailEnd type="none" w="med" len="med"/>
+                    </a:lnL>
+                    <a:lnR w="12700" cap="flat" cmpd="sng" algn="ctr">
+                      <a:solidFill>
+                        <a:srgbClr val="DDE3E9"/>
+                      </a:solidFill>
+                      <a:prstDash val="solid"/>
+                      <a:round/>
+                      <a:headEnd type="none" w="med" len="med"/>
+                      <a:tailEnd type="none" w="med" len="med"/>
+                    </a:lnR>
+                    <a:lnT w="12700" cap="flat" cmpd="sng" algn="ctr">
+                      <a:solidFill>
+                        <a:srgbClr val="DDE3E9"/>
+                      </a:solidFill>
+                      <a:prstDash val="solid"/>
+                      <a:round/>
+                      <a:headEnd type="none" w="med" len="med"/>
+                      <a:tailEnd type="none" w="med" len="med"/>
+                    </a:lnT>
+                    <a:lnB w="12700" cap="flat" cmpd="sng" algn="ctr">
+                      <a:solidFill>
+                        <a:srgbClr val="DDE3E9"/>
+                      </a:solidFill>
+                      <a:prstDash val="solid"/>
+                      <a:round/>
+                      <a:headEnd type="none" w="med" len="med"/>
+                      <a:tailEnd type="none" w="med" len="med"/>
+                    </a:lnB>
+                    <a:solidFill>
+                      <a:srgbClr val="FDF1E3"/>
+                    </a:solidFill>
+                  </a:tcPr>
+                </a:tc>
+                <a:tc>
+                  <a:txBody>
+                    <a:bodyPr/>
+                    <a:lstStyle/>
+                    <a:p>
+                      <a:pPr algn="ctr" indent="0" marL="0">
+                        <a:buNone/>
+                      </a:pPr>
+                      <a:r>
+                        <a:rPr lang="en-US" sz="1200" b="1" dirty="0">
+                          <a:solidFill>
+                            <a:srgbClr val="1A2530"/>
+                          </a:solidFill>
+                          <a:latin typeface="Calibri" pitchFamily="34" charset="0"/>
+                          <a:ea typeface="Calibri" pitchFamily="34" charset="-122"/>
+                          <a:cs typeface="Calibri" pitchFamily="34" charset="-120"/>
+                        </a:rPr>
+                        <a:t>1,39</a:t>
+                      </a:r>
+                      <a:endParaRPr lang="en-US" sz="1200" dirty="0">
+                        <a:latin typeface="Calibri" charset="0"/>
+                        <a:ea typeface="Calibri" charset="0"/>
+                        <a:cs typeface="Calibri" charset="0"/>
+                      </a:endParaRPr>
+                    </a:p>
+                  </a:txBody>
+                  <a:tcPr marL="91440" marR="91440" marT="45720" marB="45720" anchor="ctr">
+                    <a:lnL w="12700" cap="flat" cmpd="sng" algn="ctr">
+                      <a:solidFill>
+                        <a:srgbClr val="DDE3E9"/>
+                      </a:solidFill>
+                      <a:prstDash val="solid"/>
+                      <a:round/>
+                      <a:headEnd type="none" w="med" len="med"/>
+                      <a:tailEnd type="none" w="med" len="med"/>
+                    </a:lnL>
+                    <a:lnR w="12700" cap="flat" cmpd="sng" algn="ctr">
+                      <a:solidFill>
+                        <a:srgbClr val="DDE3E9"/>
+                      </a:solidFill>
+                      <a:prstDash val="solid"/>
+                      <a:round/>
+                      <a:headEnd type="none" w="med" len="med"/>
+                      <a:tailEnd type="none" w="med" len="med"/>
+                    </a:lnR>
+                    <a:lnT w="12700" cap="flat" cmpd="sng" algn="ctr">
+                      <a:solidFill>
+                        <a:srgbClr val="DDE3E9"/>
+                      </a:solidFill>
+                      <a:prstDash val="solid"/>
+                      <a:round/>
+                      <a:headEnd type="none" w="med" len="med"/>
+                      <a:tailEnd type="none" w="med" len="med"/>
+                    </a:lnT>
+                    <a:lnB w="12700" cap="flat" cmpd="sng" algn="ctr">
+                      <a:solidFill>
+                        <a:srgbClr val="DDE3E9"/>
+                      </a:solidFill>
+                      <a:prstDash val="solid"/>
+                      <a:round/>
+                      <a:headEnd type="none" w="med" len="med"/>
+                      <a:tailEnd type="none" w="med" len="med"/>
+                    </a:lnB>
+                    <a:solidFill>
+                      <a:srgbClr val="FDF1E3"/>
+                    </a:solidFill>
+                  </a:tcPr>
+                </a:tc>
+                <a:tc>
+                  <a:txBody>
+                    <a:bodyPr/>
+                    <a:lstStyle/>
+                    <a:p>
+                      <a:pPr algn="ctr" indent="0" marL="0">
+                        <a:buNone/>
+                      </a:pPr>
+                      <a:r>
+                        <a:rPr lang="en-US" sz="1200" b="1" dirty="0">
+                          <a:solidFill>
+                            <a:srgbClr val="1A2530"/>
+                          </a:solidFill>
+                          <a:latin typeface="Calibri" pitchFamily="34" charset="0"/>
+                          <a:ea typeface="Calibri" pitchFamily="34" charset="-122"/>
+                          <a:cs typeface="Calibri" pitchFamily="34" charset="-120"/>
+                        </a:rPr>
+                        <a:t>−60 б. п.</a:t>
+                      </a:r>
+                      <a:endParaRPr lang="en-US" sz="1200" dirty="0">
+                        <a:latin typeface="Calibri" charset="0"/>
+                        <a:ea typeface="Calibri" charset="0"/>
+                        <a:cs typeface="Calibri" charset="0"/>
+                      </a:endParaRPr>
+                    </a:p>
+                  </a:txBody>
+                  <a:tcPr marL="91440" marR="91440" marT="45720" marB="45720" anchor="ctr">
+                    <a:lnL w="12700" cap="flat" cmpd="sng" algn="ctr">
+                      <a:solidFill>
+                        <a:srgbClr val="DDE3E9"/>
+                      </a:solidFill>
+                      <a:prstDash val="solid"/>
+                      <a:round/>
+                      <a:headEnd type="none" w="med" len="med"/>
+                      <a:tailEnd type="none" w="med" len="med"/>
+                    </a:lnL>
+                    <a:lnR w="12700" cap="flat" cmpd="sng" algn="ctr">
+                      <a:solidFill>
+                        <a:srgbClr val="DDE3E9"/>
+                      </a:solidFill>
+                      <a:prstDash val="solid"/>
+                      <a:round/>
+                      <a:headEnd type="none" w="med" len="med"/>
+                      <a:tailEnd type="none" w="med" len="med"/>
+                    </a:lnR>
+                    <a:lnT w="12700" cap="flat" cmpd="sng" algn="ctr">
+                      <a:solidFill>
+                        <a:srgbClr val="DDE3E9"/>
+                      </a:solidFill>
+                      <a:prstDash val="solid"/>
+                      <a:round/>
+                      <a:headEnd type="none" w="med" len="med"/>
+                      <a:tailEnd type="none" w="med" len="med"/>
+                    </a:lnT>
+                    <a:lnB w="12700" cap="flat" cmpd="sng" algn="ctr">
+                      <a:solidFill>
+                        <a:srgbClr val="DDE3E9"/>
+                      </a:solidFill>
+                      <a:prstDash val="solid"/>
+                      <a:round/>
+                      <a:headEnd type="none" w="med" len="med"/>
+                      <a:tailEnd type="none" w="med" len="med"/>
+                    </a:lnB>
+                    <a:solidFill>
+                      <a:srgbClr val="FDF1E3"/>
+                    </a:solidFill>
+                  </a:tcPr>
+                </a:tc>
+                <a:tc>
+                  <a:txBody>
+                    <a:bodyPr/>
+                    <a:lstStyle/>
+                    <a:p>
+                      <a:pPr algn="ctr" indent="0" marL="0">
+                        <a:buNone/>
+                      </a:pPr>
+                      <a:r>
+                        <a:rPr lang="en-US" sz="1200" b="1" dirty="0">
+                          <a:solidFill>
+                            <a:srgbClr val="16674F"/>
+                          </a:solidFill>
+                          <a:latin typeface="Calibri" pitchFamily="34" charset="0"/>
+                          <a:ea typeface="Calibri" pitchFamily="34" charset="-122"/>
+                          <a:cs typeface="Calibri" pitchFamily="34" charset="-120"/>
+                        </a:rPr>
+                        <a:t>+63 б. п.</a:t>
+                      </a:r>
+                      <a:endParaRPr lang="en-US" sz="1200" dirty="0">
+                        <a:latin typeface="Calibri" charset="0"/>
+                        <a:ea typeface="Calibri" charset="0"/>
+                        <a:cs typeface="Calibri" charset="0"/>
+                      </a:endParaRPr>
+                    </a:p>
+                  </a:txBody>
+                  <a:tcPr marL="91440" marR="91440" marT="45720" marB="45720" anchor="ctr">
+                    <a:lnL w="12700" cap="flat" cmpd="sng" algn="ctr">
+                      <a:solidFill>
+                        <a:srgbClr val="DDE3E9"/>
+                      </a:solidFill>
+                      <a:prstDash val="solid"/>
+                      <a:round/>
+                      <a:headEnd type="none" w="med" len="med"/>
+                      <a:tailEnd type="none" w="med" len="med"/>
+                    </a:lnL>
+                    <a:lnR w="12700" cap="flat" cmpd="sng" algn="ctr">
+                      <a:solidFill>
+                        <a:srgbClr val="DDE3E9"/>
+                      </a:solidFill>
+                      <a:prstDash val="solid"/>
+                      <a:round/>
+                      <a:headEnd type="none" w="med" len="med"/>
+                      <a:tailEnd type="none" w="med" len="med"/>
+                    </a:lnR>
+                    <a:lnT w="12700" cap="flat" cmpd="sng" algn="ctr">
+                      <a:solidFill>
+                        <a:srgbClr val="DDE3E9"/>
+                      </a:solidFill>
+                      <a:prstDash val="solid"/>
+                      <a:round/>
+                      <a:headEnd type="none" w="med" len="med"/>
+                      <a:tailEnd type="none" w="med" len="med"/>
+                    </a:lnT>
+                    <a:lnB w="12700" cap="flat" cmpd="sng" algn="ctr">
+                      <a:solidFill>
+                        <a:srgbClr val="DDE3E9"/>
+                      </a:solidFill>
+                      <a:prstDash val="solid"/>
+                      <a:round/>
+                      <a:headEnd type="none" w="med" len="med"/>
+                      <a:tailEnd type="none" w="med" len="med"/>
+                    </a:lnB>
+                    <a:solidFill>
+                      <a:srgbClr val="FDF1E3"/>
+                    </a:solidFill>
+                  </a:tcPr>
+                </a:tc>
+                <a:tc>
+                  <a:txBody>
+                    <a:bodyPr/>
+                    <a:lstStyle/>
+                    <a:p>
+                      <a:pPr algn="ctr" indent="0" marL="0">
+                        <a:buNone/>
+                      </a:pPr>
+                      <a:r>
+                        <a:rPr lang="en-US" sz="1200" b="1" dirty="0">
+                          <a:solidFill>
+                            <a:srgbClr val="1A2530"/>
+                          </a:solidFill>
+                          <a:latin typeface="Calibri" pitchFamily="34" charset="0"/>
+                          <a:ea typeface="Calibri" pitchFamily="34" charset="-122"/>
+                          <a:cs typeface="Calibri" pitchFamily="34" charset="-120"/>
+                        </a:rPr>
+                        <a:t>[+33; +94]</a:t>
+                      </a:r>
+                      <a:endParaRPr lang="en-US" sz="1200" dirty="0">
+                        <a:latin typeface="Calibri" charset="0"/>
+                        <a:ea typeface="Calibri" charset="0"/>
+                        <a:cs typeface="Calibri" charset="0"/>
+                      </a:endParaRPr>
+                    </a:p>
+                  </a:txBody>
+                  <a:tcPr marL="91440" marR="91440" marT="45720" marB="45720" anchor="ctr">
+                    <a:lnL w="12700" cap="flat" cmpd="sng" algn="ctr">
+                      <a:solidFill>
+                        <a:srgbClr val="DDE3E9"/>
+                      </a:solidFill>
+                      <a:prstDash val="solid"/>
+                      <a:round/>
+                      <a:headEnd type="none" w="med" len="med"/>
+                      <a:tailEnd type="none" w="med" len="med"/>
+                    </a:lnL>
+                    <a:lnR w="12700" cap="flat" cmpd="sng" algn="ctr">
+                      <a:solidFill>
+                        <a:srgbClr val="DDE3E9"/>
+                      </a:solidFill>
+                      <a:prstDash val="solid"/>
+                      <a:round/>
+                      <a:headEnd type="none" w="med" len="med"/>
+                      <a:tailEnd type="none" w="med" len="med"/>
+                    </a:lnR>
+                    <a:lnT w="12700" cap="flat" cmpd="sng" algn="ctr">
+                      <a:solidFill>
+                        <a:srgbClr val="DDE3E9"/>
+                      </a:solidFill>
+                      <a:prstDash val="solid"/>
+                      <a:round/>
+                      <a:headEnd type="none" w="med" len="med"/>
+                      <a:tailEnd type="none" w="med" len="med"/>
+                    </a:lnT>
+                    <a:lnB w="12700" cap="flat" cmpd="sng" algn="ctr">
+                      <a:solidFill>
+                        <a:srgbClr val="DDE3E9"/>
+                      </a:solidFill>
+                      <a:prstDash val="solid"/>
+                      <a:round/>
+                      <a:headEnd type="none" w="med" len="med"/>
+                      <a:tailEnd type="none" w="med" len="med"/>
+                    </a:lnB>
+                    <a:solidFill>
+                      <a:srgbClr val="FDF1E3"/>
+                    </a:solidFill>
+                  </a:tcPr>
+                </a:tc>
+              </a:tr>
             </a:tbl>
           </a:graphicData>
         </a:graphic>
@@ -12440,7 +13319,7 @@
                 <a:ea typeface="Cambria" pitchFamily="34" charset="-122"/>
                 <a:cs typeface="Cambria" pitchFamily="34" charset="-120"/>
               </a:rPr>
-              <a:t>Uplift к лучшему индикатору ТЗ — только на h = 5</a:t>
+              <a:t>Однострочное правило обгоняет модель по обеим колонкам</a:t>
             </a:r>
             <a:endParaRPr lang="en-US" sz="1550" dirty="0"/>
           </a:p>
@@ -12482,7 +13361,7 @@
                 <a:ea typeface="Calibri" pitchFamily="34" charset="-122"/>
                 <a:cs typeface="Calibri" pitchFamily="34" charset="-120"/>
               </a:rPr>
-              <a:t>+0,20 по lift и +15 б. п. по достижимой выгоде. На горизонтах 1 / 3 / 10 / 20 прирост равен −17 / +3 / −4 / +20 б. п.: он колеблется вокруг нуля и меняет знак. Показываем все пять, а не лучший.</a:t>
+              <a:t>1,39 против 1,14 и +63 против +24 б. п. Uplift модели к компаратору, назначенному ДО теста, на горизонтах 1 / 3 / 5 / 10 / 20: +17 / +30 / +45 / +96 / +63 б. п. Рост вправо обманчив: на h = 10 и 20 все индикаторы ТЗ уходят в минус, обогнать их легко, а месяц ожидания клиент не выдержит. Продуктовые горизонты — 3–5.</a:t>
             </a:r>
             <a:endParaRPr lang="en-US" sz="1250" dirty="0"/>
           </a:p>
@@ -12521,7 +13400,7 @@
                 <a:ea typeface="Calibri" pitchFamily="34" charset="-122"/>
                 <a:cs typeface="Calibri" pitchFamily="34" charset="-120"/>
               </a:rPr>
-              <a:t>Целевой порог lift ≥ 1,3 не достигнут. Он достижим правилом, которое отправляет клиента переводить на пике — мы показываем и то, и другое.</a:t>
+              <a:t>Порог lift ≥ 1,3 достигнут (1,39 у правила, 1,35 у модели), но обе срабатывают 0,6-0,7 сигнала в неделю при обязательной полосе 1–2. Единственная строка внутри полосы — pct ≥ 85 с lift 1,26. Оба условия вместе не выполняет ничто, и это арифметика: ЦБ публикует курс ~4,7 раза в неделю, поэтому полоса требует срабатывания на 21–42 % публикаций. Покоридорная калибровка, которой требует ТЗ, даёт 1,18-1,27 — тоже ниже.</a:t>
             </a:r>
             <a:endParaRPr lang="en-US" sz="1050" dirty="0"/>
           </a:p>

--- a/submission/prezentaciya-promezhutochnaya.pptx
+++ b/submission/prezentaciya-promezhutochnaya.pptx
@@ -20,9 +20,10 @@
     <p:sldId id="268" r:id="rId14"/>
     <p:sldId id="269" r:id="rId15"/>
     <p:sldId id="270" r:id="rId16"/>
+    <p:sldId id="271" r:id="rId17"/>
   </p:sldIdLst>
   <p:notesMasterIdLst>
-    <p:notesMasterId r:id="rId17"/>
+    <p:notesMasterId r:id="rId18"/>
   </p:notesMasterIdLst>
   <p:sldSz cx="12192000" cy="6858000"/>
   <p:notesSz cx="6858000" cy="12192000"/>
@@ -956,7 +957,7 @@
           <a:p>
             <a:r>
               <a:rPr lang="en-US" dirty="0"/>
-              <a:t/>
+              <a:t>Расчёт в run_product_numbers.py, вывод в submission/10. SD выгоды 237 бп, design effect по датам 3,93 - измерен, а не назначен. 275 сигнальных дней за 296 недель. Сходится с тем, что на тесте интервал +63 [+33; +94] ноль не накрывает: там набралось 275 дней при потребности в 136.</a:t>
             </a:r>
             <a:endParaRPr lang="en-US" dirty="0"/>
           </a:p>
@@ -1044,7 +1045,7 @@
           <a:p>
             <a:r>
               <a:rPr lang="en-US" dirty="0"/>
-              <a:t>Закрываем не результатом модели, а решением, которое нужно от заказчика. Три вопроса выбраны так, что ответ на каждый меняет содержание работы к финалу, а не только её объём.</a:t>
+              <a:t/>
             </a:r>
             <a:endParaRPr lang="en-US" dirty="0"/>
           </a:p>
@@ -1068,6 +1069,94 @@
             <a:fld id="{F7021451-1387-4CA6-816F-3879F97B5CBC}" type="slidenum">
               <a:rPr lang="en-US"/>
               <a:t>15</a:t>
+            </a:fld>
+            <a:endParaRPr lang="en-US"/>
+          </a:p>
+        </p:txBody>
+      </p:sp>
+    </p:spTree>
+    <p:extLst>
+      <p:ext uri="{BB962C8B-B14F-4D97-AF65-F5344CB8AC3E}">
+        <p14:creationId xmlns:p14="http://schemas.microsoft.com/office/powerpoint/2010/main" val="1024086991"/>
+      </p:ext>
+    </p:extLst>
+  </p:cSld>
+  <p:clrMapOvr>
+    <a:masterClrMapping/>
+  </p:clrMapOvr>
+</p:notes>
+</file>
+
+<file path=ppt/notesSlides/notesSlide16.xml><?xml version="1.0" encoding="utf-8"?>
+<p:notes xmlns:a="http://schemas.openxmlformats.org/drawingml/2006/main" xmlns:r="http://schemas.openxmlformats.org/officeDocument/2006/relationships" xmlns:p="http://schemas.openxmlformats.org/presentationml/2006/main">
+  <p:cSld>
+    <p:spTree>
+      <p:nvGrpSpPr>
+        <p:cNvPr id="1" name=""/>
+        <p:cNvGrpSpPr/>
+        <p:nvPr/>
+      </p:nvGrpSpPr>
+      <p:grpSpPr>
+        <a:xfrm>
+          <a:off x="0" y="0"/>
+          <a:ext cx="0" cy="0"/>
+          <a:chOff x="0" y="0"/>
+          <a:chExt cx="0" cy="0"/>
+        </a:xfrm>
+      </p:grpSpPr>
+      <p:sp>
+        <p:nvSpPr>
+          <p:cNvPr id="2" name="Slide Image Placeholder 1"/>
+          <p:cNvSpPr>
+            <a:spLocks noGrp="1" noRot="1" noChangeAspect="1"/>
+          </p:cNvSpPr>
+          <p:nvPr>
+            <p:ph type="sldImg"/>
+          </p:nvPr>
+        </p:nvSpPr>
+        <p:spPr/>
+      </p:sp>
+      <p:sp>
+        <p:nvSpPr>
+          <p:cNvPr id="3" name="Notes Placeholder 2"/>
+          <p:cNvSpPr>
+            <a:spLocks noGrp="1"/>
+          </p:cNvSpPr>
+          <p:nvPr>
+            <p:ph type="body" idx="1"/>
+          </p:nvPr>
+        </p:nvSpPr>
+        <p:spPr/>
+        <p:txBody>
+          <a:bodyPr/>
+          <a:lstStyle/>
+          <a:p>
+            <a:r>
+              <a:rPr lang="en-US" dirty="0"/>
+              <a:t>Закрываем не результатом модели, а решением, которое нужно от заказчика. Три вопроса выбраны так, что ответ на каждый меняет содержание работы к финалу, а не только её объём.</a:t>
+            </a:r>
+            <a:endParaRPr lang="en-US" dirty="0"/>
+          </a:p>
+        </p:txBody>
+      </p:sp>
+      <p:sp>
+        <p:nvSpPr>
+          <p:cNvPr id="4" name="Slide Number Placeholder 3"/>
+          <p:cNvSpPr>
+            <a:spLocks noGrp="1"/>
+          </p:cNvSpPr>
+          <p:nvPr>
+            <p:ph type="sldNum" sz="quarter" idx="10"/>
+          </p:nvPr>
+        </p:nvSpPr>
+        <p:spPr/>
+        <p:txBody>
+          <a:bodyPr/>
+          <a:lstStyle/>
+          <a:p>
+            <a:fld id="{F7021451-1387-4CA6-816F-3879F97B5CBC}" type="slidenum">
+              <a:rPr lang="en-US"/>
+              <a:t>16</a:t>
             </a:fld>
             <a:endParaRPr lang="en-US"/>
           </a:p>
@@ -4411,7 +4500,7 @@
                 <a:ea typeface="Cambria" pitchFamily="34" charset="-122"/>
                 <a:cs typeface="Cambria" pitchFamily="34" charset="-120"/>
               </a:rPr>
-              <a:t>Команда и распределение задач</a:t>
+              <a:t>План пилота: две ветки, и они разной скорости</a:t>
             </a:r>
             <a:endParaRPr lang="en-US" sz="2700" dirty="0"/>
           </a:p>
@@ -4419,18 +4508,60 @@
       </p:sp>
       <p:sp>
         <p:nvSpPr>
-          <p:cNvPr id="5" name="Shape 3"/>
+          <p:cNvPr id="5" name="Text 3"/>
+          <p:cNvSpPr txBox="1"/>
+          <p:nvPr/>
+        </p:nvSpPr>
+        <p:spPr>
+          <a:xfrm>
+            <a:off x="640080" y="1115568"/>
+            <a:ext cx="10881360" cy="457200"/>
+          </a:xfrm>
+          <a:prstGeom prst="rect">
+            <a:avLst/>
+          </a:prstGeom>
+          <a:noFill/>
+          <a:ln/>
+        </p:spPr>
+        <p:txBody>
+          <a:bodyPr wrap="square" lIns="0" tIns="0" rIns="0" bIns="0" rtlCol="0" anchor="ctr"/>
+          <a:lstStyle/>
+          <a:p>
+            <a:pPr indent="0" marL="0">
+              <a:lnSpc>
+                <a:spcPts val="1700"/>
+              </a:lnSpc>
+              <a:buNone/>
+            </a:pPr>
+            <a:r>
+              <a:rPr lang="en-US" sz="1300" dirty="0">
+                <a:solidFill>
+                  <a:srgbClr val="4E5966"/>
+                </a:solidFill>
+                <a:latin typeface="Calibri" pitchFamily="34" charset="0"/>
+                <a:ea typeface="Calibri" pitchFamily="34" charset="-122"/>
+                <a:cs typeface="Calibri" pitchFamily="34" charset="-120"/>
+              </a:rPr>
+              <a:t>Выгода курса — свойство СИГНАЛА, а не клиента: десять тысяч человек, следящих за одним коридором, дают одно наблюдение курса, а не десять тысяч. Когорта эту ветку не ускоряет.</a:t>
+            </a:r>
+            <a:endParaRPr lang="en-US" sz="1300" dirty="0"/>
+          </a:p>
+        </p:txBody>
+      </p:sp>
+      <p:sp>
+        <p:nvSpPr>
+          <p:cNvPr id="6" name="Shape 4"/>
           <p:cNvSpPr/>
           <p:nvPr/>
         </p:nvSpPr>
         <p:spPr>
           <a:xfrm>
-            <a:off x="640080" y="1188720"/>
-            <a:ext cx="10881360" cy="1444752"/>
+            <a:off x="640080" y="1700784"/>
+            <a:ext cx="5367528" cy="2286000"/>
           </a:xfrm>
           <a:prstGeom prst="roundRect">
             <a:avLst>
-              <a:gd name="adj" fmla="val 3797"/>
+              <a:gd name="adj" fmla="val 2400"/>
             </a:avLst>
           </a:prstGeom>
           <a:solidFill>
@@ -4441,14 +4572,14 @@
       </p:sp>
       <p:sp>
         <p:nvSpPr>
-          <p:cNvPr id="6" name="Text 4"/>
+          <p:cNvPr id="7" name="Text 5"/>
           <p:cNvSpPr txBox="1"/>
           <p:nvPr/>
         </p:nvSpPr>
         <p:spPr>
           <a:xfrm>
-            <a:off x="896112" y="1344168"/>
-            <a:ext cx="2468880" cy="329184"/>
+            <a:off x="896112" y="1883664"/>
+            <a:ext cx="4855464" cy="420624"/>
           </a:xfrm>
           <a:prstGeom prst="rect">
             <a:avLst/>
@@ -4464,30 +4595,30 @@
               <a:buNone/>
             </a:pPr>
             <a:r>
-              <a:rPr lang="en-US" sz="1500" b="1" dirty="0">
-                <a:solidFill>
-                  <a:srgbClr val="1A2530"/>
+              <a:rPr lang="en-US" sz="1550" b="1" dirty="0">
+                <a:solidFill>
+                  <a:srgbClr val="9E3226"/>
                 </a:solidFill>
                 <a:latin typeface="Cambria" pitchFamily="34" charset="0"/>
                 <a:ea typeface="Cambria" pitchFamily="34" charset="-122"/>
                 <a:cs typeface="Cambria" pitchFamily="34" charset="-120"/>
               </a:rPr>
-              <a:t>Александр Тармаев</a:t>
-            </a:r>
-            <a:endParaRPr lang="en-US" sz="1500" dirty="0"/>
-          </a:p>
-        </p:txBody>
-      </p:sp>
-      <p:sp>
-        <p:nvSpPr>
-          <p:cNvPr id="7" name="Text 5"/>
+              <a:t>Ветка 1 · выгода курса</a:t>
+            </a:r>
+            <a:endParaRPr lang="en-US" sz="1550" dirty="0"/>
+          </a:p>
+        </p:txBody>
+      </p:sp>
+      <p:sp>
+        <p:nvSpPr>
+          <p:cNvPr id="8" name="Text 6"/>
           <p:cNvSpPr txBox="1"/>
           <p:nvPr/>
         </p:nvSpPr>
         <p:spPr>
           <a:xfrm>
-            <a:off x="896112" y="1700784"/>
-            <a:ext cx="2468880" cy="292608"/>
+            <a:off x="896112" y="2322576"/>
+            <a:ext cx="4855464" cy="1463040"/>
           </a:xfrm>
           <a:prstGeom prst="rect">
             <a:avLst/>
@@ -4500,75 +4631,126 @@
           <a:lstStyle/>
           <a:p>
             <a:pPr indent="0" marL="0">
-              <a:buNone/>
-            </a:pPr>
-            <a:r>
-              <a:rPr lang="en-US" sz="1150" b="1" dirty="0">
-                <a:solidFill>
-                  <a:srgbClr val="9C5B12"/>
+              <a:lnSpc>
+                <a:spcPts val="1700"/>
+              </a:lnSpc>
+              <a:buNone/>
+            </a:pPr>
+            <a:r>
+              <a:rPr lang="en-US" sz="1250" dirty="0">
+                <a:solidFill>
+                  <a:srgbClr val="4E5966"/>
                 </a:solidFill>
                 <a:latin typeface="Calibri" pitchFamily="34" charset="0"/>
                 <a:ea typeface="Calibri" pitchFamily="34" charset="-122"/>
                 <a:cs typeface="Calibri" pitchFamily="34" charset="-120"/>
               </a:rPr>
-              <a:t>Product Engineer</a:t>
-            </a:r>
-            <a:endParaRPr lang="en-US" sz="1150" dirty="0"/>
-          </a:p>
-        </p:txBody>
-      </p:sp>
-      <p:sp>
-        <p:nvSpPr>
-          <p:cNvPr id="8" name="Text 6"/>
-          <p:cNvSpPr txBox="1"/>
-          <p:nvPr/>
-        </p:nvSpPr>
-        <p:spPr>
-          <a:xfrm>
-            <a:off x="896112" y="2011680"/>
-            <a:ext cx="2468880" cy="493776"/>
-          </a:xfrm>
-          <a:prstGeom prst="rect">
-            <a:avLst/>
-          </a:prstGeom>
-          <a:noFill/>
-          <a:ln/>
-        </p:spPr>
-        <p:txBody>
-          <a:bodyPr wrap="square" lIns="0" tIns="0" rIns="0" bIns="0" rtlCol="0" anchor="ctr"/>
-          <a:lstStyle/>
+              <a:t>Скорость задана календарём ЦБ. Чтобы отличить +63 бп от нуля с мощностью 80 %, нужно 437 срабатываний = 136 дней с сигналом = 146 НЕДЕЛЬ.</a:t>
+            </a:r>
+            <a:endParaRPr lang="en-US" sz="1250" dirty="0"/>
+          </a:p>
           <a:p>
             <a:pPr indent="0" marL="0">
               <a:lnSpc>
-                <a:spcPts val="1250"/>
+                <a:spcPts val="1700"/>
               </a:lnSpc>
               <a:buNone/>
             </a:pPr>
-            <a:r>
-              <a:rPr lang="en-US" sz="1000" dirty="0">
-                <a:solidFill>
-                  <a:srgbClr val="6E7A88"/>
+            <a:endParaRPr lang="en-US" sz="1250" dirty="0"/>
+          </a:p>
+          <a:p>
+            <a:pPr indent="0" marL="0">
+              <a:lnSpc>
+                <a:spcPts val="1700"/>
+              </a:lnSpc>
+              <a:buNone/>
+            </a:pPr>
+            <a:r>
+              <a:rPr lang="en-US" sz="1250" dirty="0">
+                <a:solidFill>
+                  <a:srgbClr val="4E5966"/>
                 </a:solidFill>
                 <a:latin typeface="Calibri" pitchFamily="34" charset="0"/>
                 <a:ea typeface="Calibri" pitchFamily="34" charset="-122"/>
                 <a:cs typeface="Calibri" pitchFamily="34" charset="-120"/>
               </a:rPr>
-              <a:t>Продуктовое видение, распределение работы, MVP</a:t>
-            </a:r>
-            <a:endParaRPr lang="en-US" sz="1000" dirty="0"/>
-          </a:p>
-        </p:txBody>
-      </p:sp>
-      <p:sp>
-        <p:nvSpPr>
-          <p:cNvPr id="9" name="Text 7"/>
+              <a:t>Пилот этого не успеет. Вердикт даёт бэктест на 296 неделях out-of-sample.</a:t>
+            </a:r>
+            <a:endParaRPr lang="en-US" sz="1250" dirty="0"/>
+          </a:p>
+        </p:txBody>
+      </p:sp>
+      <p:sp>
+        <p:nvSpPr>
+          <p:cNvPr id="9" name="Shape 7"/>
+          <p:cNvSpPr/>
+          <p:nvPr/>
+        </p:nvSpPr>
+        <p:spPr>
+          <a:xfrm>
+            <a:off x="6153912" y="1700784"/>
+            <a:ext cx="5367528" cy="2286000"/>
+          </a:xfrm>
+          <a:prstGeom prst="roundRect">
+            <a:avLst>
+              <a:gd name="adj" fmla="val 2400"/>
+            </a:avLst>
+          </a:prstGeom>
+          <a:solidFill>
+            <a:srgbClr val="F4F6F8"/>
+          </a:solidFill>
+          <a:ln/>
+        </p:spPr>
+      </p:sp>
+      <p:sp>
+        <p:nvSpPr>
+          <p:cNvPr id="10" name="Text 8"/>
           <p:cNvSpPr txBox="1"/>
           <p:nvPr/>
         </p:nvSpPr>
         <p:spPr>
           <a:xfrm>
-            <a:off x="3520440" y="1389888"/>
-            <a:ext cx="6720840" cy="1078992"/>
+            <a:off x="6409944" y="1883664"/>
+            <a:ext cx="4855464" cy="420624"/>
+          </a:xfrm>
+          <a:prstGeom prst="rect">
+            <a:avLst/>
+          </a:prstGeom>
+          <a:noFill/>
+          <a:ln/>
+        </p:spPr>
+        <p:txBody>
+          <a:bodyPr wrap="square" lIns="0" tIns="0" rIns="0" bIns="0" rtlCol="0" anchor="ctr"/>
+          <a:lstStyle/>
+          <a:p>
+            <a:pPr indent="0" marL="0">
+              <a:buNone/>
+            </a:pPr>
+            <a:r>
+              <a:rPr lang="en-US" sz="1550" b="1" dirty="0">
+                <a:solidFill>
+                  <a:srgbClr val="16674F"/>
+                </a:solidFill>
+                <a:latin typeface="Cambria" pitchFamily="34" charset="0"/>
+                <a:ea typeface="Cambria" pitchFamily="34" charset="-122"/>
+                <a:cs typeface="Cambria" pitchFamily="34" charset="-120"/>
+              </a:rPr>
+              <a:t>Ветка 2 · конверсия</a:t>
+            </a:r>
+            <a:endParaRPr lang="en-US" sz="1550" dirty="0"/>
+          </a:p>
+        </p:txBody>
+      </p:sp>
+      <p:sp>
+        <p:nvSpPr>
+          <p:cNvPr id="11" name="Text 9"/>
+          <p:cNvSpPr txBox="1"/>
+          <p:nvPr/>
+        </p:nvSpPr>
+        <p:spPr>
+          <a:xfrm>
+            <a:off x="6409944" y="2322576"/>
+            <a:ext cx="4855464" cy="1463040"/>
           </a:xfrm>
           <a:prstGeom prst="rect">
             <a:avLst/>
@@ -4582,12 +4764,12 @@
           <a:p>
             <a:pPr indent="0" marL="0">
               <a:lnSpc>
-                <a:spcPts val="1500"/>
+                <a:spcPts val="1700"/>
               </a:lnSpc>
               <a:buNone/>
             </a:pPr>
             <a:r>
-              <a:rPr lang="en-US" sz="1100" dirty="0">
+              <a:rPr lang="en-US" sz="1250" dirty="0">
                 <a:solidFill>
                   <a:srgbClr val="4E5966"/>
                 </a:solidFill>
@@ -4595,83 +4777,73 @@
                 <a:ea typeface="Calibri" pitchFamily="34" charset="-122"/>
                 <a:cs typeface="Calibri" pitchFamily="34" charset="-120"/>
               </a:rPr>
-              <a:t>Постановка продуктовой задачи и границы MVP · разбор девяти продуктовых гипотез · предложение клиентской метрики и её обоснование · журнал допущений и развилок · дизайн пилота · распределение работ</a:t>
-            </a:r>
-            <a:endParaRPr lang="en-US" sz="1100" dirty="0"/>
-          </a:p>
-        </p:txBody>
-      </p:sp>
-      <p:sp>
-        <p:nvSpPr>
-          <p:cNvPr id="10" name="Text 8"/>
-          <p:cNvSpPr txBox="1"/>
-          <p:nvPr/>
-        </p:nvSpPr>
-        <p:spPr>
-          <a:xfrm>
-            <a:off x="10378440" y="1737360"/>
-            <a:ext cx="960120" cy="347472"/>
-          </a:xfrm>
-          <a:prstGeom prst="rect">
-            <a:avLst/>
-          </a:prstGeom>
-          <a:noFill/>
-          <a:ln/>
-        </p:spPr>
-        <p:txBody>
-          <a:bodyPr wrap="square" lIns="0" tIns="0" rIns="0" bIns="0" rtlCol="0" anchor="ctr"/>
-          <a:lstStyle/>
-          <a:p>
-            <a:pPr algn="ctr" indent="0" marL="0">
-              <a:buNone/>
-            </a:pPr>
-            <a:r>
-              <a:rPr lang="en-US" sz="1400" b="1" dirty="0">
-                <a:solidFill>
-                  <a:srgbClr val="9C5B12"/>
+              <a:t>Единица наблюдения — пара «клиент x пуш», и вот её когорта ускоряет.</a:t>
+            </a:r>
+            <a:endParaRPr lang="en-US" sz="1250" dirty="0"/>
+          </a:p>
+          <a:p>
+            <a:pPr indent="0" marL="0">
+              <a:lnSpc>
+                <a:spcPts val="1700"/>
+              </a:lnSpc>
+              <a:buNone/>
+            </a:pPr>
+            <a:endParaRPr lang="en-US" sz="1250" dirty="0"/>
+          </a:p>
+          <a:p>
+            <a:pPr indent="0" marL="0">
+              <a:lnSpc>
+                <a:spcPts val="1700"/>
+              </a:lnSpc>
+              <a:buNone/>
+            </a:pPr>
+            <a:r>
+              <a:rPr lang="en-US" sz="1250" dirty="0">
+                <a:solidFill>
+                  <a:srgbClr val="4E5966"/>
                 </a:solidFill>
                 <a:latin typeface="Calibri" pitchFamily="34" charset="0"/>
                 <a:ea typeface="Calibri" pitchFamily="34" charset="-122"/>
                 <a:cs typeface="Calibri" pitchFamily="34" charset="-120"/>
               </a:rPr>
-              <a:t>33 %</a:t>
-            </a:r>
-            <a:endParaRPr lang="en-US" sz="1400" dirty="0"/>
-          </a:p>
-        </p:txBody>
-      </p:sp>
-      <p:sp>
-        <p:nvSpPr>
-          <p:cNvPr id="11" name="Shape 9"/>
+              <a:t>При базовой конверсии 5 % и росте +20 %: 16 315 пар — это 5 недель на 5 000 клиентов. Базовая конверсия стоит параметром: данных о коммуникациях нет.</a:t>
+            </a:r>
+            <a:endParaRPr lang="en-US" sz="1250" dirty="0"/>
+          </a:p>
+        </p:txBody>
+      </p:sp>
+      <p:sp>
+        <p:nvSpPr>
+          <p:cNvPr id="12" name="Shape 10"/>
           <p:cNvSpPr/>
           <p:nvPr/>
         </p:nvSpPr>
         <p:spPr>
           <a:xfrm>
-            <a:off x="640080" y="2788920"/>
-            <a:ext cx="10881360" cy="1444752"/>
+            <a:off x="640080" y="4169664"/>
+            <a:ext cx="10881360" cy="1883664"/>
           </a:xfrm>
           <a:prstGeom prst="roundRect">
             <a:avLst>
-              <a:gd name="adj" fmla="val 3797"/>
+              <a:gd name="adj" fmla="val 2913"/>
             </a:avLst>
           </a:prstGeom>
           <a:solidFill>
-            <a:srgbClr val="F4F6F8"/>
+            <a:srgbClr val="1A2530"/>
           </a:solidFill>
           <a:ln/>
         </p:spPr>
       </p:sp>
       <p:sp>
         <p:nvSpPr>
-          <p:cNvPr id="12" name="Text 10"/>
+          <p:cNvPr id="13" name="Text 11"/>
           <p:cNvSpPr txBox="1"/>
           <p:nvPr/>
         </p:nvSpPr>
         <p:spPr>
           <a:xfrm>
-            <a:off x="896112" y="2944368"/>
-            <a:ext cx="2468880" cy="329184"/>
+            <a:off x="914400" y="4315968"/>
+            <a:ext cx="10332720" cy="347472"/>
           </a:xfrm>
           <a:prstGeom prst="rect">
             <a:avLst/>
@@ -4687,30 +4859,30 @@
               <a:buNone/>
             </a:pPr>
             <a:r>
-              <a:rPr lang="en-US" sz="1500" b="1" dirty="0">
-                <a:solidFill>
-                  <a:srgbClr val="1A2530"/>
+              <a:rPr lang="en-US" sz="1550" b="1" dirty="0">
+                <a:solidFill>
+                  <a:srgbClr val="9C5B12"/>
                 </a:solidFill>
                 <a:latin typeface="Cambria" pitchFamily="34" charset="0"/>
                 <a:ea typeface="Cambria" pitchFamily="34" charset="-122"/>
                 <a:cs typeface="Cambria" pitchFamily="34" charset="-120"/>
               </a:rPr>
-              <a:t>Даниил Недайборщ</a:t>
-            </a:r>
-            <a:endParaRPr lang="en-US" sz="1500" dirty="0"/>
-          </a:p>
-        </p:txBody>
-      </p:sp>
-      <p:sp>
-        <p:nvSpPr>
-          <p:cNvPr id="13" name="Text 11"/>
+              <a:t>Что из этого следует для плана</a:t>
+            </a:r>
+            <a:endParaRPr lang="en-US" sz="1550" dirty="0"/>
+          </a:p>
+        </p:txBody>
+      </p:sp>
+      <p:sp>
+        <p:nvSpPr>
+          <p:cNvPr id="14" name="Text 12"/>
           <p:cNvSpPr txBox="1"/>
           <p:nvPr/>
         </p:nvSpPr>
         <p:spPr>
           <a:xfrm>
-            <a:off x="896112" y="3300984"/>
-            <a:ext cx="2468880" cy="292608"/>
+            <a:off x="914400" y="4700016"/>
+            <a:ext cx="10332720" cy="1243584"/>
           </a:xfrm>
           <a:prstGeom prst="rect">
             <a:avLst/>
@@ -4723,405 +4895,52 @@
           <a:lstStyle/>
           <a:p>
             <a:pPr indent="0" marL="0">
-              <a:buNone/>
-            </a:pPr>
-            <a:r>
-              <a:rPr lang="en-US" sz="1150" b="1" dirty="0">
-                <a:solidFill>
-                  <a:srgbClr val="9C5B12"/>
+              <a:lnSpc>
+                <a:spcPts val="1700"/>
+              </a:lnSpc>
+              <a:buNone/>
+            </a:pPr>
+            <a:r>
+              <a:rPr lang="en-US" sz="1200" dirty="0">
+                <a:solidFill>
+                  <a:srgbClr val="C7CFD8"/>
                 </a:solidFill>
                 <a:latin typeface="Calibri" pitchFamily="34" charset="0"/>
                 <a:ea typeface="Calibri" pitchFamily="34" charset="-122"/>
                 <a:cs typeface="Calibri" pitchFamily="34" charset="-120"/>
               </a:rPr>
-              <a:t>AI Engineer · разработка</a:t>
-            </a:r>
-            <a:endParaRPr lang="en-US" sz="1150" dirty="0"/>
-          </a:p>
-        </p:txBody>
-      </p:sp>
-      <p:sp>
-        <p:nvSpPr>
-          <p:cNvPr id="14" name="Text 12"/>
-          <p:cNvSpPr txBox="1"/>
-          <p:nvPr/>
-        </p:nvSpPr>
-        <p:spPr>
-          <a:xfrm>
-            <a:off x="896112" y="3611880"/>
-            <a:ext cx="2468880" cy="493776"/>
-          </a:xfrm>
-          <a:prstGeom prst="rect">
-            <a:avLst/>
-          </a:prstGeom>
-          <a:noFill/>
-          <a:ln/>
-        </p:spPr>
-        <p:txBody>
-          <a:bodyPr wrap="square" lIns="0" tIns="0" rIns="0" bIns="0" rtlCol="0" anchor="ctr"/>
-          <a:lstStyle/>
+              <a:t>Планировать пилот надо по конверсии, а курсовую выгоду не перепроверять, а принять из бэктеста — иначе пилот запланирован на три года.</a:t>
+            </a:r>
+            <a:endParaRPr lang="en-US" sz="1200" dirty="0"/>
+          </a:p>
           <a:p>
             <a:pPr indent="0" marL="0">
               <a:lnSpc>
-                <a:spcPts val="1250"/>
+                <a:spcPts val="1700"/>
               </a:lnSpc>
               <a:buNone/>
             </a:pPr>
-            <a:r>
-              <a:rPr lang="en-US" sz="1000" dirty="0">
-                <a:solidFill>
-                  <a:srgbClr val="6E7A88"/>
+            <a:endParaRPr lang="en-US" sz="1200" dirty="0"/>
+          </a:p>
+          <a:p>
+            <a:pPr indent="0" marL="0">
+              <a:lnSpc>
+                <a:spcPts val="1700"/>
+              </a:lnSpc>
+              <a:buNone/>
+            </a:pPr>
+            <a:r>
+              <a:rPr lang="en-US" sz="1200" dirty="0">
+                <a:solidFill>
+                  <a:srgbClr val="C7CFD8"/>
                 </a:solidFill>
                 <a:latin typeface="Calibri" pitchFamily="34" charset="0"/>
                 <a:ea typeface="Calibri" pitchFamily="34" charset="-122"/>
                 <a:cs typeface="Calibri" pitchFamily="34" charset="-120"/>
               </a:rPr>
-              <a:t>Данные, признаки, инфраструктура честности</a:t>
-            </a:r>
-            <a:endParaRPr lang="en-US" sz="1000" dirty="0"/>
-          </a:p>
-        </p:txBody>
-      </p:sp>
-      <p:sp>
-        <p:nvSpPr>
-          <p:cNvPr id="15" name="Text 13"/>
-          <p:cNvSpPr txBox="1"/>
-          <p:nvPr/>
-        </p:nvSpPr>
-        <p:spPr>
-          <a:xfrm>
-            <a:off x="3520440" y="2990088"/>
-            <a:ext cx="6720840" cy="1078992"/>
-          </a:xfrm>
-          <a:prstGeom prst="rect">
-            <a:avLst/>
-          </a:prstGeom>
-          <a:noFill/>
-          <a:ln/>
-        </p:spPr>
-        <p:txBody>
-          <a:bodyPr wrap="square" lIns="0" tIns="0" rIns="0" bIns="0" rtlCol="0" anchor="ctr"/>
-          <a:lstStyle/>
-          <a:p>
-            <a:pPr indent="0" marL="0">
-              <a:lnSpc>
-                <a:spcPts val="1500"/>
-              </a:lnSpc>
-              <a:buNone/>
-            </a:pPr>
-            <a:r>
-              <a:rPr lang="en-US" sz="1100" dirty="0">
-                <a:solidFill>
-                  <a:srgbClr val="4E5966"/>
-                </a:solidFill>
-                <a:latin typeface="Calibri" pitchFamily="34" charset="0"/>
-                <a:ea typeface="Calibri" pitchFamily="34" charset="-122"/>
-                <a:cs typeface="Calibri" pitchFamily="34" charset="-120"/>
-              </a:rPr>
-              <a:t>Загрузчик ЦБ с построчной нормировкой номинала · 83 признака только по прошлому · доказательство отсутствия заглядывания в будущее и 44 автотеста · walk-forward с очисткой в публикациях · signals_as_of(T) · воспроизводимость репозитория</a:t>
-            </a:r>
-            <a:endParaRPr lang="en-US" sz="1100" dirty="0"/>
-          </a:p>
-        </p:txBody>
-      </p:sp>
-      <p:sp>
-        <p:nvSpPr>
-          <p:cNvPr id="16" name="Text 14"/>
-          <p:cNvSpPr txBox="1"/>
-          <p:nvPr/>
-        </p:nvSpPr>
-        <p:spPr>
-          <a:xfrm>
-            <a:off x="10378440" y="3337560"/>
-            <a:ext cx="960120" cy="347472"/>
-          </a:xfrm>
-          <a:prstGeom prst="rect">
-            <a:avLst/>
-          </a:prstGeom>
-          <a:noFill/>
-          <a:ln/>
-        </p:spPr>
-        <p:txBody>
-          <a:bodyPr wrap="square" lIns="0" tIns="0" rIns="0" bIns="0" rtlCol="0" anchor="ctr"/>
-          <a:lstStyle/>
-          <a:p>
-            <a:pPr algn="ctr" indent="0" marL="0">
-              <a:buNone/>
-            </a:pPr>
-            <a:r>
-              <a:rPr lang="en-US" sz="1400" b="1" dirty="0">
-                <a:solidFill>
-                  <a:srgbClr val="9C5B12"/>
-                </a:solidFill>
-                <a:latin typeface="Calibri" pitchFamily="34" charset="0"/>
-                <a:ea typeface="Calibri" pitchFamily="34" charset="-122"/>
-                <a:cs typeface="Calibri" pitchFamily="34" charset="-120"/>
-              </a:rPr>
-              <a:t>33 %</a:t>
-            </a:r>
-            <a:endParaRPr lang="en-US" sz="1400" dirty="0"/>
-          </a:p>
-        </p:txBody>
-      </p:sp>
-      <p:sp>
-        <p:nvSpPr>
-          <p:cNvPr id="17" name="Shape 15"/>
-          <p:cNvSpPr/>
-          <p:nvPr/>
-        </p:nvSpPr>
-        <p:spPr>
-          <a:xfrm>
-            <a:off x="640080" y="4389120"/>
-            <a:ext cx="10881360" cy="1444752"/>
-          </a:xfrm>
-          <a:prstGeom prst="roundRect">
-            <a:avLst>
-              <a:gd name="adj" fmla="val 3797"/>
-            </a:avLst>
-          </a:prstGeom>
-          <a:solidFill>
-            <a:srgbClr val="F4F6F8"/>
-          </a:solidFill>
-          <a:ln/>
-        </p:spPr>
-      </p:sp>
-      <p:sp>
-        <p:nvSpPr>
-          <p:cNvPr id="18" name="Text 16"/>
-          <p:cNvSpPr txBox="1"/>
-          <p:nvPr/>
-        </p:nvSpPr>
-        <p:spPr>
-          <a:xfrm>
-            <a:off x="896112" y="4544568"/>
-            <a:ext cx="2468880" cy="329184"/>
-          </a:xfrm>
-          <a:prstGeom prst="rect">
-            <a:avLst/>
-          </a:prstGeom>
-          <a:noFill/>
-          <a:ln/>
-        </p:spPr>
-        <p:txBody>
-          <a:bodyPr wrap="square" lIns="0" tIns="0" rIns="0" bIns="0" rtlCol="0" anchor="ctr"/>
-          <a:lstStyle/>
-          <a:p>
-            <a:pPr indent="0" marL="0">
-              <a:buNone/>
-            </a:pPr>
-            <a:r>
-              <a:rPr lang="en-US" sz="1500" b="1" dirty="0">
-                <a:solidFill>
-                  <a:srgbClr val="1A2530"/>
-                </a:solidFill>
-                <a:latin typeface="Cambria" pitchFamily="34" charset="0"/>
-                <a:ea typeface="Cambria" pitchFamily="34" charset="-122"/>
-                <a:cs typeface="Cambria" pitchFamily="34" charset="-120"/>
-              </a:rPr>
-              <a:t>Иван Калинин</a:t>
-            </a:r>
-            <a:endParaRPr lang="en-US" sz="1500" dirty="0"/>
-          </a:p>
-        </p:txBody>
-      </p:sp>
-      <p:sp>
-        <p:nvSpPr>
-          <p:cNvPr id="19" name="Text 17"/>
-          <p:cNvSpPr txBox="1"/>
-          <p:nvPr/>
-        </p:nvSpPr>
-        <p:spPr>
-          <a:xfrm>
-            <a:off x="896112" y="4901184"/>
-            <a:ext cx="2468880" cy="292608"/>
-          </a:xfrm>
-          <a:prstGeom prst="rect">
-            <a:avLst/>
-          </a:prstGeom>
-          <a:noFill/>
-          <a:ln/>
-        </p:spPr>
-        <p:txBody>
-          <a:bodyPr wrap="square" lIns="0" tIns="0" rIns="0" bIns="0" rtlCol="0" anchor="ctr"/>
-          <a:lstStyle/>
-          <a:p>
-            <a:pPr indent="0" marL="0">
-              <a:buNone/>
-            </a:pPr>
-            <a:r>
-              <a:rPr lang="en-US" sz="1150" b="1" dirty="0">
-                <a:solidFill>
-                  <a:srgbClr val="9C5B12"/>
-                </a:solidFill>
-                <a:latin typeface="Calibri" pitchFamily="34" charset="0"/>
-                <a:ea typeface="Calibri" pitchFamily="34" charset="-122"/>
-                <a:cs typeface="Calibri" pitchFamily="34" charset="-120"/>
-              </a:rPr>
-              <a:t>AI Engineer · машинное обучение</a:t>
-            </a:r>
-            <a:endParaRPr lang="en-US" sz="1150" dirty="0"/>
-          </a:p>
-        </p:txBody>
-      </p:sp>
-      <p:sp>
-        <p:nvSpPr>
-          <p:cNvPr id="20" name="Text 18"/>
-          <p:cNvSpPr txBox="1"/>
-          <p:nvPr/>
-        </p:nvSpPr>
-        <p:spPr>
-          <a:xfrm>
-            <a:off x="896112" y="5212080"/>
-            <a:ext cx="2468880" cy="493776"/>
-          </a:xfrm>
-          <a:prstGeom prst="rect">
-            <a:avLst/>
-          </a:prstGeom>
-          <a:noFill/>
-          <a:ln/>
-        </p:spPr>
-        <p:txBody>
-          <a:bodyPr wrap="square" lIns="0" tIns="0" rIns="0" bIns="0" rtlCol="0" anchor="ctr"/>
-          <a:lstStyle/>
-          <a:p>
-            <a:pPr indent="0" marL="0">
-              <a:lnSpc>
-                <a:spcPts val="1250"/>
-              </a:lnSpc>
-              <a:buNone/>
-            </a:pPr>
-            <a:r>
-              <a:rPr lang="en-US" sz="1000" dirty="0">
-                <a:solidFill>
-                  <a:srgbClr val="6E7A88"/>
-                </a:solidFill>
-                <a:latin typeface="Calibri" pitchFamily="34" charset="0"/>
-                <a:ea typeface="Calibri" pitchFamily="34" charset="-122"/>
-                <a:cs typeface="Calibri" pitchFamily="34" charset="-120"/>
-              </a:rPr>
-              <a:t>Модели, отбор признаков, валидация результата</a:t>
-            </a:r>
-            <a:endParaRPr lang="en-US" sz="1000" dirty="0"/>
-          </a:p>
-        </p:txBody>
-      </p:sp>
-      <p:sp>
-        <p:nvSpPr>
-          <p:cNvPr id="21" name="Text 19"/>
-          <p:cNvSpPr txBox="1"/>
-          <p:nvPr/>
-        </p:nvSpPr>
-        <p:spPr>
-          <a:xfrm>
-            <a:off x="3520440" y="4590288"/>
-            <a:ext cx="6720840" cy="1078992"/>
-          </a:xfrm>
-          <a:prstGeom prst="rect">
-            <a:avLst/>
-          </a:prstGeom>
-          <a:noFill/>
-          <a:ln/>
-        </p:spPr>
-        <p:txBody>
-          <a:bodyPr wrap="square" lIns="0" tIns="0" rIns="0" bIns="0" rtlCol="0" anchor="ctr"/>
-          <a:lstStyle/>
-          <a:p>
-            <a:pPr indent="0" marL="0">
-              <a:lnSpc>
-                <a:spcPts val="1500"/>
-              </a:lnSpc>
-              <a:buNone/>
-            </a:pPr>
-            <a:r>
-              <a:rPr lang="en-US" sz="1100" dirty="0">
-                <a:solidFill>
-                  <a:srgbClr val="4E5966"/>
-                </a:solidFill>
-                <a:latin typeface="Calibri" pitchFamily="34" charset="0"/>
-                <a:ea typeface="Calibri" pitchFamily="34" charset="-122"/>
-                <a:cs typeface="Calibri" pitchFamily="34" charset="-120"/>
-              </a:rPr>
-              <a:t>Пять семейств моделей, включая CatBoost и XGBoost · честный отбор признаков · подбор конфигураций и диагностика провала на всех признаках · две модели под две метрики · испытания результата</a:t>
-            </a:r>
-            <a:endParaRPr lang="en-US" sz="1100" dirty="0"/>
-          </a:p>
-        </p:txBody>
-      </p:sp>
-      <p:sp>
-        <p:nvSpPr>
-          <p:cNvPr id="22" name="Text 20"/>
-          <p:cNvSpPr txBox="1"/>
-          <p:nvPr/>
-        </p:nvSpPr>
-        <p:spPr>
-          <a:xfrm>
-            <a:off x="10378440" y="4937760"/>
-            <a:ext cx="960120" cy="347472"/>
-          </a:xfrm>
-          <a:prstGeom prst="rect">
-            <a:avLst/>
-          </a:prstGeom>
-          <a:noFill/>
-          <a:ln/>
-        </p:spPr>
-        <p:txBody>
-          <a:bodyPr wrap="square" lIns="0" tIns="0" rIns="0" bIns="0" rtlCol="0" anchor="ctr"/>
-          <a:lstStyle/>
-          <a:p>
-            <a:pPr algn="ctr" indent="0" marL="0">
-              <a:buNone/>
-            </a:pPr>
-            <a:r>
-              <a:rPr lang="en-US" sz="1400" b="1" dirty="0">
-                <a:solidFill>
-                  <a:srgbClr val="9C5B12"/>
-                </a:solidFill>
-                <a:latin typeface="Calibri" pitchFamily="34" charset="0"/>
-                <a:ea typeface="Calibri" pitchFamily="34" charset="-122"/>
-                <a:cs typeface="Calibri" pitchFamily="34" charset="-120"/>
-              </a:rPr>
-              <a:t>33 %</a:t>
-            </a:r>
-            <a:endParaRPr lang="en-US" sz="1400" dirty="0"/>
-          </a:p>
-        </p:txBody>
-      </p:sp>
-      <p:sp>
-        <p:nvSpPr>
-          <p:cNvPr id="23" name="Text 21"/>
-          <p:cNvSpPr txBox="1"/>
-          <p:nvPr/>
-        </p:nvSpPr>
-        <p:spPr>
-          <a:xfrm>
-            <a:off x="640080" y="6272784"/>
-            <a:ext cx="10881360" cy="310896"/>
-          </a:xfrm>
-          <a:prstGeom prst="rect">
-            <a:avLst/>
-          </a:prstGeom>
-          <a:noFill/>
-          <a:ln/>
-        </p:spPr>
-        <p:txBody>
-          <a:bodyPr wrap="square" lIns="0" tIns="0" rIns="0" bIns="0" rtlCol="0" anchor="ctr"/>
-          <a:lstStyle/>
-          <a:p>
-            <a:pPr indent="0" marL="0">
-              <a:buNone/>
-            </a:pPr>
-            <a:r>
-              <a:rPr lang="en-US" sz="1050" i="1" dirty="0">
-                <a:solidFill>
-                  <a:srgbClr val="6E7A88"/>
-                </a:solidFill>
-                <a:latin typeface="Calibri" pitchFamily="34" charset="0"/>
-                <a:ea typeface="Calibri" pitchFamily="34" charset="-122"/>
-                <a:cs typeface="Calibri" pitchFamily="34" charset="-120"/>
-              </a:rPr>
-              <a:t>Работа велась совместно, роли разделены по зонам ответственности; вклад участников сопоставим.</a:t>
-            </a:r>
-            <a:endParaRPr lang="en-US" sz="1050" dirty="0"/>
+              <a:t>От банка нужны: доля коммуникационного лимита, курс исполнения для метрики деградации, холдаут и согласование текстов. Ускорить первую ветку можно только расширением списка коридоров.</a:t>
+            </a:r>
+            <a:endParaRPr lang="en-US" sz="1200" dirty="0"/>
           </a:p>
         </p:txBody>
       </p:sp>
@@ -5136,6 +4955,844 @@
 <file path=ppt/slides/slide15.xml><?xml version="1.0" encoding="utf-8"?>
 <p:sld xmlns:a="http://schemas.openxmlformats.org/drawingml/2006/main" xmlns:r="http://schemas.openxmlformats.org/officeDocument/2006/relationships" xmlns:p="http://schemas.openxmlformats.org/presentationml/2006/main">
   <p:cSld name="Slide 15">
+    <p:bg>
+      <p:bgPr>
+        <a:solidFill>
+          <a:srgbClr val="FFFFFF"/>
+        </a:solidFill>
+      </p:bgPr>
+    </p:bg>
+    <p:spTree>
+      <p:nvGrpSpPr>
+        <p:cNvPr id="1" name=""/>
+        <p:cNvGrpSpPr/>
+        <p:nvPr/>
+      </p:nvGrpSpPr>
+      <p:grpSpPr>
+        <a:xfrm>
+          <a:off x="0" y="0"/>
+          <a:ext cx="0" cy="0"/>
+          <a:chOff x="0" y="0"/>
+          <a:chExt cx="0" cy="0"/>
+        </a:xfrm>
+      </p:grpSpPr>
+      <p:sp>
+        <p:nvSpPr>
+          <p:cNvPr id="2" name="Shape 0"/>
+          <p:cNvSpPr/>
+          <p:nvPr/>
+        </p:nvSpPr>
+        <p:spPr>
+          <a:xfrm>
+            <a:off x="640080" y="475488"/>
+            <a:ext cx="384048" cy="384048"/>
+          </a:xfrm>
+          <a:prstGeom prst="ellipse">
+            <a:avLst/>
+          </a:prstGeom>
+          <a:solidFill>
+            <a:srgbClr val="9C5B12"/>
+          </a:solidFill>
+          <a:ln/>
+        </p:spPr>
+      </p:sp>
+      <p:sp>
+        <p:nvSpPr>
+          <p:cNvPr id="3" name="Text 1"/>
+          <p:cNvSpPr txBox="1"/>
+          <p:nvPr/>
+        </p:nvSpPr>
+        <p:spPr>
+          <a:xfrm>
+            <a:off x="640080" y="475488"/>
+            <a:ext cx="384048" cy="384048"/>
+          </a:xfrm>
+          <a:prstGeom prst="rect">
+            <a:avLst/>
+          </a:prstGeom>
+          <a:noFill/>
+          <a:ln/>
+        </p:spPr>
+        <p:txBody>
+          <a:bodyPr wrap="square" lIns="0" tIns="0" rIns="0" bIns="0" rtlCol="0" anchor="ctr"/>
+          <a:lstStyle/>
+          <a:p>
+            <a:pPr algn="ctr" indent="0" marL="0">
+              <a:buNone/>
+            </a:pPr>
+            <a:r>
+              <a:rPr lang="en-US" sz="1400" b="1" dirty="0">
+                <a:solidFill>
+                  <a:srgbClr val="FFFFFF"/>
+                </a:solidFill>
+                <a:latin typeface="Calibri" pitchFamily="34" charset="0"/>
+                <a:ea typeface="Calibri" pitchFamily="34" charset="-122"/>
+                <a:cs typeface="Calibri" pitchFamily="34" charset="-120"/>
+              </a:rPr>
+              <a:t>13</a:t>
+            </a:r>
+            <a:endParaRPr lang="en-US" sz="1400" dirty="0"/>
+          </a:p>
+        </p:txBody>
+      </p:sp>
+      <p:sp>
+        <p:nvSpPr>
+          <p:cNvPr id="4" name="Text 2"/>
+          <p:cNvSpPr txBox="1"/>
+          <p:nvPr/>
+        </p:nvSpPr>
+        <p:spPr>
+          <a:xfrm>
+            <a:off x="1170432" y="402336"/>
+            <a:ext cx="10332720" cy="566928"/>
+          </a:xfrm>
+          <a:prstGeom prst="rect">
+            <a:avLst/>
+          </a:prstGeom>
+          <a:noFill/>
+          <a:ln/>
+        </p:spPr>
+        <p:txBody>
+          <a:bodyPr wrap="square" lIns="0" tIns="0" rIns="0" bIns="0" rtlCol="0" anchor="ctr"/>
+          <a:lstStyle/>
+          <a:p>
+            <a:pPr indent="0" marL="0">
+              <a:buNone/>
+            </a:pPr>
+            <a:r>
+              <a:rPr lang="en-US" sz="2700" b="1" dirty="0">
+                <a:solidFill>
+                  <a:srgbClr val="1A2530"/>
+                </a:solidFill>
+                <a:latin typeface="Cambria" pitchFamily="34" charset="0"/>
+                <a:ea typeface="Cambria" pitchFamily="34" charset="-122"/>
+                <a:cs typeface="Cambria" pitchFamily="34" charset="-120"/>
+              </a:rPr>
+              <a:t>Команда и распределение задач</a:t>
+            </a:r>
+            <a:endParaRPr lang="en-US" sz="2700" dirty="0"/>
+          </a:p>
+        </p:txBody>
+      </p:sp>
+      <p:sp>
+        <p:nvSpPr>
+          <p:cNvPr id="5" name="Shape 3"/>
+          <p:cNvSpPr/>
+          <p:nvPr/>
+        </p:nvSpPr>
+        <p:spPr>
+          <a:xfrm>
+            <a:off x="640080" y="1188720"/>
+            <a:ext cx="10881360" cy="1444752"/>
+          </a:xfrm>
+          <a:prstGeom prst="roundRect">
+            <a:avLst>
+              <a:gd name="adj" fmla="val 3797"/>
+            </a:avLst>
+          </a:prstGeom>
+          <a:solidFill>
+            <a:srgbClr val="F4F6F8"/>
+          </a:solidFill>
+          <a:ln/>
+        </p:spPr>
+      </p:sp>
+      <p:sp>
+        <p:nvSpPr>
+          <p:cNvPr id="6" name="Text 4"/>
+          <p:cNvSpPr txBox="1"/>
+          <p:nvPr/>
+        </p:nvSpPr>
+        <p:spPr>
+          <a:xfrm>
+            <a:off x="896112" y="1344168"/>
+            <a:ext cx="2468880" cy="329184"/>
+          </a:xfrm>
+          <a:prstGeom prst="rect">
+            <a:avLst/>
+          </a:prstGeom>
+          <a:noFill/>
+          <a:ln/>
+        </p:spPr>
+        <p:txBody>
+          <a:bodyPr wrap="square" lIns="0" tIns="0" rIns="0" bIns="0" rtlCol="0" anchor="ctr"/>
+          <a:lstStyle/>
+          <a:p>
+            <a:pPr indent="0" marL="0">
+              <a:buNone/>
+            </a:pPr>
+            <a:r>
+              <a:rPr lang="en-US" sz="1500" b="1" dirty="0">
+                <a:solidFill>
+                  <a:srgbClr val="1A2530"/>
+                </a:solidFill>
+                <a:latin typeface="Cambria" pitchFamily="34" charset="0"/>
+                <a:ea typeface="Cambria" pitchFamily="34" charset="-122"/>
+                <a:cs typeface="Cambria" pitchFamily="34" charset="-120"/>
+              </a:rPr>
+              <a:t>Александр Тармаев</a:t>
+            </a:r>
+            <a:endParaRPr lang="en-US" sz="1500" dirty="0"/>
+          </a:p>
+        </p:txBody>
+      </p:sp>
+      <p:sp>
+        <p:nvSpPr>
+          <p:cNvPr id="7" name="Text 5"/>
+          <p:cNvSpPr txBox="1"/>
+          <p:nvPr/>
+        </p:nvSpPr>
+        <p:spPr>
+          <a:xfrm>
+            <a:off x="896112" y="1700784"/>
+            <a:ext cx="2468880" cy="292608"/>
+          </a:xfrm>
+          <a:prstGeom prst="rect">
+            <a:avLst/>
+          </a:prstGeom>
+          <a:noFill/>
+          <a:ln/>
+        </p:spPr>
+        <p:txBody>
+          <a:bodyPr wrap="square" lIns="0" tIns="0" rIns="0" bIns="0" rtlCol="0" anchor="ctr"/>
+          <a:lstStyle/>
+          <a:p>
+            <a:pPr indent="0" marL="0">
+              <a:buNone/>
+            </a:pPr>
+            <a:r>
+              <a:rPr lang="en-US" sz="1150" b="1" dirty="0">
+                <a:solidFill>
+                  <a:srgbClr val="9C5B12"/>
+                </a:solidFill>
+                <a:latin typeface="Calibri" pitchFamily="34" charset="0"/>
+                <a:ea typeface="Calibri" pitchFamily="34" charset="-122"/>
+                <a:cs typeface="Calibri" pitchFamily="34" charset="-120"/>
+              </a:rPr>
+              <a:t>Product Engineer</a:t>
+            </a:r>
+            <a:endParaRPr lang="en-US" sz="1150" dirty="0"/>
+          </a:p>
+        </p:txBody>
+      </p:sp>
+      <p:sp>
+        <p:nvSpPr>
+          <p:cNvPr id="8" name="Text 6"/>
+          <p:cNvSpPr txBox="1"/>
+          <p:nvPr/>
+        </p:nvSpPr>
+        <p:spPr>
+          <a:xfrm>
+            <a:off x="896112" y="2011680"/>
+            <a:ext cx="2468880" cy="493776"/>
+          </a:xfrm>
+          <a:prstGeom prst="rect">
+            <a:avLst/>
+          </a:prstGeom>
+          <a:noFill/>
+          <a:ln/>
+        </p:spPr>
+        <p:txBody>
+          <a:bodyPr wrap="square" lIns="0" tIns="0" rIns="0" bIns="0" rtlCol="0" anchor="ctr"/>
+          <a:lstStyle/>
+          <a:p>
+            <a:pPr indent="0" marL="0">
+              <a:lnSpc>
+                <a:spcPts val="1250"/>
+              </a:lnSpc>
+              <a:buNone/>
+            </a:pPr>
+            <a:r>
+              <a:rPr lang="en-US" sz="1000" dirty="0">
+                <a:solidFill>
+                  <a:srgbClr val="6E7A88"/>
+                </a:solidFill>
+                <a:latin typeface="Calibri" pitchFamily="34" charset="0"/>
+                <a:ea typeface="Calibri" pitchFamily="34" charset="-122"/>
+                <a:cs typeface="Calibri" pitchFamily="34" charset="-120"/>
+              </a:rPr>
+              <a:t>Продуктовое видение, распределение работы, MVP</a:t>
+            </a:r>
+            <a:endParaRPr lang="en-US" sz="1000" dirty="0"/>
+          </a:p>
+        </p:txBody>
+      </p:sp>
+      <p:sp>
+        <p:nvSpPr>
+          <p:cNvPr id="9" name="Text 7"/>
+          <p:cNvSpPr txBox="1"/>
+          <p:nvPr/>
+        </p:nvSpPr>
+        <p:spPr>
+          <a:xfrm>
+            <a:off x="3520440" y="1389888"/>
+            <a:ext cx="6720840" cy="1078992"/>
+          </a:xfrm>
+          <a:prstGeom prst="rect">
+            <a:avLst/>
+          </a:prstGeom>
+          <a:noFill/>
+          <a:ln/>
+        </p:spPr>
+        <p:txBody>
+          <a:bodyPr wrap="square" lIns="0" tIns="0" rIns="0" bIns="0" rtlCol="0" anchor="ctr"/>
+          <a:lstStyle/>
+          <a:p>
+            <a:pPr indent="0" marL="0">
+              <a:lnSpc>
+                <a:spcPts val="1500"/>
+              </a:lnSpc>
+              <a:buNone/>
+            </a:pPr>
+            <a:r>
+              <a:rPr lang="en-US" sz="1100" dirty="0">
+                <a:solidFill>
+                  <a:srgbClr val="4E5966"/>
+                </a:solidFill>
+                <a:latin typeface="Calibri" pitchFamily="34" charset="0"/>
+                <a:ea typeface="Calibri" pitchFamily="34" charset="-122"/>
+                <a:cs typeface="Calibri" pitchFamily="34" charset="-120"/>
+              </a:rPr>
+              <a:t>Постановка продуктовой задачи и границы MVP · разбор девяти продуктовых гипотез · предложение клиентской метрики и её обоснование · журнал допущений и развилок · дизайн пилота · распределение работ</a:t>
+            </a:r>
+            <a:endParaRPr lang="en-US" sz="1100" dirty="0"/>
+          </a:p>
+        </p:txBody>
+      </p:sp>
+      <p:sp>
+        <p:nvSpPr>
+          <p:cNvPr id="10" name="Text 8"/>
+          <p:cNvSpPr txBox="1"/>
+          <p:nvPr/>
+        </p:nvSpPr>
+        <p:spPr>
+          <a:xfrm>
+            <a:off x="10378440" y="1737360"/>
+            <a:ext cx="960120" cy="347472"/>
+          </a:xfrm>
+          <a:prstGeom prst="rect">
+            <a:avLst/>
+          </a:prstGeom>
+          <a:noFill/>
+          <a:ln/>
+        </p:spPr>
+        <p:txBody>
+          <a:bodyPr wrap="square" lIns="0" tIns="0" rIns="0" bIns="0" rtlCol="0" anchor="ctr"/>
+          <a:lstStyle/>
+          <a:p>
+            <a:pPr algn="ctr" indent="0" marL="0">
+              <a:buNone/>
+            </a:pPr>
+            <a:r>
+              <a:rPr lang="en-US" sz="1400" b="1" dirty="0">
+                <a:solidFill>
+                  <a:srgbClr val="9C5B12"/>
+                </a:solidFill>
+                <a:latin typeface="Calibri" pitchFamily="34" charset="0"/>
+                <a:ea typeface="Calibri" pitchFamily="34" charset="-122"/>
+                <a:cs typeface="Calibri" pitchFamily="34" charset="-120"/>
+              </a:rPr>
+              <a:t>33 %</a:t>
+            </a:r>
+            <a:endParaRPr lang="en-US" sz="1400" dirty="0"/>
+          </a:p>
+        </p:txBody>
+      </p:sp>
+      <p:sp>
+        <p:nvSpPr>
+          <p:cNvPr id="11" name="Shape 9"/>
+          <p:cNvSpPr/>
+          <p:nvPr/>
+        </p:nvSpPr>
+        <p:spPr>
+          <a:xfrm>
+            <a:off x="640080" y="2788920"/>
+            <a:ext cx="10881360" cy="1444752"/>
+          </a:xfrm>
+          <a:prstGeom prst="roundRect">
+            <a:avLst>
+              <a:gd name="adj" fmla="val 3797"/>
+            </a:avLst>
+          </a:prstGeom>
+          <a:solidFill>
+            <a:srgbClr val="F4F6F8"/>
+          </a:solidFill>
+          <a:ln/>
+        </p:spPr>
+      </p:sp>
+      <p:sp>
+        <p:nvSpPr>
+          <p:cNvPr id="12" name="Text 10"/>
+          <p:cNvSpPr txBox="1"/>
+          <p:nvPr/>
+        </p:nvSpPr>
+        <p:spPr>
+          <a:xfrm>
+            <a:off x="896112" y="2944368"/>
+            <a:ext cx="2468880" cy="329184"/>
+          </a:xfrm>
+          <a:prstGeom prst="rect">
+            <a:avLst/>
+          </a:prstGeom>
+          <a:noFill/>
+          <a:ln/>
+        </p:spPr>
+        <p:txBody>
+          <a:bodyPr wrap="square" lIns="0" tIns="0" rIns="0" bIns="0" rtlCol="0" anchor="ctr"/>
+          <a:lstStyle/>
+          <a:p>
+            <a:pPr indent="0" marL="0">
+              <a:buNone/>
+            </a:pPr>
+            <a:r>
+              <a:rPr lang="en-US" sz="1500" b="1" dirty="0">
+                <a:solidFill>
+                  <a:srgbClr val="1A2530"/>
+                </a:solidFill>
+                <a:latin typeface="Cambria" pitchFamily="34" charset="0"/>
+                <a:ea typeface="Cambria" pitchFamily="34" charset="-122"/>
+                <a:cs typeface="Cambria" pitchFamily="34" charset="-120"/>
+              </a:rPr>
+              <a:t>Даниил Недайборщ</a:t>
+            </a:r>
+            <a:endParaRPr lang="en-US" sz="1500" dirty="0"/>
+          </a:p>
+        </p:txBody>
+      </p:sp>
+      <p:sp>
+        <p:nvSpPr>
+          <p:cNvPr id="13" name="Text 11"/>
+          <p:cNvSpPr txBox="1"/>
+          <p:nvPr/>
+        </p:nvSpPr>
+        <p:spPr>
+          <a:xfrm>
+            <a:off x="896112" y="3300984"/>
+            <a:ext cx="2468880" cy="292608"/>
+          </a:xfrm>
+          <a:prstGeom prst="rect">
+            <a:avLst/>
+          </a:prstGeom>
+          <a:noFill/>
+          <a:ln/>
+        </p:spPr>
+        <p:txBody>
+          <a:bodyPr wrap="square" lIns="0" tIns="0" rIns="0" bIns="0" rtlCol="0" anchor="ctr"/>
+          <a:lstStyle/>
+          <a:p>
+            <a:pPr indent="0" marL="0">
+              <a:buNone/>
+            </a:pPr>
+            <a:r>
+              <a:rPr lang="en-US" sz="1150" b="1" dirty="0">
+                <a:solidFill>
+                  <a:srgbClr val="9C5B12"/>
+                </a:solidFill>
+                <a:latin typeface="Calibri" pitchFamily="34" charset="0"/>
+                <a:ea typeface="Calibri" pitchFamily="34" charset="-122"/>
+                <a:cs typeface="Calibri" pitchFamily="34" charset="-120"/>
+              </a:rPr>
+              <a:t>AI Engineer · разработка</a:t>
+            </a:r>
+            <a:endParaRPr lang="en-US" sz="1150" dirty="0"/>
+          </a:p>
+        </p:txBody>
+      </p:sp>
+      <p:sp>
+        <p:nvSpPr>
+          <p:cNvPr id="14" name="Text 12"/>
+          <p:cNvSpPr txBox="1"/>
+          <p:nvPr/>
+        </p:nvSpPr>
+        <p:spPr>
+          <a:xfrm>
+            <a:off x="896112" y="3611880"/>
+            <a:ext cx="2468880" cy="493776"/>
+          </a:xfrm>
+          <a:prstGeom prst="rect">
+            <a:avLst/>
+          </a:prstGeom>
+          <a:noFill/>
+          <a:ln/>
+        </p:spPr>
+        <p:txBody>
+          <a:bodyPr wrap="square" lIns="0" tIns="0" rIns="0" bIns="0" rtlCol="0" anchor="ctr"/>
+          <a:lstStyle/>
+          <a:p>
+            <a:pPr indent="0" marL="0">
+              <a:lnSpc>
+                <a:spcPts val="1250"/>
+              </a:lnSpc>
+              <a:buNone/>
+            </a:pPr>
+            <a:r>
+              <a:rPr lang="en-US" sz="1000" dirty="0">
+                <a:solidFill>
+                  <a:srgbClr val="6E7A88"/>
+                </a:solidFill>
+                <a:latin typeface="Calibri" pitchFamily="34" charset="0"/>
+                <a:ea typeface="Calibri" pitchFamily="34" charset="-122"/>
+                <a:cs typeface="Calibri" pitchFamily="34" charset="-120"/>
+              </a:rPr>
+              <a:t>Данные, признаки, инфраструктура честности</a:t>
+            </a:r>
+            <a:endParaRPr lang="en-US" sz="1000" dirty="0"/>
+          </a:p>
+        </p:txBody>
+      </p:sp>
+      <p:sp>
+        <p:nvSpPr>
+          <p:cNvPr id="15" name="Text 13"/>
+          <p:cNvSpPr txBox="1"/>
+          <p:nvPr/>
+        </p:nvSpPr>
+        <p:spPr>
+          <a:xfrm>
+            <a:off x="3520440" y="2990088"/>
+            <a:ext cx="6720840" cy="1078992"/>
+          </a:xfrm>
+          <a:prstGeom prst="rect">
+            <a:avLst/>
+          </a:prstGeom>
+          <a:noFill/>
+          <a:ln/>
+        </p:spPr>
+        <p:txBody>
+          <a:bodyPr wrap="square" lIns="0" tIns="0" rIns="0" bIns="0" rtlCol="0" anchor="ctr"/>
+          <a:lstStyle/>
+          <a:p>
+            <a:pPr indent="0" marL="0">
+              <a:lnSpc>
+                <a:spcPts val="1500"/>
+              </a:lnSpc>
+              <a:buNone/>
+            </a:pPr>
+            <a:r>
+              <a:rPr lang="en-US" sz="1100" dirty="0">
+                <a:solidFill>
+                  <a:srgbClr val="4E5966"/>
+                </a:solidFill>
+                <a:latin typeface="Calibri" pitchFamily="34" charset="0"/>
+                <a:ea typeface="Calibri" pitchFamily="34" charset="-122"/>
+                <a:cs typeface="Calibri" pitchFamily="34" charset="-120"/>
+              </a:rPr>
+              <a:t>Загрузчик ЦБ с построчной нормировкой номинала · 83 признака только по прошлому · доказательство отсутствия заглядывания в будущее и 44 автотеста · walk-forward с очисткой в публикациях · signals_as_of(T) · воспроизводимость репозитория</a:t>
+            </a:r>
+            <a:endParaRPr lang="en-US" sz="1100" dirty="0"/>
+          </a:p>
+        </p:txBody>
+      </p:sp>
+      <p:sp>
+        <p:nvSpPr>
+          <p:cNvPr id="16" name="Text 14"/>
+          <p:cNvSpPr txBox="1"/>
+          <p:nvPr/>
+        </p:nvSpPr>
+        <p:spPr>
+          <a:xfrm>
+            <a:off x="10378440" y="3337560"/>
+            <a:ext cx="960120" cy="347472"/>
+          </a:xfrm>
+          <a:prstGeom prst="rect">
+            <a:avLst/>
+          </a:prstGeom>
+          <a:noFill/>
+          <a:ln/>
+        </p:spPr>
+        <p:txBody>
+          <a:bodyPr wrap="square" lIns="0" tIns="0" rIns="0" bIns="0" rtlCol="0" anchor="ctr"/>
+          <a:lstStyle/>
+          <a:p>
+            <a:pPr algn="ctr" indent="0" marL="0">
+              <a:buNone/>
+            </a:pPr>
+            <a:r>
+              <a:rPr lang="en-US" sz="1400" b="1" dirty="0">
+                <a:solidFill>
+                  <a:srgbClr val="9C5B12"/>
+                </a:solidFill>
+                <a:latin typeface="Calibri" pitchFamily="34" charset="0"/>
+                <a:ea typeface="Calibri" pitchFamily="34" charset="-122"/>
+                <a:cs typeface="Calibri" pitchFamily="34" charset="-120"/>
+              </a:rPr>
+              <a:t>33 %</a:t>
+            </a:r>
+            <a:endParaRPr lang="en-US" sz="1400" dirty="0"/>
+          </a:p>
+        </p:txBody>
+      </p:sp>
+      <p:sp>
+        <p:nvSpPr>
+          <p:cNvPr id="17" name="Shape 15"/>
+          <p:cNvSpPr/>
+          <p:nvPr/>
+        </p:nvSpPr>
+        <p:spPr>
+          <a:xfrm>
+            <a:off x="640080" y="4389120"/>
+            <a:ext cx="10881360" cy="1444752"/>
+          </a:xfrm>
+          <a:prstGeom prst="roundRect">
+            <a:avLst>
+              <a:gd name="adj" fmla="val 3797"/>
+            </a:avLst>
+          </a:prstGeom>
+          <a:solidFill>
+            <a:srgbClr val="F4F6F8"/>
+          </a:solidFill>
+          <a:ln/>
+        </p:spPr>
+      </p:sp>
+      <p:sp>
+        <p:nvSpPr>
+          <p:cNvPr id="18" name="Text 16"/>
+          <p:cNvSpPr txBox="1"/>
+          <p:nvPr/>
+        </p:nvSpPr>
+        <p:spPr>
+          <a:xfrm>
+            <a:off x="896112" y="4544568"/>
+            <a:ext cx="2468880" cy="329184"/>
+          </a:xfrm>
+          <a:prstGeom prst="rect">
+            <a:avLst/>
+          </a:prstGeom>
+          <a:noFill/>
+          <a:ln/>
+        </p:spPr>
+        <p:txBody>
+          <a:bodyPr wrap="square" lIns="0" tIns="0" rIns="0" bIns="0" rtlCol="0" anchor="ctr"/>
+          <a:lstStyle/>
+          <a:p>
+            <a:pPr indent="0" marL="0">
+              <a:buNone/>
+            </a:pPr>
+            <a:r>
+              <a:rPr lang="en-US" sz="1500" b="1" dirty="0">
+                <a:solidFill>
+                  <a:srgbClr val="1A2530"/>
+                </a:solidFill>
+                <a:latin typeface="Cambria" pitchFamily="34" charset="0"/>
+                <a:ea typeface="Cambria" pitchFamily="34" charset="-122"/>
+                <a:cs typeface="Cambria" pitchFamily="34" charset="-120"/>
+              </a:rPr>
+              <a:t>Иван Калинин</a:t>
+            </a:r>
+            <a:endParaRPr lang="en-US" sz="1500" dirty="0"/>
+          </a:p>
+        </p:txBody>
+      </p:sp>
+      <p:sp>
+        <p:nvSpPr>
+          <p:cNvPr id="19" name="Text 17"/>
+          <p:cNvSpPr txBox="1"/>
+          <p:nvPr/>
+        </p:nvSpPr>
+        <p:spPr>
+          <a:xfrm>
+            <a:off x="896112" y="4901184"/>
+            <a:ext cx="2468880" cy="292608"/>
+          </a:xfrm>
+          <a:prstGeom prst="rect">
+            <a:avLst/>
+          </a:prstGeom>
+          <a:noFill/>
+          <a:ln/>
+        </p:spPr>
+        <p:txBody>
+          <a:bodyPr wrap="square" lIns="0" tIns="0" rIns="0" bIns="0" rtlCol="0" anchor="ctr"/>
+          <a:lstStyle/>
+          <a:p>
+            <a:pPr indent="0" marL="0">
+              <a:buNone/>
+            </a:pPr>
+            <a:r>
+              <a:rPr lang="en-US" sz="1150" b="1" dirty="0">
+                <a:solidFill>
+                  <a:srgbClr val="9C5B12"/>
+                </a:solidFill>
+                <a:latin typeface="Calibri" pitchFamily="34" charset="0"/>
+                <a:ea typeface="Calibri" pitchFamily="34" charset="-122"/>
+                <a:cs typeface="Calibri" pitchFamily="34" charset="-120"/>
+              </a:rPr>
+              <a:t>AI Engineer · машинное обучение</a:t>
+            </a:r>
+            <a:endParaRPr lang="en-US" sz="1150" dirty="0"/>
+          </a:p>
+        </p:txBody>
+      </p:sp>
+      <p:sp>
+        <p:nvSpPr>
+          <p:cNvPr id="20" name="Text 18"/>
+          <p:cNvSpPr txBox="1"/>
+          <p:nvPr/>
+        </p:nvSpPr>
+        <p:spPr>
+          <a:xfrm>
+            <a:off x="896112" y="5212080"/>
+            <a:ext cx="2468880" cy="493776"/>
+          </a:xfrm>
+          <a:prstGeom prst="rect">
+            <a:avLst/>
+          </a:prstGeom>
+          <a:noFill/>
+          <a:ln/>
+        </p:spPr>
+        <p:txBody>
+          <a:bodyPr wrap="square" lIns="0" tIns="0" rIns="0" bIns="0" rtlCol="0" anchor="ctr"/>
+          <a:lstStyle/>
+          <a:p>
+            <a:pPr indent="0" marL="0">
+              <a:lnSpc>
+                <a:spcPts val="1250"/>
+              </a:lnSpc>
+              <a:buNone/>
+            </a:pPr>
+            <a:r>
+              <a:rPr lang="en-US" sz="1000" dirty="0">
+                <a:solidFill>
+                  <a:srgbClr val="6E7A88"/>
+                </a:solidFill>
+                <a:latin typeface="Calibri" pitchFamily="34" charset="0"/>
+                <a:ea typeface="Calibri" pitchFamily="34" charset="-122"/>
+                <a:cs typeface="Calibri" pitchFamily="34" charset="-120"/>
+              </a:rPr>
+              <a:t>Модели, отбор признаков, валидация результата</a:t>
+            </a:r>
+            <a:endParaRPr lang="en-US" sz="1000" dirty="0"/>
+          </a:p>
+        </p:txBody>
+      </p:sp>
+      <p:sp>
+        <p:nvSpPr>
+          <p:cNvPr id="21" name="Text 19"/>
+          <p:cNvSpPr txBox="1"/>
+          <p:nvPr/>
+        </p:nvSpPr>
+        <p:spPr>
+          <a:xfrm>
+            <a:off x="3520440" y="4590288"/>
+            <a:ext cx="6720840" cy="1078992"/>
+          </a:xfrm>
+          <a:prstGeom prst="rect">
+            <a:avLst/>
+          </a:prstGeom>
+          <a:noFill/>
+          <a:ln/>
+        </p:spPr>
+        <p:txBody>
+          <a:bodyPr wrap="square" lIns="0" tIns="0" rIns="0" bIns="0" rtlCol="0" anchor="ctr"/>
+          <a:lstStyle/>
+          <a:p>
+            <a:pPr indent="0" marL="0">
+              <a:lnSpc>
+                <a:spcPts val="1500"/>
+              </a:lnSpc>
+              <a:buNone/>
+            </a:pPr>
+            <a:r>
+              <a:rPr lang="en-US" sz="1100" dirty="0">
+                <a:solidFill>
+                  <a:srgbClr val="4E5966"/>
+                </a:solidFill>
+                <a:latin typeface="Calibri" pitchFamily="34" charset="0"/>
+                <a:ea typeface="Calibri" pitchFamily="34" charset="-122"/>
+                <a:cs typeface="Calibri" pitchFamily="34" charset="-120"/>
+              </a:rPr>
+              <a:t>Пять семейств моделей, включая CatBoost и XGBoost · честный отбор признаков · подбор конфигураций и диагностика провала на всех признаках · две модели под две метрики · испытания результата</a:t>
+            </a:r>
+            <a:endParaRPr lang="en-US" sz="1100" dirty="0"/>
+          </a:p>
+        </p:txBody>
+      </p:sp>
+      <p:sp>
+        <p:nvSpPr>
+          <p:cNvPr id="22" name="Text 20"/>
+          <p:cNvSpPr txBox="1"/>
+          <p:nvPr/>
+        </p:nvSpPr>
+        <p:spPr>
+          <a:xfrm>
+            <a:off x="10378440" y="4937760"/>
+            <a:ext cx="960120" cy="347472"/>
+          </a:xfrm>
+          <a:prstGeom prst="rect">
+            <a:avLst/>
+          </a:prstGeom>
+          <a:noFill/>
+          <a:ln/>
+        </p:spPr>
+        <p:txBody>
+          <a:bodyPr wrap="square" lIns="0" tIns="0" rIns="0" bIns="0" rtlCol="0" anchor="ctr"/>
+          <a:lstStyle/>
+          <a:p>
+            <a:pPr algn="ctr" indent="0" marL="0">
+              <a:buNone/>
+            </a:pPr>
+            <a:r>
+              <a:rPr lang="en-US" sz="1400" b="1" dirty="0">
+                <a:solidFill>
+                  <a:srgbClr val="9C5B12"/>
+                </a:solidFill>
+                <a:latin typeface="Calibri" pitchFamily="34" charset="0"/>
+                <a:ea typeface="Calibri" pitchFamily="34" charset="-122"/>
+                <a:cs typeface="Calibri" pitchFamily="34" charset="-120"/>
+              </a:rPr>
+              <a:t>33 %</a:t>
+            </a:r>
+            <a:endParaRPr lang="en-US" sz="1400" dirty="0"/>
+          </a:p>
+        </p:txBody>
+      </p:sp>
+      <p:sp>
+        <p:nvSpPr>
+          <p:cNvPr id="23" name="Text 21"/>
+          <p:cNvSpPr txBox="1"/>
+          <p:nvPr/>
+        </p:nvSpPr>
+        <p:spPr>
+          <a:xfrm>
+            <a:off x="640080" y="6272784"/>
+            <a:ext cx="10881360" cy="310896"/>
+          </a:xfrm>
+          <a:prstGeom prst="rect">
+            <a:avLst/>
+          </a:prstGeom>
+          <a:noFill/>
+          <a:ln/>
+        </p:spPr>
+        <p:txBody>
+          <a:bodyPr wrap="square" lIns="0" tIns="0" rIns="0" bIns="0" rtlCol="0" anchor="ctr"/>
+          <a:lstStyle/>
+          <a:p>
+            <a:pPr indent="0" marL="0">
+              <a:buNone/>
+            </a:pPr>
+            <a:r>
+              <a:rPr lang="en-US" sz="1050" i="1" dirty="0">
+                <a:solidFill>
+                  <a:srgbClr val="6E7A88"/>
+                </a:solidFill>
+                <a:latin typeface="Calibri" pitchFamily="34" charset="0"/>
+                <a:ea typeface="Calibri" pitchFamily="34" charset="-122"/>
+                <a:cs typeface="Calibri" pitchFamily="34" charset="-120"/>
+              </a:rPr>
+              <a:t>Работа велась совместно, роли разделены по зонам ответственности; вклад участников сопоставим.</a:t>
+            </a:r>
+            <a:endParaRPr lang="en-US" sz="1050" dirty="0"/>
+          </a:p>
+        </p:txBody>
+      </p:sp>
+    </p:spTree>
+  </p:cSld>
+  <p:clrMapOvr>
+    <a:masterClrMapping/>
+  </p:clrMapOvr>
+</p:sld>
+</file>
+
+<file path=ppt/slides/slide16.xml><?xml version="1.0" encoding="utf-8"?>
+<p:sld xmlns:a="http://schemas.openxmlformats.org/drawingml/2006/main" xmlns:r="http://schemas.openxmlformats.org/officeDocument/2006/relationships" xmlns:p="http://schemas.openxmlformats.org/presentationml/2006/main">
+  <p:cSld name="Slide 16">
     <p:spTree>
       <p:nvGrpSpPr>
         <p:cNvPr id="1" name=""/>

--- a/submission/prezentaciya-promezhutochnaya.pptx
+++ b/submission/prezentaciya-promezhutochnaya.pptx
@@ -17,6 +17,7 @@
     <p:sldId id="265" r:id="rId11"/>
     <p:sldId id="266" r:id="rId12"/>
     <p:sldId id="267" r:id="rId13"/>
+    <p:sldId id="272" r:id="rId23"/>
     <p:sldId id="268" r:id="rId14"/>
     <p:sldId id="269" r:id="rId15"/>
     <p:sldId id="270" r:id="rId16"/>
@@ -3070,6 +3071,10 @@
           </a:solidFill>
           <a:ln/>
         </p:spPr>
+        <p:txBody>
+          <a:bodyPr/>
+          <a:p/>
+        </p:txBody>
       </p:sp>
       <p:sp>
         <p:nvSpPr>
@@ -3170,6 +3175,10 @@
           </a:solidFill>
           <a:ln/>
         </p:spPr>
+        <p:txBody>
+          <a:bodyPr/>
+          <a:p/>
+        </p:txBody>
       </p:sp>
       <p:sp>
         <p:nvSpPr>
@@ -3275,7 +3284,7 @@
                 <a:ea typeface="Calibri" pitchFamily="34" charset="-122"/>
                 <a:cs typeface="Calibri" pitchFamily="34" charset="-120"/>
               </a:rPr>
-              <a:t>Цвет не означает «выгодно»: по достижимой выгоде значимо только состояние «дорого», и его смысл — «не жди».</a:t>
+              <a:t>Цвет не означает «выгодно»: по достижимой выгоде значимо только состояние «дорого», и сказать о нём можно лишь то, что за такими днями ожидание в прошлом не окупалось.</a:t>
             </a:r>
             <a:endParaRPr lang="en-US" sz="1250" dirty="0"/>
           </a:p>
@@ -3302,6 +3311,10 @@
           </a:solidFill>
           <a:ln/>
         </p:spPr>
+        <p:txBody>
+          <a:bodyPr/>
+          <a:p/>
+        </p:txBody>
       </p:sp>
       <p:sp>
         <p:nvSpPr>
@@ -3434,6 +3447,10 @@
           </a:solidFill>
           <a:ln/>
         </p:spPr>
+        <p:txBody>
+          <a:bodyPr/>
+          <a:p/>
+        </p:txBody>
       </p:sp>
       <p:sp>
         <p:nvSpPr>
@@ -3566,6 +3583,10 @@
           </a:solidFill>
           <a:ln/>
         </p:spPr>
+        <p:txBody>
+          <a:bodyPr/>
+          <a:p/>
+        </p:txBody>
       </p:sp>
       <p:sp>
         <p:nvSpPr>
@@ -3662,7 +3683,7 @@
                 <a:ea typeface="Calibri" pitchFamily="34" charset="-122"/>
                 <a:cs typeface="Calibri" pitchFamily="34" charset="-120"/>
               </a:rPr>
-              <a:t>Нижний дециль («дёшево»): −1 б. п., ДИ [−26; +24] — от нуля неотличим</a:t>
+              <a:t>Нижний дециль диапазона («дёшево»), 18 % дней: −1 б. п., ДИ [−26; +24] — от нуля неотличим</a:t>
             </a:r>
             <a:endParaRPr lang="en-US" sz="1200" dirty="0"/>
           </a:p>
@@ -3702,27 +3723,7 @@
                 <a:ea typeface="Calibri" pitchFamily="34" charset="-122"/>
                 <a:cs typeface="Calibri" pitchFamily="34" charset="-120"/>
               </a:rPr>
-              <a:t>Верхний дециль («дорого»): +48 б. п., ДИ [+22; +75] — единственное значимое состояние</a:t>
-            </a:r>
-            <a:endParaRPr lang="en-US" sz="1200" dirty="0"/>
-          </a:p>
-          <a:p>
-            <a:pPr indent="0" marL="0">
-              <a:lnSpc>
-                <a:spcPts val="1700"/>
-              </a:lnSpc>
-              <a:buNone/>
-            </a:pPr>
-            <a:r>
-              <a:rPr lang="en-US" sz="1200" dirty="0">
-                <a:solidFill>
-                  <a:srgbClr val="4E5966"/>
-                </a:solidFill>
-                <a:latin typeface="Calibri" pitchFamily="34" charset="0"/>
-                <a:ea typeface="Calibri" pitchFamily="34" charset="-122"/>
-                <a:cs typeface="Calibri" pitchFamily="34" charset="-120"/>
-              </a:rPr>
-              <a:t>Интуитивная раскраска «зелёный, когда дёшево» противоречит данным. Информативно ровно одно состояние. Допустимое его содержание — факт о прошлом: «ожидание из таких дней раньше не окупалось». Сказать «дальше будет хуже» кейс запрещает.</a:t>
+              <a:t>Верхний дециль диапазона («дорого»), 17 % дней: +48 б. п., ДИ [+22; +75] — единственное значимое</a:t>
             </a:r>
             <a:endParaRPr lang="en-US" sz="1200" dirty="0"/>
           </a:p>
@@ -3737,6 +3738,224 @@
 </file>
 
 <file path=ppt/slides/slide13.xml><?xml version="1.0" encoding="utf-8"?>
+<p:sld xmlns:a="http://schemas.openxmlformats.org/drawingml/2006/main" xmlns:r="http://schemas.openxmlformats.org/officeDocument/2006/relationships" xmlns:p="http://schemas.openxmlformats.org/presentationml/2006/main">
+  <p:cSld name="Slide 11">
+    <p:bg>
+      <p:bgPr>
+        <a:solidFill>
+          <a:srgbClr val="FFFFFF"/>
+        </a:solidFill>
+      </p:bgPr>
+    </p:bg>
+    <p:spTree>
+      <p:nvGrpSpPr>
+        <p:cNvPr id="1" name=""/>
+        <p:cNvGrpSpPr/>
+        <p:nvPr/>
+      </p:nvGrpSpPr>
+      <p:grpSpPr>
+        <a:xfrm>
+          <a:off x="0" y="0"/>
+          <a:ext cx="0" cy="0"/>
+          <a:chOff x="0" y="0"/>
+          <a:chExt cx="0" cy="0"/>
+        </a:xfrm>
+      </p:grpSpPr>
+      <p:sp>
+        <p:nvSpPr>
+          <p:cNvPr id="2" name="Shape 0"/>
+          <p:cNvSpPr/>
+          <p:nvPr/>
+        </p:nvSpPr>
+        <p:spPr>
+          <a:xfrm>
+            <a:off x="640080" y="475488"/>
+            <a:ext cx="384048" cy="384048"/>
+          </a:xfrm>
+          <a:prstGeom prst="ellipse">
+            <a:avLst/>
+          </a:prstGeom>
+          <a:solidFill>
+            <a:srgbClr val="9C5B12"/>
+          </a:solidFill>
+          <a:ln/>
+        </p:spPr>
+        <p:txBody>
+          <a:bodyPr/>
+          <a:p/>
+        </p:txBody>
+      </p:sp>
+      <p:sp>
+        <p:nvSpPr>
+          <p:cNvPr id="3" name="Text 1"/>
+          <p:cNvSpPr txBox="1"/>
+          <p:nvPr/>
+        </p:nvSpPr>
+        <p:spPr>
+          <a:xfrm>
+            <a:off x="640080" y="475488"/>
+            <a:ext cx="384048" cy="384048"/>
+          </a:xfrm>
+          <a:prstGeom prst="rect">
+            <a:avLst/>
+          </a:prstGeom>
+          <a:noFill/>
+          <a:ln/>
+        </p:spPr>
+        <p:txBody>
+          <a:bodyPr wrap="square" lIns="0" tIns="0" rIns="0" bIns="0" rtlCol="0" anchor="ctr"/>
+          <a:lstStyle/>
+          <a:p>
+            <a:pPr algn="ctr" indent="0" marL="0">
+              <a:buNone/>
+            </a:pPr>
+            <a:r>
+              <a:rPr lang="en-US" sz="1400" b="1" dirty="0">
+                <a:solidFill>
+                  <a:srgbClr val="FFFFFF"/>
+                </a:solidFill>
+                <a:latin typeface="Calibri" pitchFamily="34" charset="0"/>
+                <a:ea typeface="Calibri" pitchFamily="34" charset="-122"/>
+                <a:cs typeface="Calibri" pitchFamily="34" charset="-120"/>
+              </a:rPr>
+              <a:t>11</a:t>
+            </a:r>
+            <a:endParaRPr lang="en-US" sz="1400" dirty="0"/>
+          </a:p>
+        </p:txBody>
+      </p:sp>
+      <p:sp>
+        <p:nvSpPr>
+          <p:cNvPr id="4" name="Text 2"/>
+          <p:cNvSpPr txBox="1"/>
+          <p:nvPr/>
+        </p:nvSpPr>
+        <p:spPr>
+          <a:xfrm>
+            <a:off x="1170432" y="402336"/>
+            <a:ext cx="10332720" cy="566928"/>
+          </a:xfrm>
+          <a:prstGeom prst="rect">
+            <a:avLst/>
+          </a:prstGeom>
+          <a:noFill/>
+          <a:ln/>
+        </p:spPr>
+        <p:txBody>
+          <a:bodyPr wrap="square" lIns="0" tIns="0" rIns="0" bIns="0" rtlCol="0" anchor="ctr"/>
+          <a:lstStyle/>
+          <a:p>
+            <a:pPr indent="0" marL="0">
+              <a:buNone/>
+            </a:pPr>
+            <a:r>
+              <a:rPr lang="en-US" sz="2700" b="1" dirty="0">
+                <a:solidFill>
+                  <a:srgbClr val="1A2530"/>
+                </a:solidFill>
+                <a:latin typeface="Cambria" pitchFamily="34" charset="0"/>
+                <a:ea typeface="Cambria" pitchFamily="34" charset="-122"/>
+                <a:cs typeface="Cambria" pitchFamily="34" charset="-120"/>
+              </a:rPr>
+              <a:t>Демонстрация: как это выглядит у клиента</a:t>
+            </a:r>
+            <a:endParaRPr lang="en-US" sz="2700" dirty="0"/>
+          </a:p>
+        </p:txBody>
+      </p:sp>
+      <p:sp>
+        <p:nvSpPr>
+          <p:cNvPr id="6" name="Text 3"/>
+          <p:cNvSpPr txBox="1"/>
+          <p:nvPr/>
+        </p:nvSpPr>
+        <p:spPr>
+          <a:xfrm>
+            <a:off x="640080" y="5532120"/>
+            <a:ext cx="10881360" cy="1005840"/>
+          </a:xfrm>
+          <a:prstGeom prst="rect">
+            <a:avLst/>
+          </a:prstGeom>
+          <a:noFill/>
+          <a:ln/>
+        </p:spPr>
+        <p:txBody>
+          <a:bodyPr wrap="square" lIns="0" tIns="0" rIns="0" bIns="0" rtlCol="0" anchor="ctr"/>
+          <a:lstStyle/>
+          <a:p>
+            <a:pPr indent="0" marL="0">
+              <a:lnSpc>
+                <a:spcPts val="1800"/>
+              </a:lnSpc>
+              <a:buNone/>
+            </a:pPr>
+            <a:r>
+              <a:rPr lang="en-US" sz="1250" b="1" dirty="0">
+                <a:solidFill>
+                  <a:srgbClr val="4E5966"/>
+                </a:solidFill>
+                <a:latin typeface="Calibri" pitchFamily="34" charset="0"/>
+                <a:ea typeface="Calibri" pitchFamily="34" charset="-122"/>
+                <a:cs typeface="Calibri" pitchFamily="34" charset="-120"/>
+              </a:rPr>
+              <a:t>Пять экранов существующего флоу перевода — новых шагов не добавляется ни одного. Виджет встаёт на экран суммы, где решение и принимается, и показывает сумму в сумах, а не курс. Пуш 2 — сигнал модели — дан в рамке «перестань ждать»: это единственный текст, найденный для состояния, в котором правило действительно срабатывает, и комплаенс он ещё не проходил. Данные на экранах вымышленные.</a:t>
+            </a:r>
+            <a:pPr indent="0" marL="0">
+              <a:lnSpc>
+                <a:spcPts val="1800"/>
+              </a:lnSpc>
+              <a:buNone/>
+            </a:pPr>
+            <a:pPr indent="0" marL="0">
+              <a:lnSpc>
+                <a:spcPts val="1800"/>
+              </a:lnSpc>
+              <a:buNone/>
+            </a:pPr>
+            <a:pPr indent="0" marL="0">
+              <a:lnSpc>
+                <a:spcPts val="1800"/>
+              </a:lnSpc>
+              <a:buNone/>
+            </a:pPr>
+            <a:endParaRPr lang="en-US" sz="1250" dirty="0"/>
+          </a:p>
+        </p:txBody>
+      </p:sp>
+      <p:pic>
+        <p:nvPicPr>
+          <p:cNvPr id="7" name="Picture 6" descr="06-makety-interfeysa.png"/>
+          <p:cNvPicPr>
+            <a:picLocks noChangeAspect="1"/>
+          </p:cNvPicPr>
+          <p:nvPr/>
+        </p:nvPicPr>
+        <p:blipFill>
+          <a:blip r:embed="rId3"/>
+          <a:stretch>
+            <a:fillRect/>
+          </a:stretch>
+        </p:blipFill>
+        <p:spPr>
+          <a:xfrm>
+            <a:off x="1069848" y="1143000"/>
+            <a:ext cx="10058400" cy="4206240"/>
+          </a:xfrm>
+          <a:prstGeom prst="rect">
+            <a:avLst/>
+          </a:prstGeom>
+        </p:spPr>
+      </p:pic>
+    </p:spTree>
+  </p:cSld>
+  <p:clrMapOvr>
+    <a:masterClrMapping/>
+  </p:clrMapOvr>
+</p:sld>
+</file>
+
+<file path=ppt/slides/slide14.xml><?xml version="1.0" encoding="utf-8"?>
 <p:sld xmlns:a="http://schemas.openxmlformats.org/drawingml/2006/main" xmlns:r="http://schemas.openxmlformats.org/officeDocument/2006/relationships" xmlns:p="http://schemas.openxmlformats.org/presentationml/2006/main">
   <p:cSld name="Slide 13">
     <p:bg>
@@ -3779,6 +3998,10 @@
           </a:solidFill>
           <a:ln/>
         </p:spPr>
+        <p:txBody>
+          <a:bodyPr/>
+          <a:p/>
+        </p:txBody>
       </p:sp>
       <p:sp>
         <p:nvSpPr>
@@ -3813,7 +4036,7 @@
                 <a:ea typeface="Calibri" pitchFamily="34" charset="-122"/>
                 <a:cs typeface="Calibri" pitchFamily="34" charset="-120"/>
               </a:rPr>
-              <a:t>11</a:t>
+              <a:t>12</a:t>
             </a:r>
             <a:endParaRPr lang="en-US" sz="1400" dirty="0"/>
           </a:p>
@@ -4190,7 +4413,7 @@
                 <a:ea typeface="Calibri" pitchFamily="34" charset="-122"/>
                 <a:cs typeface="Calibri" pitchFamily="34" charset="-120"/>
               </a:rPr>
-              <a:t>Пт: signals.csv, правило комбинирования и добор до полосы частоты, экономика в рублях</a:t>
+              <a:t>Сделано: тексты уведомлений и отбор, макеты трёх компонентов, дизайн пилота</a:t>
             </a:r>
             <a:endParaRPr lang="en-US" sz="1150" dirty="0"/>
           </a:p>
@@ -4214,7 +4437,7 @@
                 <a:ea typeface="Calibri" pitchFamily="34" charset="-122"/>
                 <a:cs typeface="Calibri" pitchFamily="34" charset="-120"/>
               </a:rPr>
-              <a:t>Сб: тексты уведомлений под рамку «перестань ждать», прототип экрана, дизайн пилота</a:t>
+              <a:t>Пт–Сб: signals.csv, правило комбинирования и добор до полосы частоты, экономика в рублях</a:t>
             </a:r>
             <a:endParaRPr lang="en-US" sz="1150" dirty="0"/>
           </a:p>
@@ -4238,6 +4461,30 @@
                 <a:ea typeface="Calibri" pitchFamily="34" charset="-122"/>
                 <a:cs typeface="Calibri" pitchFamily="34" charset="-120"/>
               </a:rPr>
+              <a:t>Сб: падежный словарь валют и праздников в коде, приветствия — у носителей языка</a:t>
+            </a:r>
+            <a:endParaRPr lang="en-US" sz="1150" dirty="0"/>
+          </a:p>
+          <a:p>
+            <a:pPr marL="342900" indent="-342900">
+              <a:lnSpc>
+                <a:spcPts val="1600"/>
+              </a:lnSpc>
+              <a:spcAft>
+                <a:spcPts val="400"/>
+              </a:spcAft>
+              <a:buSzPct val="100000"/>
+              <a:buChar char="•"/>
+            </a:pPr>
+            <a:r>
+              <a:rPr lang="en-US" sz="1150" dirty="0">
+                <a:solidFill>
+                  <a:srgbClr val="4E5966"/>
+                </a:solidFill>
+                <a:latin typeface="Calibri" pitchFamily="34" charset="0"/>
+                <a:ea typeface="Calibri" pitchFamily="34" charset="-122"/>
+                <a:cs typeface="Calibri" pitchFamily="34" charset="-120"/>
+              </a:rPr>
               <a:t>Вс: сборка презентации, два прогона с таймером, финальный журнал допущений</a:t>
             </a:r>
             <a:endParaRPr lang="en-US" sz="1150" dirty="0"/>
@@ -4384,7 +4631,7 @@
 </p:sld>
 </file>
 
-<file path=ppt/slides/slide14.xml><?xml version="1.0" encoding="utf-8"?>
+<file path=ppt/slides/slide15.xml><?xml version="1.0" encoding="utf-8"?>
 <p:sld xmlns:a="http://schemas.openxmlformats.org/drawingml/2006/main" xmlns:r="http://schemas.openxmlformats.org/officeDocument/2006/relationships" xmlns:p="http://schemas.openxmlformats.org/presentationml/2006/main">
   <p:cSld name="Slide 14">
     <p:bg>
@@ -4427,6 +4674,10 @@
           </a:solidFill>
           <a:ln/>
         </p:spPr>
+        <p:txBody>
+          <a:bodyPr/>
+          <a:p/>
+        </p:txBody>
       </p:sp>
       <p:sp>
         <p:nvSpPr>
@@ -4461,7 +4712,7 @@
                 <a:ea typeface="Calibri" pitchFamily="34" charset="-122"/>
                 <a:cs typeface="Calibri" pitchFamily="34" charset="-120"/>
               </a:rPr>
-              <a:t>12</a:t>
+              <a:t>13</a:t>
             </a:r>
             <a:endParaRPr lang="en-US" sz="1400" dirty="0"/>
           </a:p>
@@ -4952,7 +5203,7 @@
 </p:sld>
 </file>
 
-<file path=ppt/slides/slide15.xml><?xml version="1.0" encoding="utf-8"?>
+<file path=ppt/slides/slide16.xml><?xml version="1.0" encoding="utf-8"?>
 <p:sld xmlns:a="http://schemas.openxmlformats.org/drawingml/2006/main" xmlns:r="http://schemas.openxmlformats.org/officeDocument/2006/relationships" xmlns:p="http://schemas.openxmlformats.org/presentationml/2006/main">
   <p:cSld name="Slide 15">
     <p:bg>
@@ -4995,6 +5246,10 @@
           </a:solidFill>
           <a:ln/>
         </p:spPr>
+        <p:txBody>
+          <a:bodyPr/>
+          <a:p/>
+        </p:txBody>
       </p:sp>
       <p:sp>
         <p:nvSpPr>
@@ -5029,7 +5284,7 @@
                 <a:ea typeface="Calibri" pitchFamily="34" charset="-122"/>
                 <a:cs typeface="Calibri" pitchFamily="34" charset="-120"/>
               </a:rPr>
-              <a:t>13</a:t>
+              <a:t>14</a:t>
             </a:r>
             <a:endParaRPr lang="en-US" sz="1400" dirty="0"/>
           </a:p>
@@ -5790,7 +6045,7 @@
 </p:sld>
 </file>
 
-<file path=ppt/slides/slide16.xml><?xml version="1.0" encoding="utf-8"?>
+<file path=ppt/slides/slide17.xml><?xml version="1.0" encoding="utf-8"?>
 <p:sld xmlns:a="http://schemas.openxmlformats.org/drawingml/2006/main" xmlns:r="http://schemas.openxmlformats.org/officeDocument/2006/relationships" xmlns:p="http://schemas.openxmlformats.org/presentationml/2006/main">
   <p:cSld name="Slide 16">
     <p:spTree>

--- a/submission/prezentaciya-promezhutochnaya.pptx
+++ b/submission/prezentaciya-promezhutochnaya.pptx
@@ -17,14 +17,15 @@
     <p:sldId id="265" r:id="rId11"/>
     <p:sldId id="266" r:id="rId12"/>
     <p:sldId id="267" r:id="rId13"/>
-    <p:sldId id="272" r:id="rId23"/>
     <p:sldId id="268" r:id="rId14"/>
     <p:sldId id="269" r:id="rId15"/>
     <p:sldId id="270" r:id="rId16"/>
     <p:sldId id="271" r:id="rId17"/>
+    <p:sldId id="272" r:id="rId18"/>
+    <p:sldId id="273" r:id="rId19"/>
   </p:sldIdLst>
   <p:notesMasterIdLst>
-    <p:notesMasterId r:id="rId18"/>
+    <p:notesMasterId r:id="rId20"/>
   </p:notesMasterIdLst>
   <p:sldSz cx="12192000" cy="6858000"/>
   <p:notesSz cx="6858000" cy="12192000"/>
@@ -958,7 +959,7 @@
           <a:p>
             <a:r>
               <a:rPr lang="en-US" dirty="0"/>
-              <a:t>Расчёт в run_product_numbers.py, вывод в submission/10. SD выгоды 237 бп, design effect по датам 3,93 - измерен, а не назначен. 275 сигнальных дней за 296 недель. Сходится с тем, что на тесте интервал +63 [+33; +94] ноль не накрывает: там набралось 275 дней при потребности в 136.</a:t>
+              <a:t/>
             </a:r>
             <a:endParaRPr lang="en-US" dirty="0"/>
           </a:p>
@@ -1134,7 +1135,7 @@
           <a:p>
             <a:r>
               <a:rPr lang="en-US" dirty="0"/>
-              <a:t>Закрываем не результатом модели, а решением, которое нужно от заказчика. Три вопроса выбраны так, что ответ на каждый меняет содержание работы к финалу, а не только её объём.</a:t>
+              <a:t>Расчёт в run_product_numbers.py, вывод в submission/10. SD выгоды 237 бп, design effect по датам 3,93 - измерен, а не назначен. 275 сигнальных дней за 296 недель. Сходится с тем, что на тесте интервал +63 [+33; +94] ноль не накрывает: там набралось 275 дней при потребности в 136.</a:t>
             </a:r>
             <a:endParaRPr lang="en-US" dirty="0"/>
           </a:p>
@@ -1158,6 +1159,182 @@
             <a:fld id="{F7021451-1387-4CA6-816F-3879F97B5CBC}" type="slidenum">
               <a:rPr lang="en-US"/>
               <a:t>16</a:t>
+            </a:fld>
+            <a:endParaRPr lang="en-US"/>
+          </a:p>
+        </p:txBody>
+      </p:sp>
+    </p:spTree>
+    <p:extLst>
+      <p:ext uri="{BB962C8B-B14F-4D97-AF65-F5344CB8AC3E}">
+        <p14:creationId xmlns:p14="http://schemas.microsoft.com/office/powerpoint/2010/main" val="1024086991"/>
+      </p:ext>
+    </p:extLst>
+  </p:cSld>
+  <p:clrMapOvr>
+    <a:masterClrMapping/>
+  </p:clrMapOvr>
+</p:notes>
+</file>
+
+<file path=ppt/notesSlides/notesSlide17.xml><?xml version="1.0" encoding="utf-8"?>
+<p:notes xmlns:a="http://schemas.openxmlformats.org/drawingml/2006/main" xmlns:r="http://schemas.openxmlformats.org/officeDocument/2006/relationships" xmlns:p="http://schemas.openxmlformats.org/presentationml/2006/main">
+  <p:cSld>
+    <p:spTree>
+      <p:nvGrpSpPr>
+        <p:cNvPr id="1" name=""/>
+        <p:cNvGrpSpPr/>
+        <p:nvPr/>
+      </p:nvGrpSpPr>
+      <p:grpSpPr>
+        <a:xfrm>
+          <a:off x="0" y="0"/>
+          <a:ext cx="0" cy="0"/>
+          <a:chOff x="0" y="0"/>
+          <a:chExt cx="0" cy="0"/>
+        </a:xfrm>
+      </p:grpSpPr>
+      <p:sp>
+        <p:nvSpPr>
+          <p:cNvPr id="2" name="Slide Image Placeholder 1"/>
+          <p:cNvSpPr>
+            <a:spLocks noGrp="1" noRot="1" noChangeAspect="1"/>
+          </p:cNvSpPr>
+          <p:nvPr>
+            <p:ph type="sldImg"/>
+          </p:nvPr>
+        </p:nvSpPr>
+        <p:spPr/>
+      </p:sp>
+      <p:sp>
+        <p:nvSpPr>
+          <p:cNvPr id="3" name="Notes Placeholder 2"/>
+          <p:cNvSpPr>
+            <a:spLocks noGrp="1"/>
+          </p:cNvSpPr>
+          <p:nvPr>
+            <p:ph type="body" idx="1"/>
+          </p:nvPr>
+        </p:nvSpPr>
+        <p:spPr/>
+        <p:txBody>
+          <a:bodyPr/>
+          <a:lstStyle/>
+          <a:p>
+            <a:r>
+              <a:rPr lang="en-US" dirty="0"/>
+              <a:t/>
+            </a:r>
+            <a:endParaRPr lang="en-US" dirty="0"/>
+          </a:p>
+        </p:txBody>
+      </p:sp>
+      <p:sp>
+        <p:nvSpPr>
+          <p:cNvPr id="4" name="Slide Number Placeholder 3"/>
+          <p:cNvSpPr>
+            <a:spLocks noGrp="1"/>
+          </p:cNvSpPr>
+          <p:nvPr>
+            <p:ph type="sldNum" sz="quarter" idx="10"/>
+          </p:nvPr>
+        </p:nvSpPr>
+        <p:spPr/>
+        <p:txBody>
+          <a:bodyPr/>
+          <a:lstStyle/>
+          <a:p>
+            <a:fld id="{F7021451-1387-4CA6-816F-3879F97B5CBC}" type="slidenum">
+              <a:rPr lang="en-US"/>
+              <a:t>17</a:t>
+            </a:fld>
+            <a:endParaRPr lang="en-US"/>
+          </a:p>
+        </p:txBody>
+      </p:sp>
+    </p:spTree>
+    <p:extLst>
+      <p:ext uri="{BB962C8B-B14F-4D97-AF65-F5344CB8AC3E}">
+        <p14:creationId xmlns:p14="http://schemas.microsoft.com/office/powerpoint/2010/main" val="1024086991"/>
+      </p:ext>
+    </p:extLst>
+  </p:cSld>
+  <p:clrMapOvr>
+    <a:masterClrMapping/>
+  </p:clrMapOvr>
+</p:notes>
+</file>
+
+<file path=ppt/notesSlides/notesSlide18.xml><?xml version="1.0" encoding="utf-8"?>
+<p:notes xmlns:a="http://schemas.openxmlformats.org/drawingml/2006/main" xmlns:r="http://schemas.openxmlformats.org/officeDocument/2006/relationships" xmlns:p="http://schemas.openxmlformats.org/presentationml/2006/main">
+  <p:cSld>
+    <p:spTree>
+      <p:nvGrpSpPr>
+        <p:cNvPr id="1" name=""/>
+        <p:cNvGrpSpPr/>
+        <p:nvPr/>
+      </p:nvGrpSpPr>
+      <p:grpSpPr>
+        <a:xfrm>
+          <a:off x="0" y="0"/>
+          <a:ext cx="0" cy="0"/>
+          <a:chOff x="0" y="0"/>
+          <a:chExt cx="0" cy="0"/>
+        </a:xfrm>
+      </p:grpSpPr>
+      <p:sp>
+        <p:nvSpPr>
+          <p:cNvPr id="2" name="Slide Image Placeholder 1"/>
+          <p:cNvSpPr>
+            <a:spLocks noGrp="1" noRot="1" noChangeAspect="1"/>
+          </p:cNvSpPr>
+          <p:nvPr>
+            <p:ph type="sldImg"/>
+          </p:nvPr>
+        </p:nvSpPr>
+        <p:spPr/>
+      </p:sp>
+      <p:sp>
+        <p:nvSpPr>
+          <p:cNvPr id="3" name="Notes Placeholder 2"/>
+          <p:cNvSpPr>
+            <a:spLocks noGrp="1"/>
+          </p:cNvSpPr>
+          <p:nvPr>
+            <p:ph type="body" idx="1"/>
+          </p:nvPr>
+        </p:nvSpPr>
+        <p:spPr/>
+        <p:txBody>
+          <a:bodyPr/>
+          <a:lstStyle/>
+          <a:p>
+            <a:r>
+              <a:rPr lang="en-US" dirty="0"/>
+              <a:t>Закрываем не результатом модели, а решением, которое нужно от заказчика. Три вопроса выбраны так, что ответ на каждый меняет содержание работы к финалу, а не только её объём.</a:t>
+            </a:r>
+            <a:endParaRPr lang="en-US" dirty="0"/>
+          </a:p>
+        </p:txBody>
+      </p:sp>
+      <p:sp>
+        <p:nvSpPr>
+          <p:cNvPr id="4" name="Slide Number Placeholder 3"/>
+          <p:cNvSpPr>
+            <a:spLocks noGrp="1"/>
+          </p:cNvSpPr>
+          <p:nvPr>
+            <p:ph type="sldNum" sz="quarter" idx="10"/>
+          </p:nvPr>
+        </p:nvSpPr>
+        <p:spPr/>
+        <p:txBody>
+          <a:bodyPr/>
+          <a:lstStyle/>
+          <a:p>
+            <a:fld id="{F7021451-1387-4CA6-816F-3879F97B5CBC}" type="slidenum">
+              <a:rPr lang="en-US"/>
+              <a:t>18</a:t>
             </a:fld>
             <a:endParaRPr lang="en-US"/>
           </a:p>
@@ -3071,10 +3248,6 @@
           </a:solidFill>
           <a:ln/>
         </p:spPr>
-        <p:txBody>
-          <a:bodyPr/>
-          <a:p/>
-        </p:txBody>
       </p:sp>
       <p:sp>
         <p:nvSpPr>
@@ -3175,10 +3348,6 @@
           </a:solidFill>
           <a:ln/>
         </p:spPr>
-        <p:txBody>
-          <a:bodyPr/>
-          <a:p/>
-        </p:txBody>
       </p:sp>
       <p:sp>
         <p:nvSpPr>
@@ -3311,10 +3480,6 @@
           </a:solidFill>
           <a:ln/>
         </p:spPr>
-        <p:txBody>
-          <a:bodyPr/>
-          <a:p/>
-        </p:txBody>
       </p:sp>
       <p:sp>
         <p:nvSpPr>
@@ -3447,10 +3612,6 @@
           </a:solidFill>
           <a:ln/>
         </p:spPr>
-        <p:txBody>
-          <a:bodyPr/>
-          <a:p/>
-        </p:txBody>
       </p:sp>
       <p:sp>
         <p:nvSpPr>
@@ -3583,10 +3744,6 @@
           </a:solidFill>
           <a:ln/>
         </p:spPr>
-        <p:txBody>
-          <a:bodyPr/>
-          <a:p/>
-        </p:txBody>
       </p:sp>
       <p:sp>
         <p:nvSpPr>
@@ -3724,6 +3881,26 @@
                 <a:cs typeface="Calibri" pitchFamily="34" charset="-120"/>
               </a:rPr>
               <a:t>Верхний дециль диапазона («дорого»), 17 % дней: +48 б. п., ДИ [+22; +75] — единственное значимое</a:t>
+            </a:r>
+            <a:endParaRPr lang="en-US" sz="1200" dirty="0"/>
+          </a:p>
+          <a:p>
+            <a:pPr indent="0" marL="0">
+              <a:lnSpc>
+                <a:spcPts val="1700"/>
+              </a:lnSpc>
+              <a:buNone/>
+            </a:pPr>
+            <a:r>
+              <a:rPr lang="en-US" sz="1200" dirty="0">
+                <a:solidFill>
+                  <a:srgbClr val="4E5966"/>
+                </a:solidFill>
+                <a:latin typeface="Calibri" pitchFamily="34" charset="0"/>
+                <a:ea typeface="Calibri" pitchFamily="34" charset="-122"/>
+                <a:cs typeface="Calibri" pitchFamily="34" charset="-120"/>
+              </a:rPr>
+              <a:t>Интуитивная раскраска «зелёный, когда дёшево» противоречит данным. Информативно ровно одно состояние. Допустимое его содержание — факт о прошлом: «ожидание из таких дней раньше не окупалось». Сказать «дальше будет хуже» кейс запрещает.</a:t>
             </a:r>
             <a:endParaRPr lang="en-US" sz="1200" dirty="0"/>
           </a:p>
@@ -3738,224 +3915,6 @@
 </file>
 
 <file path=ppt/slides/slide13.xml><?xml version="1.0" encoding="utf-8"?>
-<p:sld xmlns:a="http://schemas.openxmlformats.org/drawingml/2006/main" xmlns:r="http://schemas.openxmlformats.org/officeDocument/2006/relationships" xmlns:p="http://schemas.openxmlformats.org/presentationml/2006/main">
-  <p:cSld name="Slide 11">
-    <p:bg>
-      <p:bgPr>
-        <a:solidFill>
-          <a:srgbClr val="FFFFFF"/>
-        </a:solidFill>
-      </p:bgPr>
-    </p:bg>
-    <p:spTree>
-      <p:nvGrpSpPr>
-        <p:cNvPr id="1" name=""/>
-        <p:cNvGrpSpPr/>
-        <p:nvPr/>
-      </p:nvGrpSpPr>
-      <p:grpSpPr>
-        <a:xfrm>
-          <a:off x="0" y="0"/>
-          <a:ext cx="0" cy="0"/>
-          <a:chOff x="0" y="0"/>
-          <a:chExt cx="0" cy="0"/>
-        </a:xfrm>
-      </p:grpSpPr>
-      <p:sp>
-        <p:nvSpPr>
-          <p:cNvPr id="2" name="Shape 0"/>
-          <p:cNvSpPr/>
-          <p:nvPr/>
-        </p:nvSpPr>
-        <p:spPr>
-          <a:xfrm>
-            <a:off x="640080" y="475488"/>
-            <a:ext cx="384048" cy="384048"/>
-          </a:xfrm>
-          <a:prstGeom prst="ellipse">
-            <a:avLst/>
-          </a:prstGeom>
-          <a:solidFill>
-            <a:srgbClr val="9C5B12"/>
-          </a:solidFill>
-          <a:ln/>
-        </p:spPr>
-        <p:txBody>
-          <a:bodyPr/>
-          <a:p/>
-        </p:txBody>
-      </p:sp>
-      <p:sp>
-        <p:nvSpPr>
-          <p:cNvPr id="3" name="Text 1"/>
-          <p:cNvSpPr txBox="1"/>
-          <p:nvPr/>
-        </p:nvSpPr>
-        <p:spPr>
-          <a:xfrm>
-            <a:off x="640080" y="475488"/>
-            <a:ext cx="384048" cy="384048"/>
-          </a:xfrm>
-          <a:prstGeom prst="rect">
-            <a:avLst/>
-          </a:prstGeom>
-          <a:noFill/>
-          <a:ln/>
-        </p:spPr>
-        <p:txBody>
-          <a:bodyPr wrap="square" lIns="0" tIns="0" rIns="0" bIns="0" rtlCol="0" anchor="ctr"/>
-          <a:lstStyle/>
-          <a:p>
-            <a:pPr algn="ctr" indent="0" marL="0">
-              <a:buNone/>
-            </a:pPr>
-            <a:r>
-              <a:rPr lang="en-US" sz="1400" b="1" dirty="0">
-                <a:solidFill>
-                  <a:srgbClr val="FFFFFF"/>
-                </a:solidFill>
-                <a:latin typeface="Calibri" pitchFamily="34" charset="0"/>
-                <a:ea typeface="Calibri" pitchFamily="34" charset="-122"/>
-                <a:cs typeface="Calibri" pitchFamily="34" charset="-120"/>
-              </a:rPr>
-              <a:t>11</a:t>
-            </a:r>
-            <a:endParaRPr lang="en-US" sz="1400" dirty="0"/>
-          </a:p>
-        </p:txBody>
-      </p:sp>
-      <p:sp>
-        <p:nvSpPr>
-          <p:cNvPr id="4" name="Text 2"/>
-          <p:cNvSpPr txBox="1"/>
-          <p:nvPr/>
-        </p:nvSpPr>
-        <p:spPr>
-          <a:xfrm>
-            <a:off x="1170432" y="402336"/>
-            <a:ext cx="10332720" cy="566928"/>
-          </a:xfrm>
-          <a:prstGeom prst="rect">
-            <a:avLst/>
-          </a:prstGeom>
-          <a:noFill/>
-          <a:ln/>
-        </p:spPr>
-        <p:txBody>
-          <a:bodyPr wrap="square" lIns="0" tIns="0" rIns="0" bIns="0" rtlCol="0" anchor="ctr"/>
-          <a:lstStyle/>
-          <a:p>
-            <a:pPr indent="0" marL="0">
-              <a:buNone/>
-            </a:pPr>
-            <a:r>
-              <a:rPr lang="en-US" sz="2700" b="1" dirty="0">
-                <a:solidFill>
-                  <a:srgbClr val="1A2530"/>
-                </a:solidFill>
-                <a:latin typeface="Cambria" pitchFamily="34" charset="0"/>
-                <a:ea typeface="Cambria" pitchFamily="34" charset="-122"/>
-                <a:cs typeface="Cambria" pitchFamily="34" charset="-120"/>
-              </a:rPr>
-              <a:t>Демонстрация: как это выглядит у клиента</a:t>
-            </a:r>
-            <a:endParaRPr lang="en-US" sz="2700" dirty="0"/>
-          </a:p>
-        </p:txBody>
-      </p:sp>
-      <p:sp>
-        <p:nvSpPr>
-          <p:cNvPr id="6" name="Text 3"/>
-          <p:cNvSpPr txBox="1"/>
-          <p:nvPr/>
-        </p:nvSpPr>
-        <p:spPr>
-          <a:xfrm>
-            <a:off x="640080" y="5532120"/>
-            <a:ext cx="10881360" cy="1005840"/>
-          </a:xfrm>
-          <a:prstGeom prst="rect">
-            <a:avLst/>
-          </a:prstGeom>
-          <a:noFill/>
-          <a:ln/>
-        </p:spPr>
-        <p:txBody>
-          <a:bodyPr wrap="square" lIns="0" tIns="0" rIns="0" bIns="0" rtlCol="0" anchor="ctr"/>
-          <a:lstStyle/>
-          <a:p>
-            <a:pPr indent="0" marL="0">
-              <a:lnSpc>
-                <a:spcPts val="1800"/>
-              </a:lnSpc>
-              <a:buNone/>
-            </a:pPr>
-            <a:r>
-              <a:rPr lang="en-US" sz="1250" b="1" dirty="0">
-                <a:solidFill>
-                  <a:srgbClr val="4E5966"/>
-                </a:solidFill>
-                <a:latin typeface="Calibri" pitchFamily="34" charset="0"/>
-                <a:ea typeface="Calibri" pitchFamily="34" charset="-122"/>
-                <a:cs typeface="Calibri" pitchFamily="34" charset="-120"/>
-              </a:rPr>
-              <a:t>Пять экранов существующего флоу перевода — новых шагов не добавляется ни одного. Виджет встаёт на экран суммы, где решение и принимается, и показывает сумму в сумах, а не курс. Пуш 2 — сигнал модели — дан в рамке «перестань ждать»: это единственный текст, найденный для состояния, в котором правило действительно срабатывает, и комплаенс он ещё не проходил. Данные на экранах вымышленные.</a:t>
-            </a:r>
-            <a:pPr indent="0" marL="0">
-              <a:lnSpc>
-                <a:spcPts val="1800"/>
-              </a:lnSpc>
-              <a:buNone/>
-            </a:pPr>
-            <a:pPr indent="0" marL="0">
-              <a:lnSpc>
-                <a:spcPts val="1800"/>
-              </a:lnSpc>
-              <a:buNone/>
-            </a:pPr>
-            <a:pPr indent="0" marL="0">
-              <a:lnSpc>
-                <a:spcPts val="1800"/>
-              </a:lnSpc>
-              <a:buNone/>
-            </a:pPr>
-            <a:endParaRPr lang="en-US" sz="1250" dirty="0"/>
-          </a:p>
-        </p:txBody>
-      </p:sp>
-      <p:pic>
-        <p:nvPicPr>
-          <p:cNvPr id="7" name="Picture 6" descr="06-makety-interfeysa.png"/>
-          <p:cNvPicPr>
-            <a:picLocks noChangeAspect="1"/>
-          </p:cNvPicPr>
-          <p:nvPr/>
-        </p:nvPicPr>
-        <p:blipFill>
-          <a:blip r:embed="rId3"/>
-          <a:stretch>
-            <a:fillRect/>
-          </a:stretch>
-        </p:blipFill>
-        <p:spPr>
-          <a:xfrm>
-            <a:off x="1069848" y="1143000"/>
-            <a:ext cx="10058400" cy="4206240"/>
-          </a:xfrm>
-          <a:prstGeom prst="rect">
-            <a:avLst/>
-          </a:prstGeom>
-        </p:spPr>
-      </p:pic>
-    </p:spTree>
-  </p:cSld>
-  <p:clrMapOvr>
-    <a:masterClrMapping/>
-  </p:clrMapOvr>
-</p:sld>
-</file>
-
-<file path=ppt/slides/slide14.xml><?xml version="1.0" encoding="utf-8"?>
 <p:sld xmlns:a="http://schemas.openxmlformats.org/drawingml/2006/main" xmlns:r="http://schemas.openxmlformats.org/officeDocument/2006/relationships" xmlns:p="http://schemas.openxmlformats.org/presentationml/2006/main">
   <p:cSld name="Slide 13">
     <p:bg>
@@ -3998,10 +3957,6 @@
           </a:solidFill>
           <a:ln/>
         </p:spPr>
-        <p:txBody>
-          <a:bodyPr/>
-          <a:p/>
-        </p:txBody>
       </p:sp>
       <p:sp>
         <p:nvSpPr>
@@ -4036,7 +3991,7 @@
                 <a:ea typeface="Calibri" pitchFamily="34" charset="-122"/>
                 <a:cs typeface="Calibri" pitchFamily="34" charset="-120"/>
               </a:rPr>
-              <a:t>12</a:t>
+              <a:t>11</a:t>
             </a:r>
             <a:endParaRPr lang="en-US" sz="1400" dirty="0"/>
           </a:p>
@@ -4075,554 +4030,36 @@
                 <a:ea typeface="Cambria" pitchFamily="34" charset="-122"/>
                 <a:cs typeface="Cambria" pitchFamily="34" charset="-120"/>
               </a:rPr>
-              <a:t>Основные риски и план до финала</a:t>
+              <a:t>Клиентский путь</a:t>
             </a:r>
             <a:endParaRPr lang="en-US" sz="2700" dirty="0"/>
           </a:p>
         </p:txBody>
       </p:sp>
-      <p:sp>
-        <p:nvSpPr>
-          <p:cNvPr id="5" name="Text 3"/>
-          <p:cNvSpPr txBox="1"/>
-          <p:nvPr/>
-        </p:nvSpPr>
-        <p:spPr>
-          <a:xfrm>
-            <a:off x="640080" y="1170432"/>
-            <a:ext cx="5367528" cy="329184"/>
-          </a:xfrm>
-          <a:prstGeom prst="rect">
-            <a:avLst/>
-          </a:prstGeom>
-          <a:noFill/>
-          <a:ln/>
-        </p:spPr>
-        <p:txBody>
-          <a:bodyPr wrap="square" lIns="0" tIns="0" rIns="0" bIns="0" rtlCol="0" anchor="ctr"/>
-          <a:lstStyle/>
-          <a:p>
-            <a:pPr indent="0" marL="0">
-              <a:buNone/>
-            </a:pPr>
-            <a:r>
-              <a:rPr lang="en-US" sz="1600" b="1" dirty="0">
-                <a:solidFill>
-                  <a:srgbClr val="9E3226"/>
-                </a:solidFill>
-                <a:latin typeface="Cambria" pitchFamily="34" charset="0"/>
-                <a:ea typeface="Cambria" pitchFamily="34" charset="-122"/>
-                <a:cs typeface="Cambria" pitchFamily="34" charset="-120"/>
-              </a:rPr>
-              <a:t>Ограничения</a:t>
-            </a:r>
-            <a:endParaRPr lang="en-US" sz="1600" dirty="0"/>
-          </a:p>
-        </p:txBody>
-      </p:sp>
-      <p:sp>
-        <p:nvSpPr>
-          <p:cNvPr id="6" name="Text 4"/>
-          <p:cNvSpPr txBox="1"/>
-          <p:nvPr/>
-        </p:nvSpPr>
-        <p:spPr>
-          <a:xfrm>
-            <a:off x="640080" y="1572768"/>
-            <a:ext cx="5367528" cy="2487168"/>
-          </a:xfrm>
-          <a:prstGeom prst="rect">
-            <a:avLst/>
-          </a:prstGeom>
-          <a:noFill/>
-          <a:ln/>
-        </p:spPr>
-        <p:txBody>
-          <a:bodyPr wrap="square" lIns="0" tIns="0" rIns="0" bIns="0" rtlCol="0" anchor="t"/>
-          <a:lstStyle/>
-          <a:p>
-            <a:pPr marL="342900" indent="-342900">
-              <a:lnSpc>
-                <a:spcPts val="1600"/>
-              </a:lnSpc>
-              <a:spcAft>
-                <a:spcPts val="400"/>
-              </a:spcAft>
-              <a:buSzPct val="100000"/>
-              <a:buChar char="•"/>
-            </a:pPr>
-            <a:r>
-              <a:rPr lang="en-US" sz="1150" dirty="0">
-                <a:solidFill>
-                  <a:srgbClr val="4E5966"/>
-                </a:solidFill>
-                <a:latin typeface="Calibri" pitchFamily="34" charset="0"/>
-                <a:ea typeface="Calibri" pitchFamily="34" charset="-122"/>
-                <a:cs typeface="Calibri" pitchFamily="34" charset="-120"/>
-              </a:rPr>
-              <a:t>Масштаб эффекта — десятки базисных пунктов: 72–189 ₽ на переводе 30 000 ₽. Порог запуска: +30 б. п. (90 ₽)</a:t>
-            </a:r>
-            <a:endParaRPr lang="en-US" sz="1150" dirty="0"/>
-          </a:p>
-          <a:p>
-            <a:pPr marL="342900" indent="-342900">
-              <a:lnSpc>
-                <a:spcPts val="1600"/>
-              </a:lnSpc>
-              <a:spcAft>
-                <a:spcPts val="400"/>
-              </a:spcAft>
-              <a:buSzPct val="100000"/>
-              <a:buChar char="•"/>
-            </a:pPr>
-            <a:r>
-              <a:rPr lang="en-US" sz="1150" dirty="0">
-                <a:solidFill>
-                  <a:srgbClr val="4E5966"/>
-                </a:solidFill>
-                <a:latin typeface="Calibri" pitchFamily="34" charset="0"/>
-                <a:ea typeface="Calibri" pitchFamily="34" charset="-122"/>
-                <a:cs typeface="Calibri" pitchFamily="34" charset="-120"/>
-              </a:rPr>
-              <a:t>Модель ошибается в двух случаях из трёх — свойство задачи, а не дефект</a:t>
-            </a:r>
-            <a:endParaRPr lang="en-US" sz="1150" dirty="0"/>
-          </a:p>
-          <a:p>
-            <a:pPr marL="342900" indent="-342900">
-              <a:lnSpc>
-                <a:spcPts val="1600"/>
-              </a:lnSpc>
-              <a:spcAft>
-                <a:spcPts val="400"/>
-              </a:spcAft>
-              <a:buSzPct val="100000"/>
-              <a:buChar char="•"/>
-            </a:pPr>
-            <a:r>
-              <a:rPr lang="en-US" sz="1150" dirty="0">
-                <a:solidFill>
-                  <a:srgbClr val="4E5966"/>
-                </a:solidFill>
-                <a:latin typeface="Calibri" pitchFamily="34" charset="0"/>
-                <a:ea typeface="Calibri" pitchFamily="34" charset="-122"/>
-                <a:cs typeface="Calibri" pitchFamily="34" charset="-120"/>
-              </a:rPr>
-              <a:t>Сезонность — самый сильный и самый хрупкий признак: истории всего семь лет</a:t>
-            </a:r>
-            <a:endParaRPr lang="en-US" sz="1150" dirty="0"/>
-          </a:p>
-          <a:p>
-            <a:pPr marL="342900" indent="-342900">
-              <a:lnSpc>
-                <a:spcPts val="1600"/>
-              </a:lnSpc>
-              <a:spcAft>
-                <a:spcPts val="400"/>
-              </a:spcAft>
-              <a:buSzPct val="100000"/>
-              <a:buChar char="•"/>
-            </a:pPr>
-            <a:r>
-              <a:rPr lang="en-US" sz="1150" dirty="0">
-                <a:solidFill>
-                  <a:srgbClr val="4E5966"/>
-                </a:solidFill>
-                <a:latin typeface="Calibri" pitchFamily="34" charset="0"/>
-                <a:ea typeface="Calibri" pitchFamily="34" charset="-122"/>
-                <a:cs typeface="Calibri" pitchFamily="34" charset="-120"/>
-              </a:rPr>
-              <a:t>2022 год — 13,1 % наблюдений и 57,6 % всей дисперсии доходностей</a:t>
-            </a:r>
-            <a:endParaRPr lang="en-US" sz="1150" dirty="0"/>
-          </a:p>
-          <a:p>
-            <a:pPr marL="342900" indent="-342900">
-              <a:lnSpc>
-                <a:spcPts val="1600"/>
-              </a:lnSpc>
-              <a:spcAft>
-                <a:spcPts val="400"/>
-              </a:spcAft>
-              <a:buSzPct val="100000"/>
-              <a:buChar char="•"/>
-            </a:pPr>
-            <a:r>
-              <a:rPr lang="en-US" sz="1150" dirty="0">
-                <a:solidFill>
-                  <a:srgbClr val="4E5966"/>
-                </a:solidFill>
-                <a:latin typeface="Calibri" pitchFamily="34" charset="0"/>
-                <a:ea typeface="Calibri" pitchFamily="34" charset="-122"/>
-                <a:cs typeface="Calibri" pitchFamily="34" charset="-120"/>
-              </a:rPr>
-              <a:t>Пять коридоров — не пять подтверждений: корреляция внутри даты 0,86</a:t>
-            </a:r>
-            <a:endParaRPr lang="en-US" sz="1150" dirty="0"/>
-          </a:p>
-          <a:p>
-            <a:pPr marL="342900" indent="-342900">
-              <a:lnSpc>
-                <a:spcPts val="1600"/>
-              </a:lnSpc>
-              <a:spcAft>
-                <a:spcPts val="400"/>
-              </a:spcAft>
-              <a:buSzPct val="100000"/>
-              <a:buChar char="•"/>
-            </a:pPr>
-            <a:r>
-              <a:rPr lang="en-US" sz="1150" dirty="0">
-                <a:solidFill>
-                  <a:srgbClr val="4E5966"/>
-                </a:solidFill>
-                <a:latin typeface="Calibri" pitchFamily="34" charset="0"/>
-                <a:ea typeface="Calibri" pitchFamily="34" charset="-122"/>
-                <a:cs typeface="Calibri" pitchFamily="34" charset="-120"/>
-              </a:rPr>
-              <a:t>Поправки на множественные сравнения нет — интервалы некорректированные</a:t>
-            </a:r>
-            <a:endParaRPr lang="en-US" sz="1150" dirty="0"/>
-          </a:p>
-          <a:p>
-            <a:pPr marL="342900" indent="-342900">
-              <a:lnSpc>
-                <a:spcPts val="1600"/>
-              </a:lnSpc>
-              <a:spcAft>
-                <a:spcPts val="400"/>
-              </a:spcAft>
-              <a:buSzPct val="100000"/>
-              <a:buChar char="•"/>
-            </a:pPr>
-            <a:r>
-              <a:rPr lang="en-US" sz="1150" dirty="0">
-                <a:solidFill>
-                  <a:srgbClr val="4E5966"/>
-                </a:solidFill>
-                <a:latin typeface="Calibri" pitchFamily="34" charset="0"/>
-                <a:ea typeface="Calibri" pitchFamily="34" charset="-122"/>
-                <a:cs typeface="Calibri" pitchFamily="34" charset="-120"/>
-              </a:rPr>
-              <a:t>Нет данных клиентов: эластичность и доля «гибких» не измеримы до пилота</a:t>
-            </a:r>
-            <a:endParaRPr lang="en-US" sz="1150" dirty="0"/>
-          </a:p>
-          <a:p>
-            <a:pPr marL="342900" indent="-342900">
-              <a:lnSpc>
-                <a:spcPts val="1600"/>
-              </a:lnSpc>
-              <a:spcAft>
-                <a:spcPts val="400"/>
-              </a:spcAft>
-              <a:buSzPct val="100000"/>
-              <a:buChar char="•"/>
-            </a:pPr>
-            <a:r>
-              <a:rPr lang="en-US" sz="1150" dirty="0">
-                <a:solidFill>
-                  <a:srgbClr val="4E5966"/>
-                </a:solidFill>
-                <a:latin typeface="Calibri" pitchFamily="34" charset="0"/>
-                <a:ea typeface="Calibri" pitchFamily="34" charset="-122"/>
-                <a:cs typeface="Calibri" pitchFamily="34" charset="-120"/>
-              </a:rPr>
-              <a:t>Курс приложения ≠ курс ЦБ, работаем на прокси</a:t>
-            </a:r>
-            <a:endParaRPr lang="en-US" sz="1150" dirty="0"/>
-          </a:p>
-        </p:txBody>
-      </p:sp>
-      <p:sp>
-        <p:nvSpPr>
-          <p:cNvPr id="7" name="Text 5"/>
-          <p:cNvSpPr txBox="1"/>
-          <p:nvPr/>
-        </p:nvSpPr>
-        <p:spPr>
-          <a:xfrm>
-            <a:off x="6153912" y="1170432"/>
-            <a:ext cx="5367528" cy="329184"/>
-          </a:xfrm>
-          <a:prstGeom prst="rect">
-            <a:avLst/>
-          </a:prstGeom>
-          <a:noFill/>
-          <a:ln/>
-        </p:spPr>
-        <p:txBody>
-          <a:bodyPr wrap="square" lIns="0" tIns="0" rIns="0" bIns="0" rtlCol="0" anchor="ctr"/>
-          <a:lstStyle/>
-          <a:p>
-            <a:pPr indent="0" marL="0">
-              <a:buNone/>
-            </a:pPr>
-            <a:r>
-              <a:rPr lang="en-US" sz="1600" b="1" dirty="0">
-                <a:solidFill>
-                  <a:srgbClr val="16674F"/>
-                </a:solidFill>
-                <a:latin typeface="Cambria" pitchFamily="34" charset="0"/>
-                <a:ea typeface="Cambria" pitchFamily="34" charset="-122"/>
-                <a:cs typeface="Cambria" pitchFamily="34" charset="-120"/>
-              </a:rPr>
-              <a:t>План до 07.09</a:t>
-            </a:r>
-            <a:endParaRPr lang="en-US" sz="1600" dirty="0"/>
-          </a:p>
-        </p:txBody>
-      </p:sp>
-      <p:sp>
-        <p:nvSpPr>
-          <p:cNvPr id="8" name="Text 6"/>
-          <p:cNvSpPr txBox="1"/>
-          <p:nvPr/>
-        </p:nvSpPr>
-        <p:spPr>
-          <a:xfrm>
-            <a:off x="6153912" y="1572768"/>
-            <a:ext cx="5367528" cy="2487168"/>
-          </a:xfrm>
-          <a:prstGeom prst="rect">
-            <a:avLst/>
-          </a:prstGeom>
-          <a:noFill/>
-          <a:ln/>
-        </p:spPr>
-        <p:txBody>
-          <a:bodyPr wrap="square" lIns="0" tIns="0" rIns="0" bIns="0" rtlCol="0" anchor="t"/>
-          <a:lstStyle/>
-          <a:p>
-            <a:pPr marL="342900" indent="-342900">
-              <a:lnSpc>
-                <a:spcPts val="1600"/>
-              </a:lnSpc>
-              <a:spcAft>
-                <a:spcPts val="400"/>
-              </a:spcAft>
-              <a:buSzPct val="100000"/>
-              <a:buChar char="•"/>
-            </a:pPr>
-            <a:r>
-              <a:rPr lang="en-US" sz="1150" dirty="0">
-                <a:solidFill>
-                  <a:srgbClr val="4E5966"/>
-                </a:solidFill>
-                <a:latin typeface="Calibri" pitchFamily="34" charset="0"/>
-                <a:ea typeface="Calibri" pitchFamily="34" charset="-122"/>
-                <a:cs typeface="Calibri" pitchFamily="34" charset="-120"/>
-              </a:rPr>
-              <a:t>Сделано: тексты уведомлений и отбор, макеты трёх компонентов, дизайн пилота</a:t>
-            </a:r>
-            <a:endParaRPr lang="en-US" sz="1150" dirty="0"/>
-          </a:p>
-          <a:p>
-            <a:pPr marL="342900" indent="-342900">
-              <a:lnSpc>
-                <a:spcPts val="1600"/>
-              </a:lnSpc>
-              <a:spcAft>
-                <a:spcPts val="400"/>
-              </a:spcAft>
-              <a:buSzPct val="100000"/>
-              <a:buChar char="•"/>
-            </a:pPr>
-            <a:r>
-              <a:rPr lang="en-US" sz="1150" dirty="0">
-                <a:solidFill>
-                  <a:srgbClr val="4E5966"/>
-                </a:solidFill>
-                <a:latin typeface="Calibri" pitchFamily="34" charset="0"/>
-                <a:ea typeface="Calibri" pitchFamily="34" charset="-122"/>
-                <a:cs typeface="Calibri" pitchFamily="34" charset="-120"/>
-              </a:rPr>
-              <a:t>Пт–Сб: signals.csv, правило комбинирования и добор до полосы частоты, экономика в рублях</a:t>
-            </a:r>
-            <a:endParaRPr lang="en-US" sz="1150" dirty="0"/>
-          </a:p>
-          <a:p>
-            <a:pPr marL="342900" indent="-342900">
-              <a:lnSpc>
-                <a:spcPts val="1600"/>
-              </a:lnSpc>
-              <a:spcAft>
-                <a:spcPts val="400"/>
-              </a:spcAft>
-              <a:buSzPct val="100000"/>
-              <a:buChar char="•"/>
-            </a:pPr>
-            <a:r>
-              <a:rPr lang="en-US" sz="1150" dirty="0">
-                <a:solidFill>
-                  <a:srgbClr val="4E5966"/>
-                </a:solidFill>
-                <a:latin typeface="Calibri" pitchFamily="34" charset="0"/>
-                <a:ea typeface="Calibri" pitchFamily="34" charset="-122"/>
-                <a:cs typeface="Calibri" pitchFamily="34" charset="-120"/>
-              </a:rPr>
-              <a:t>Сб: падежный словарь валют и праздников в коде, приветствия — у носителей языка</a:t>
-            </a:r>
-            <a:endParaRPr lang="en-US" sz="1150" dirty="0"/>
-          </a:p>
-          <a:p>
-            <a:pPr marL="342900" indent="-342900">
-              <a:lnSpc>
-                <a:spcPts val="1600"/>
-              </a:lnSpc>
-              <a:spcAft>
-                <a:spcPts val="400"/>
-              </a:spcAft>
-              <a:buSzPct val="100000"/>
-              <a:buChar char="•"/>
-            </a:pPr>
-            <a:r>
-              <a:rPr lang="en-US" sz="1150" dirty="0">
-                <a:solidFill>
-                  <a:srgbClr val="4E5966"/>
-                </a:solidFill>
-                <a:latin typeface="Calibri" pitchFamily="34" charset="0"/>
-                <a:ea typeface="Calibri" pitchFamily="34" charset="-122"/>
-                <a:cs typeface="Calibri" pitchFamily="34" charset="-120"/>
-              </a:rPr>
-              <a:t>Вс: сборка презентации, два прогона с таймером, финальный журнал допущений</a:t>
-            </a:r>
-            <a:endParaRPr lang="en-US" sz="1150" dirty="0"/>
-          </a:p>
-        </p:txBody>
-      </p:sp>
-      <p:sp>
-        <p:nvSpPr>
-          <p:cNvPr id="9" name="Shape 7"/>
-          <p:cNvSpPr/>
-          <p:nvPr/>
-        </p:nvSpPr>
-        <p:spPr>
-          <a:xfrm>
-            <a:off x="640080" y="4224528"/>
-            <a:ext cx="10881360" cy="1828800"/>
-          </a:xfrm>
-          <a:prstGeom prst="roundRect">
-            <a:avLst>
-              <a:gd name="adj" fmla="val 3000"/>
-            </a:avLst>
-          </a:prstGeom>
-          <a:solidFill>
-            <a:srgbClr val="1A2530"/>
-          </a:solidFill>
-          <a:ln/>
-        </p:spPr>
-      </p:sp>
-      <p:sp>
-        <p:nvSpPr>
-          <p:cNvPr id="10" name="Text 8"/>
-          <p:cNvSpPr txBox="1"/>
-          <p:nvPr/>
-        </p:nvSpPr>
-        <p:spPr>
-          <a:xfrm>
-            <a:off x="914400" y="4370832"/>
-            <a:ext cx="10332720" cy="347472"/>
-          </a:xfrm>
-          <a:prstGeom prst="rect">
-            <a:avLst/>
-          </a:prstGeom>
-          <a:noFill/>
-          <a:ln/>
-        </p:spPr>
-        <p:txBody>
-          <a:bodyPr wrap="square" lIns="0" tIns="0" rIns="0" bIns="0" rtlCol="0" anchor="ctr"/>
-          <a:lstStyle/>
-          <a:p>
-            <a:pPr indent="0" marL="0">
-              <a:buNone/>
-            </a:pPr>
-            <a:r>
-              <a:rPr lang="en-US" sz="1550" b="1" dirty="0">
-                <a:solidFill>
-                  <a:srgbClr val="9C5B12"/>
-                </a:solidFill>
-                <a:latin typeface="Cambria" pitchFamily="34" charset="0"/>
-                <a:ea typeface="Cambria" pitchFamily="34" charset="-122"/>
-                <a:cs typeface="Cambria" pitchFamily="34" charset="-120"/>
-              </a:rPr>
-              <a:t>Открытые вопросы, от которых зависит размер эффекта</a:t>
-            </a:r>
-            <a:endParaRPr lang="en-US" sz="1550" dirty="0"/>
-          </a:p>
-        </p:txBody>
-      </p:sp>
-      <p:sp>
-        <p:nvSpPr>
-          <p:cNvPr id="11" name="Text 9"/>
-          <p:cNvSpPr txBox="1"/>
-          <p:nvPr/>
-        </p:nvSpPr>
-        <p:spPr>
-          <a:xfrm>
-            <a:off x="914400" y="4754880"/>
-            <a:ext cx="10332720" cy="1188720"/>
-          </a:xfrm>
-          <a:prstGeom prst="rect">
-            <a:avLst/>
-          </a:prstGeom>
-          <a:noFill/>
-          <a:ln/>
-        </p:spPr>
-        <p:txBody>
-          <a:bodyPr wrap="square" lIns="0" tIns="0" rIns="0" bIns="0" rtlCol="0" anchor="ctr"/>
-          <a:lstStyle/>
-          <a:p>
-            <a:pPr indent="0" marL="0">
-              <a:lnSpc>
-                <a:spcPts val="1700"/>
-              </a:lnSpc>
-              <a:buNone/>
-            </a:pPr>
-            <a:r>
-              <a:rPr lang="en-US" sz="1200" dirty="0">
-                <a:solidFill>
-                  <a:srgbClr val="C7CFD8"/>
-                </a:solidFill>
-                <a:latin typeface="Calibri" pitchFamily="34" charset="0"/>
-                <a:ea typeface="Calibri" pitchFamily="34" charset="-122"/>
-                <a:cs typeface="Calibri" pitchFamily="34" charset="-120"/>
-              </a:rPr>
-              <a:t>Какова доля клиентов, способных отложить перевод? Если гибких 10 %, пилот на всей базе покажет ноль из-за разбавления.</a:t>
-            </a:r>
-            <a:endParaRPr lang="en-US" sz="1200" dirty="0"/>
-          </a:p>
-          <a:p>
-            <a:pPr indent="0" marL="0">
-              <a:lnSpc>
-                <a:spcPts val="1700"/>
-              </a:lnSpc>
-              <a:buNone/>
-            </a:pPr>
-            <a:endParaRPr lang="en-US" sz="1200" dirty="0"/>
-          </a:p>
-          <a:p>
-            <a:pPr indent="0" marL="0">
-              <a:lnSpc>
-                <a:spcPts val="1700"/>
-              </a:lnSpc>
-              <a:buNone/>
-            </a:pPr>
-            <a:r>
-              <a:rPr lang="en-US" sz="1200" dirty="0">
-                <a:solidFill>
-                  <a:srgbClr val="C7CFD8"/>
-                </a:solidFill>
-                <a:latin typeface="Calibri" pitchFamily="34" charset="0"/>
-                <a:ea typeface="Calibri" pitchFamily="34" charset="-122"/>
-                <a:cs typeface="Calibri" pitchFamily="34" charset="-120"/>
-              </a:rPr>
-              <a:t>Клиент фиксирует сумму отправки или получения? Если получения, лучший курс означает меньше отправленных рублей — знак влияния на выручку меняется.</a:t>
-            </a:r>
-            <a:endParaRPr lang="en-US" sz="1200" dirty="0"/>
-          </a:p>
-        </p:txBody>
-      </p:sp>
+      <p:pic>
+        <p:nvPicPr>
+          <p:cNvPr id="5" name="Image 0" descr="submission/figures/08-put-klienta.png">    </p:cNvPr>
+          <p:cNvPicPr>
+            <a:picLocks noChangeAspect="1"/>
+          </p:cNvPicPr>
+          <p:nvPr/>
+        </p:nvPicPr>
+        <p:blipFill>
+          <a:blip r:embed="rId1"/>
+          <a:stretch>
+            <a:fillRect/>
+          </a:stretch>
+        </p:blipFill>
+        <p:spPr>
+          <a:xfrm>
+            <a:off x="960120" y="1143000"/>
+            <a:ext cx="10241280" cy="5440680"/>
+          </a:xfrm>
+          <a:prstGeom prst="rect">
+            <a:avLst/>
+          </a:prstGeom>
+        </p:spPr>
+      </p:pic>
     </p:spTree>
   </p:cSld>
   <p:clrMapOvr>
@@ -4631,7 +4068,7 @@
 </p:sld>
 </file>
 
-<file path=ppt/slides/slide15.xml><?xml version="1.0" encoding="utf-8"?>
+<file path=ppt/slides/slide14.xml><?xml version="1.0" encoding="utf-8"?>
 <p:sld xmlns:a="http://schemas.openxmlformats.org/drawingml/2006/main" xmlns:r="http://schemas.openxmlformats.org/officeDocument/2006/relationships" xmlns:p="http://schemas.openxmlformats.org/presentationml/2006/main">
   <p:cSld name="Slide 14">
     <p:bg>
@@ -4674,10 +4111,6 @@
           </a:solidFill>
           <a:ln/>
         </p:spPr>
-        <p:txBody>
-          <a:bodyPr/>
-          <a:p/>
-        </p:txBody>
       </p:sp>
       <p:sp>
         <p:nvSpPr>
@@ -4712,7 +4145,7 @@
                 <a:ea typeface="Calibri" pitchFamily="34" charset="-122"/>
                 <a:cs typeface="Calibri" pitchFamily="34" charset="-120"/>
               </a:rPr>
-              <a:t>13</a:t>
+              <a:t>12</a:t>
             </a:r>
             <a:endParaRPr lang="en-US" sz="1400" dirty="0"/>
           </a:p>
@@ -4751,7 +4184,7 @@
                 <a:ea typeface="Cambria" pitchFamily="34" charset="-122"/>
                 <a:cs typeface="Cambria" pitchFamily="34" charset="-120"/>
               </a:rPr>
-              <a:t>План пилота: две ветки, и они разной скорости</a:t>
+              <a:t>Демонстрация: как это выглядит у клиента</a:t>
             </a:r>
             <a:endParaRPr lang="en-US" sz="2700" dirty="0"/>
           </a:p>
@@ -4766,7 +4199,7 @@
         <p:spPr>
           <a:xfrm>
             <a:off x="640080" y="1115568"/>
-            <a:ext cx="10881360" cy="457200"/>
+            <a:ext cx="10881360" cy="566928"/>
           </a:xfrm>
           <a:prstGeom prst="rect">
             <a:avLst/>
@@ -4793,44 +4226,46 @@
                 <a:ea typeface="Calibri" pitchFamily="34" charset="-122"/>
                 <a:cs typeface="Calibri" pitchFamily="34" charset="-120"/>
               </a:rPr>
-              <a:t>Выгода курса — свойство СИГНАЛА, а не клиента: десять тысяч человек, следящих за одним коридором, дают одно наблюдение курса, а не десять тысяч. Когорта эту ветку не ускоряет.</a:t>
+              <a:t>Семь экранов существующего флоу перевода — новых шагов не добавляется ни одного. Виджет встаёт на экран суммы, где решение и принимается, и показывает сумму в валюте получателя, а не курс. Экран 03 — тот же пуш, переписанный следующей публикацией; экран 05 — что видит клиент, открывший пуш через день.</a:t>
             </a:r>
             <a:endParaRPr lang="en-US" sz="1300" dirty="0"/>
           </a:p>
         </p:txBody>
       </p:sp>
-      <p:sp>
-        <p:nvSpPr>
-          <p:cNvPr id="6" name="Shape 4"/>
-          <p:cNvSpPr/>
-          <p:nvPr/>
-        </p:nvSpPr>
-        <p:spPr>
-          <a:xfrm>
-            <a:off x="640080" y="1700784"/>
-            <a:ext cx="5367528" cy="2286000"/>
-          </a:xfrm>
-          <a:prstGeom prst="roundRect">
-            <a:avLst>
-              <a:gd name="adj" fmla="val 2400"/>
-            </a:avLst>
-          </a:prstGeom>
-          <a:solidFill>
-            <a:srgbClr val="F4F6F8"/>
-          </a:solidFill>
-          <a:ln/>
-        </p:spPr>
-      </p:sp>
-      <p:sp>
-        <p:nvSpPr>
-          <p:cNvPr id="7" name="Text 5"/>
+      <p:pic>
+        <p:nvPicPr>
+          <p:cNvPr id="6" name="Image 0" descr="submission/figures/06-makety-interfeysa.png">    </p:cNvPr>
+          <p:cNvPicPr>
+            <a:picLocks noChangeAspect="1"/>
+          </p:cNvPicPr>
+          <p:nvPr/>
+        </p:nvPicPr>
+        <p:blipFill>
+          <a:blip r:embed="rId1"/>
+          <a:stretch>
+            <a:fillRect/>
+          </a:stretch>
+        </p:blipFill>
+        <p:spPr>
+          <a:xfrm>
+            <a:off x="640080" y="1783080"/>
+            <a:ext cx="10881360" cy="3246120"/>
+          </a:xfrm>
+          <a:prstGeom prst="rect">
+            <a:avLst/>
+          </a:prstGeom>
+        </p:spPr>
+      </p:pic>
+      <p:sp>
+        <p:nvSpPr>
+          <p:cNvPr id="7" name="Text 4"/>
           <p:cNvSpPr txBox="1"/>
           <p:nvPr/>
         </p:nvSpPr>
         <p:spPr>
           <a:xfrm>
-            <a:off x="896112" y="1883664"/>
-            <a:ext cx="4855464" cy="420624"/>
+            <a:off x="640080" y="5138928"/>
+            <a:ext cx="10881360" cy="274320"/>
           </a:xfrm>
           <a:prstGeom prst="rect">
             <a:avLst/>
@@ -4846,49 +4281,7 @@
               <a:buNone/>
             </a:pPr>
             <a:r>
-              <a:rPr lang="en-US" sz="1550" b="1" dirty="0">
-                <a:solidFill>
-                  <a:srgbClr val="9E3226"/>
-                </a:solidFill>
-                <a:latin typeface="Cambria" pitchFamily="34" charset="0"/>
-                <a:ea typeface="Cambria" pitchFamily="34" charset="-122"/>
-                <a:cs typeface="Cambria" pitchFamily="34" charset="-120"/>
-              </a:rPr>
-              <a:t>Ветка 1 · выгода курса</a:t>
-            </a:r>
-            <a:endParaRPr lang="en-US" sz="1550" dirty="0"/>
-          </a:p>
-        </p:txBody>
-      </p:sp>
-      <p:sp>
-        <p:nvSpPr>
-          <p:cNvPr id="8" name="Text 6"/>
-          <p:cNvSpPr txBox="1"/>
-          <p:nvPr/>
-        </p:nvSpPr>
-        <p:spPr>
-          <a:xfrm>
-            <a:off x="896112" y="2322576"/>
-            <a:ext cx="4855464" cy="1463040"/>
-          </a:xfrm>
-          <a:prstGeom prst="rect">
-            <a:avLst/>
-          </a:prstGeom>
-          <a:noFill/>
-          <a:ln/>
-        </p:spPr>
-        <p:txBody>
-          <a:bodyPr wrap="square" lIns="0" tIns="0" rIns="0" bIns="0" rtlCol="0" anchor="ctr"/>
-          <a:lstStyle/>
-          <a:p>
-            <a:pPr indent="0" marL="0">
-              <a:lnSpc>
-                <a:spcPts val="1700"/>
-              </a:lnSpc>
-              <a:buNone/>
-            </a:pPr>
-            <a:r>
-              <a:rPr lang="en-US" sz="1250" dirty="0">
+              <a:rPr lang="en-US" sz="1100" dirty="0">
                 <a:solidFill>
                   <a:srgbClr val="4E5966"/>
                 </a:solidFill>
@@ -4896,302 +4289,9 @@
                 <a:ea typeface="Calibri" pitchFamily="34" charset="-122"/>
                 <a:cs typeface="Calibri" pitchFamily="34" charset="-120"/>
               </a:rPr>
-              <a:t>Скорость задана календарём ЦБ. Чтобы отличить +63 бп от нуля с мощностью 80 %, нужно 437 срабатываний = 136 дней с сигналом = 146 НЕДЕЛЬ.</a:t>
-            </a:r>
-            <a:endParaRPr lang="en-US" sz="1250" dirty="0"/>
-          </a:p>
-          <a:p>
-            <a:pPr indent="0" marL="0">
-              <a:lnSpc>
-                <a:spcPts val="1700"/>
-              </a:lnSpc>
-              <a:buNone/>
-            </a:pPr>
-            <a:endParaRPr lang="en-US" sz="1250" dirty="0"/>
-          </a:p>
-          <a:p>
-            <a:pPr indent="0" marL="0">
-              <a:lnSpc>
-                <a:spcPts val="1700"/>
-              </a:lnSpc>
-              <a:buNone/>
-            </a:pPr>
-            <a:r>
-              <a:rPr lang="en-US" sz="1250" dirty="0">
-                <a:solidFill>
-                  <a:srgbClr val="4E5966"/>
-                </a:solidFill>
-                <a:latin typeface="Calibri" pitchFamily="34" charset="0"/>
-                <a:ea typeface="Calibri" pitchFamily="34" charset="-122"/>
-                <a:cs typeface="Calibri" pitchFamily="34" charset="-120"/>
-              </a:rPr>
-              <a:t>Пилот этого не успеет. Вердикт даёт бэктест на 296 неделях out-of-sample.</a:t>
-            </a:r>
-            <a:endParaRPr lang="en-US" sz="1250" dirty="0"/>
-          </a:p>
-        </p:txBody>
-      </p:sp>
-      <p:sp>
-        <p:nvSpPr>
-          <p:cNvPr id="9" name="Shape 7"/>
-          <p:cNvSpPr/>
-          <p:nvPr/>
-        </p:nvSpPr>
-        <p:spPr>
-          <a:xfrm>
-            <a:off x="6153912" y="1700784"/>
-            <a:ext cx="5367528" cy="2286000"/>
-          </a:xfrm>
-          <a:prstGeom prst="roundRect">
-            <a:avLst>
-              <a:gd name="adj" fmla="val 2400"/>
-            </a:avLst>
-          </a:prstGeom>
-          <a:solidFill>
-            <a:srgbClr val="F4F6F8"/>
-          </a:solidFill>
-          <a:ln/>
-        </p:spPr>
-      </p:sp>
-      <p:sp>
-        <p:nvSpPr>
-          <p:cNvPr id="10" name="Text 8"/>
-          <p:cNvSpPr txBox="1"/>
-          <p:nvPr/>
-        </p:nvSpPr>
-        <p:spPr>
-          <a:xfrm>
-            <a:off x="6409944" y="1883664"/>
-            <a:ext cx="4855464" cy="420624"/>
-          </a:xfrm>
-          <a:prstGeom prst="rect">
-            <a:avLst/>
-          </a:prstGeom>
-          <a:noFill/>
-          <a:ln/>
-        </p:spPr>
-        <p:txBody>
-          <a:bodyPr wrap="square" lIns="0" tIns="0" rIns="0" bIns="0" rtlCol="0" anchor="ctr"/>
-          <a:lstStyle/>
-          <a:p>
-            <a:pPr indent="0" marL="0">
-              <a:buNone/>
-            </a:pPr>
-            <a:r>
-              <a:rPr lang="en-US" sz="1550" b="1" dirty="0">
-                <a:solidFill>
-                  <a:srgbClr val="16674F"/>
-                </a:solidFill>
-                <a:latin typeface="Cambria" pitchFamily="34" charset="0"/>
-                <a:ea typeface="Cambria" pitchFamily="34" charset="-122"/>
-                <a:cs typeface="Cambria" pitchFamily="34" charset="-120"/>
-              </a:rPr>
-              <a:t>Ветка 2 · конверсия</a:t>
-            </a:r>
-            <a:endParaRPr lang="en-US" sz="1550" dirty="0"/>
-          </a:p>
-        </p:txBody>
-      </p:sp>
-      <p:sp>
-        <p:nvSpPr>
-          <p:cNvPr id="11" name="Text 9"/>
-          <p:cNvSpPr txBox="1"/>
-          <p:nvPr/>
-        </p:nvSpPr>
-        <p:spPr>
-          <a:xfrm>
-            <a:off x="6409944" y="2322576"/>
-            <a:ext cx="4855464" cy="1463040"/>
-          </a:xfrm>
-          <a:prstGeom prst="rect">
-            <a:avLst/>
-          </a:prstGeom>
-          <a:noFill/>
-          <a:ln/>
-        </p:spPr>
-        <p:txBody>
-          <a:bodyPr wrap="square" lIns="0" tIns="0" rIns="0" bIns="0" rtlCol="0" anchor="ctr"/>
-          <a:lstStyle/>
-          <a:p>
-            <a:pPr indent="0" marL="0">
-              <a:lnSpc>
-                <a:spcPts val="1700"/>
-              </a:lnSpc>
-              <a:buNone/>
-            </a:pPr>
-            <a:r>
-              <a:rPr lang="en-US" sz="1250" dirty="0">
-                <a:solidFill>
-                  <a:srgbClr val="4E5966"/>
-                </a:solidFill>
-                <a:latin typeface="Calibri" pitchFamily="34" charset="0"/>
-                <a:ea typeface="Calibri" pitchFamily="34" charset="-122"/>
-                <a:cs typeface="Calibri" pitchFamily="34" charset="-120"/>
-              </a:rPr>
-              <a:t>Единица наблюдения — пара «клиент x пуш», и вот её когорта ускоряет.</a:t>
-            </a:r>
-            <a:endParaRPr lang="en-US" sz="1250" dirty="0"/>
-          </a:p>
-          <a:p>
-            <a:pPr indent="0" marL="0">
-              <a:lnSpc>
-                <a:spcPts val="1700"/>
-              </a:lnSpc>
-              <a:buNone/>
-            </a:pPr>
-            <a:endParaRPr lang="en-US" sz="1250" dirty="0"/>
-          </a:p>
-          <a:p>
-            <a:pPr indent="0" marL="0">
-              <a:lnSpc>
-                <a:spcPts val="1700"/>
-              </a:lnSpc>
-              <a:buNone/>
-            </a:pPr>
-            <a:r>
-              <a:rPr lang="en-US" sz="1250" dirty="0">
-                <a:solidFill>
-                  <a:srgbClr val="4E5966"/>
-                </a:solidFill>
-                <a:latin typeface="Calibri" pitchFamily="34" charset="0"/>
-                <a:ea typeface="Calibri" pitchFamily="34" charset="-122"/>
-                <a:cs typeface="Calibri" pitchFamily="34" charset="-120"/>
-              </a:rPr>
-              <a:t>При базовой конверсии 5 % и росте +20 %: 16 315 пар — это 5 недель на 5 000 клиентов. Базовая конверсия стоит параметром: данных о коммуникациях нет.</a:t>
-            </a:r>
-            <a:endParaRPr lang="en-US" sz="1250" dirty="0"/>
-          </a:p>
-        </p:txBody>
-      </p:sp>
-      <p:sp>
-        <p:nvSpPr>
-          <p:cNvPr id="12" name="Shape 10"/>
-          <p:cNvSpPr/>
-          <p:nvPr/>
-        </p:nvSpPr>
-        <p:spPr>
-          <a:xfrm>
-            <a:off x="640080" y="4169664"/>
-            <a:ext cx="10881360" cy="1883664"/>
-          </a:xfrm>
-          <a:prstGeom prst="roundRect">
-            <a:avLst>
-              <a:gd name="adj" fmla="val 2913"/>
-            </a:avLst>
-          </a:prstGeom>
-          <a:solidFill>
-            <a:srgbClr val="1A2530"/>
-          </a:solidFill>
-          <a:ln/>
-        </p:spPr>
-      </p:sp>
-      <p:sp>
-        <p:nvSpPr>
-          <p:cNvPr id="13" name="Text 11"/>
-          <p:cNvSpPr txBox="1"/>
-          <p:nvPr/>
-        </p:nvSpPr>
-        <p:spPr>
-          <a:xfrm>
-            <a:off x="914400" y="4315968"/>
-            <a:ext cx="10332720" cy="347472"/>
-          </a:xfrm>
-          <a:prstGeom prst="rect">
-            <a:avLst/>
-          </a:prstGeom>
-          <a:noFill/>
-          <a:ln/>
-        </p:spPr>
-        <p:txBody>
-          <a:bodyPr wrap="square" lIns="0" tIns="0" rIns="0" bIns="0" rtlCol="0" anchor="ctr"/>
-          <a:lstStyle/>
-          <a:p>
-            <a:pPr indent="0" marL="0">
-              <a:buNone/>
-            </a:pPr>
-            <a:r>
-              <a:rPr lang="en-US" sz="1550" b="1" dirty="0">
-                <a:solidFill>
-                  <a:srgbClr val="9C5B12"/>
-                </a:solidFill>
-                <a:latin typeface="Cambria" pitchFamily="34" charset="0"/>
-                <a:ea typeface="Cambria" pitchFamily="34" charset="-122"/>
-                <a:cs typeface="Cambria" pitchFamily="34" charset="-120"/>
-              </a:rPr>
-              <a:t>Что из этого следует для плана</a:t>
-            </a:r>
-            <a:endParaRPr lang="en-US" sz="1550" dirty="0"/>
-          </a:p>
-        </p:txBody>
-      </p:sp>
-      <p:sp>
-        <p:nvSpPr>
-          <p:cNvPr id="14" name="Text 12"/>
-          <p:cNvSpPr txBox="1"/>
-          <p:nvPr/>
-        </p:nvSpPr>
-        <p:spPr>
-          <a:xfrm>
-            <a:off x="914400" y="4700016"/>
-            <a:ext cx="10332720" cy="1243584"/>
-          </a:xfrm>
-          <a:prstGeom prst="rect">
-            <a:avLst/>
-          </a:prstGeom>
-          <a:noFill/>
-          <a:ln/>
-        </p:spPr>
-        <p:txBody>
-          <a:bodyPr wrap="square" lIns="0" tIns="0" rIns="0" bIns="0" rtlCol="0" anchor="ctr"/>
-          <a:lstStyle/>
-          <a:p>
-            <a:pPr indent="0" marL="0">
-              <a:lnSpc>
-                <a:spcPts val="1700"/>
-              </a:lnSpc>
-              <a:buNone/>
-            </a:pPr>
-            <a:r>
-              <a:rPr lang="en-US" sz="1200" dirty="0">
-                <a:solidFill>
-                  <a:srgbClr val="C7CFD8"/>
-                </a:solidFill>
-                <a:latin typeface="Calibri" pitchFamily="34" charset="0"/>
-                <a:ea typeface="Calibri" pitchFamily="34" charset="-122"/>
-                <a:cs typeface="Calibri" pitchFamily="34" charset="-120"/>
-              </a:rPr>
-              <a:t>Планировать пилот надо по конверсии, а курсовую выгоду не перепроверять, а принять из бэктеста — иначе пилот запланирован на три года.</a:t>
-            </a:r>
-            <a:endParaRPr lang="en-US" sz="1200" dirty="0"/>
-          </a:p>
-          <a:p>
-            <a:pPr indent="0" marL="0">
-              <a:lnSpc>
-                <a:spcPts val="1700"/>
-              </a:lnSpc>
-              <a:buNone/>
-            </a:pPr>
-            <a:endParaRPr lang="en-US" sz="1200" dirty="0"/>
-          </a:p>
-          <a:p>
-            <a:pPr indent="0" marL="0">
-              <a:lnSpc>
-                <a:spcPts val="1700"/>
-              </a:lnSpc>
-              <a:buNone/>
-            </a:pPr>
-            <a:r>
-              <a:rPr lang="en-US" sz="1200" dirty="0">
-                <a:solidFill>
-                  <a:srgbClr val="C7CFD8"/>
-                </a:solidFill>
-                <a:latin typeface="Calibri" pitchFamily="34" charset="0"/>
-                <a:ea typeface="Calibri" pitchFamily="34" charset="-122"/>
-                <a:cs typeface="Calibri" pitchFamily="34" charset="-120"/>
-              </a:rPr>
-              <a:t>От банка нужны: доля коммуникационного лимита, курс исполнения для метрики деградации, холдаут и согласование текстов. Ускорить первую ветку можно только расширением списка коридоров.</a:t>
-            </a:r>
-            <a:endParaRPr lang="en-US" sz="1200" dirty="0"/>
+              <a:t>Данные на макетах вымышленные: имена, номера телефонов, остатки и последние цифры карт не принадлежат никому.</a:t>
+            </a:r>
+            <a:endParaRPr lang="en-US" sz="1100" dirty="0"/>
           </a:p>
         </p:txBody>
       </p:sp>
@@ -5203,7 +4303,7 @@
 </p:sld>
 </file>
 
-<file path=ppt/slides/slide16.xml><?xml version="1.0" encoding="utf-8"?>
+<file path=ppt/slides/slide15.xml><?xml version="1.0" encoding="utf-8"?>
 <p:sld xmlns:a="http://schemas.openxmlformats.org/drawingml/2006/main" xmlns:r="http://schemas.openxmlformats.org/officeDocument/2006/relationships" xmlns:p="http://schemas.openxmlformats.org/presentationml/2006/main">
   <p:cSld name="Slide 15">
     <p:bg>
@@ -5246,10 +4346,6 @@
           </a:solidFill>
           <a:ln/>
         </p:spPr>
-        <p:txBody>
-          <a:bodyPr/>
-          <a:p/>
-        </p:txBody>
       </p:sp>
       <p:sp>
         <p:nvSpPr>
@@ -5284,7 +4380,7 @@
                 <a:ea typeface="Calibri" pitchFamily="34" charset="-122"/>
                 <a:cs typeface="Calibri" pitchFamily="34" charset="-120"/>
               </a:rPr>
-              <a:t>14</a:t>
+              <a:t>13</a:t>
             </a:r>
             <a:endParaRPr lang="en-US" sz="1400" dirty="0"/>
           </a:p>
@@ -5323,7 +4419,7 @@
                 <a:ea typeface="Cambria" pitchFamily="34" charset="-122"/>
                 <a:cs typeface="Cambria" pitchFamily="34" charset="-120"/>
               </a:rPr>
-              <a:t>Команда и распределение задач</a:t>
+              <a:t>Основные риски и план до финала</a:t>
             </a:r>
             <a:endParaRPr lang="en-US" sz="2700" dirty="0"/>
           </a:p>
@@ -5331,18 +4427,732 @@
       </p:sp>
       <p:sp>
         <p:nvSpPr>
-          <p:cNvPr id="5" name="Shape 3"/>
+          <p:cNvPr id="5" name="Text 3"/>
+          <p:cNvSpPr txBox="1"/>
+          <p:nvPr/>
+        </p:nvSpPr>
+        <p:spPr>
+          <a:xfrm>
+            <a:off x="640080" y="1170432"/>
+            <a:ext cx="5367528" cy="329184"/>
+          </a:xfrm>
+          <a:prstGeom prst="rect">
+            <a:avLst/>
+          </a:prstGeom>
+          <a:noFill/>
+          <a:ln/>
+        </p:spPr>
+        <p:txBody>
+          <a:bodyPr wrap="square" lIns="0" tIns="0" rIns="0" bIns="0" rtlCol="0" anchor="ctr"/>
+          <a:lstStyle/>
+          <a:p>
+            <a:pPr indent="0" marL="0">
+              <a:buNone/>
+            </a:pPr>
+            <a:r>
+              <a:rPr lang="en-US" sz="1600" b="1" dirty="0">
+                <a:solidFill>
+                  <a:srgbClr val="9E3226"/>
+                </a:solidFill>
+                <a:latin typeface="Cambria" pitchFamily="34" charset="0"/>
+                <a:ea typeface="Cambria" pitchFamily="34" charset="-122"/>
+                <a:cs typeface="Cambria" pitchFamily="34" charset="-120"/>
+              </a:rPr>
+              <a:t>Ограничения</a:t>
+            </a:r>
+            <a:endParaRPr lang="en-US" sz="1600" dirty="0"/>
+          </a:p>
+        </p:txBody>
+      </p:sp>
+      <p:sp>
+        <p:nvSpPr>
+          <p:cNvPr id="6" name="Text 4"/>
+          <p:cNvSpPr txBox="1"/>
+          <p:nvPr/>
+        </p:nvSpPr>
+        <p:spPr>
+          <a:xfrm>
+            <a:off x="640080" y="1572768"/>
+            <a:ext cx="5367528" cy="2487168"/>
+          </a:xfrm>
+          <a:prstGeom prst="rect">
+            <a:avLst/>
+          </a:prstGeom>
+          <a:noFill/>
+          <a:ln/>
+        </p:spPr>
+        <p:txBody>
+          <a:bodyPr wrap="square" lIns="0" tIns="0" rIns="0" bIns="0" rtlCol="0" anchor="t"/>
+          <a:lstStyle/>
+          <a:p>
+            <a:pPr marL="342900" indent="-342900">
+              <a:lnSpc>
+                <a:spcPts val="1600"/>
+              </a:lnSpc>
+              <a:spcAft>
+                <a:spcPts val="400"/>
+              </a:spcAft>
+              <a:buSzPct val="100000"/>
+              <a:buChar char="•"/>
+            </a:pPr>
+            <a:r>
+              <a:rPr lang="en-US" sz="1150" dirty="0">
+                <a:solidFill>
+                  <a:srgbClr val="4E5966"/>
+                </a:solidFill>
+                <a:latin typeface="Calibri" pitchFamily="34" charset="0"/>
+                <a:ea typeface="Calibri" pitchFamily="34" charset="-122"/>
+                <a:cs typeface="Calibri" pitchFamily="34" charset="-120"/>
+              </a:rPr>
+              <a:t>Масштаб эффекта — десятки базисных пунктов: 72–189 ₽ на переводе 30 000 ₽. Порог запуска: +30 б. п. (90 ₽)</a:t>
+            </a:r>
+            <a:endParaRPr lang="en-US" sz="1150" dirty="0"/>
+          </a:p>
+          <a:p>
+            <a:pPr marL="342900" indent="-342900">
+              <a:lnSpc>
+                <a:spcPts val="1600"/>
+              </a:lnSpc>
+              <a:spcAft>
+                <a:spcPts val="400"/>
+              </a:spcAft>
+              <a:buSzPct val="100000"/>
+              <a:buChar char="•"/>
+            </a:pPr>
+            <a:r>
+              <a:rPr lang="en-US" sz="1150" dirty="0">
+                <a:solidFill>
+                  <a:srgbClr val="4E5966"/>
+                </a:solidFill>
+                <a:latin typeface="Calibri" pitchFamily="34" charset="0"/>
+                <a:ea typeface="Calibri" pitchFamily="34" charset="-122"/>
+                <a:cs typeface="Calibri" pitchFamily="34" charset="-120"/>
+              </a:rPr>
+              <a:t>Модель ошибается в двух случаях из трёх — свойство задачи, а не дефект</a:t>
+            </a:r>
+            <a:endParaRPr lang="en-US" sz="1150" dirty="0"/>
+          </a:p>
+          <a:p>
+            <a:pPr marL="342900" indent="-342900">
+              <a:lnSpc>
+                <a:spcPts val="1600"/>
+              </a:lnSpc>
+              <a:spcAft>
+                <a:spcPts val="400"/>
+              </a:spcAft>
+              <a:buSzPct val="100000"/>
+              <a:buChar char="•"/>
+            </a:pPr>
+            <a:r>
+              <a:rPr lang="en-US" sz="1150" dirty="0">
+                <a:solidFill>
+                  <a:srgbClr val="4E5966"/>
+                </a:solidFill>
+                <a:latin typeface="Calibri" pitchFamily="34" charset="0"/>
+                <a:ea typeface="Calibri" pitchFamily="34" charset="-122"/>
+                <a:cs typeface="Calibri" pitchFamily="34" charset="-120"/>
+              </a:rPr>
+              <a:t>Сезонность — самый сильный и самый хрупкий признак: истории всего семь лет</a:t>
+            </a:r>
+            <a:endParaRPr lang="en-US" sz="1150" dirty="0"/>
+          </a:p>
+          <a:p>
+            <a:pPr marL="342900" indent="-342900">
+              <a:lnSpc>
+                <a:spcPts val="1600"/>
+              </a:lnSpc>
+              <a:spcAft>
+                <a:spcPts val="400"/>
+              </a:spcAft>
+              <a:buSzPct val="100000"/>
+              <a:buChar char="•"/>
+            </a:pPr>
+            <a:r>
+              <a:rPr lang="en-US" sz="1150" dirty="0">
+                <a:solidFill>
+                  <a:srgbClr val="4E5966"/>
+                </a:solidFill>
+                <a:latin typeface="Calibri" pitchFamily="34" charset="0"/>
+                <a:ea typeface="Calibri" pitchFamily="34" charset="-122"/>
+                <a:cs typeface="Calibri" pitchFamily="34" charset="-120"/>
+              </a:rPr>
+              <a:t>2022 год — 13,1 % наблюдений и 57,6 % всей дисперсии доходностей</a:t>
+            </a:r>
+            <a:endParaRPr lang="en-US" sz="1150" dirty="0"/>
+          </a:p>
+          <a:p>
+            <a:pPr marL="342900" indent="-342900">
+              <a:lnSpc>
+                <a:spcPts val="1600"/>
+              </a:lnSpc>
+              <a:spcAft>
+                <a:spcPts val="400"/>
+              </a:spcAft>
+              <a:buSzPct val="100000"/>
+              <a:buChar char="•"/>
+            </a:pPr>
+            <a:r>
+              <a:rPr lang="en-US" sz="1150" dirty="0">
+                <a:solidFill>
+                  <a:srgbClr val="4E5966"/>
+                </a:solidFill>
+                <a:latin typeface="Calibri" pitchFamily="34" charset="0"/>
+                <a:ea typeface="Calibri" pitchFamily="34" charset="-122"/>
+                <a:cs typeface="Calibri" pitchFamily="34" charset="-120"/>
+              </a:rPr>
+              <a:t>Пять коридоров — не пять подтверждений: корреляция внутри даты 0,86</a:t>
+            </a:r>
+            <a:endParaRPr lang="en-US" sz="1150" dirty="0"/>
+          </a:p>
+          <a:p>
+            <a:pPr marL="342900" indent="-342900">
+              <a:lnSpc>
+                <a:spcPts val="1600"/>
+              </a:lnSpc>
+              <a:spcAft>
+                <a:spcPts val="400"/>
+              </a:spcAft>
+              <a:buSzPct val="100000"/>
+              <a:buChar char="•"/>
+            </a:pPr>
+            <a:r>
+              <a:rPr lang="en-US" sz="1150" dirty="0">
+                <a:solidFill>
+                  <a:srgbClr val="4E5966"/>
+                </a:solidFill>
+                <a:latin typeface="Calibri" pitchFamily="34" charset="0"/>
+                <a:ea typeface="Calibri" pitchFamily="34" charset="-122"/>
+                <a:cs typeface="Calibri" pitchFamily="34" charset="-120"/>
+              </a:rPr>
+              <a:t>Поправки на множественные сравнения нет — интервалы некорректированные</a:t>
+            </a:r>
+            <a:endParaRPr lang="en-US" sz="1150" dirty="0"/>
+          </a:p>
+          <a:p>
+            <a:pPr marL="342900" indent="-342900">
+              <a:lnSpc>
+                <a:spcPts val="1600"/>
+              </a:lnSpc>
+              <a:spcAft>
+                <a:spcPts val="400"/>
+              </a:spcAft>
+              <a:buSzPct val="100000"/>
+              <a:buChar char="•"/>
+            </a:pPr>
+            <a:r>
+              <a:rPr lang="en-US" sz="1150" dirty="0">
+                <a:solidFill>
+                  <a:srgbClr val="4E5966"/>
+                </a:solidFill>
+                <a:latin typeface="Calibri" pitchFamily="34" charset="0"/>
+                <a:ea typeface="Calibri" pitchFamily="34" charset="-122"/>
+                <a:cs typeface="Calibri" pitchFamily="34" charset="-120"/>
+              </a:rPr>
+              <a:t>Нет данных клиентов: эластичность и доля «гибких» не измеримы до пилота</a:t>
+            </a:r>
+            <a:endParaRPr lang="en-US" sz="1150" dirty="0"/>
+          </a:p>
+          <a:p>
+            <a:pPr marL="342900" indent="-342900">
+              <a:lnSpc>
+                <a:spcPts val="1600"/>
+              </a:lnSpc>
+              <a:spcAft>
+                <a:spcPts val="400"/>
+              </a:spcAft>
+              <a:buSzPct val="100000"/>
+              <a:buChar char="•"/>
+            </a:pPr>
+            <a:r>
+              <a:rPr lang="en-US" sz="1150" dirty="0">
+                <a:solidFill>
+                  <a:srgbClr val="4E5966"/>
+                </a:solidFill>
+                <a:latin typeface="Calibri" pitchFamily="34" charset="0"/>
+                <a:ea typeface="Calibri" pitchFamily="34" charset="-122"/>
+                <a:cs typeface="Calibri" pitchFamily="34" charset="-120"/>
+              </a:rPr>
+              <a:t>Курс приложения ≠ курс ЦБ, работаем на прокси</a:t>
+            </a:r>
+            <a:endParaRPr lang="en-US" sz="1150" dirty="0"/>
+          </a:p>
+        </p:txBody>
+      </p:sp>
+      <p:sp>
+        <p:nvSpPr>
+          <p:cNvPr id="7" name="Text 5"/>
+          <p:cNvSpPr txBox="1"/>
+          <p:nvPr/>
+        </p:nvSpPr>
+        <p:spPr>
+          <a:xfrm>
+            <a:off x="6153912" y="1170432"/>
+            <a:ext cx="5367528" cy="329184"/>
+          </a:xfrm>
+          <a:prstGeom prst="rect">
+            <a:avLst/>
+          </a:prstGeom>
+          <a:noFill/>
+          <a:ln/>
+        </p:spPr>
+        <p:txBody>
+          <a:bodyPr wrap="square" lIns="0" tIns="0" rIns="0" bIns="0" rtlCol="0" anchor="ctr"/>
+          <a:lstStyle/>
+          <a:p>
+            <a:pPr indent="0" marL="0">
+              <a:buNone/>
+            </a:pPr>
+            <a:r>
+              <a:rPr lang="en-US" sz="1600" b="1" dirty="0">
+                <a:solidFill>
+                  <a:srgbClr val="16674F"/>
+                </a:solidFill>
+                <a:latin typeface="Cambria" pitchFamily="34" charset="0"/>
+                <a:ea typeface="Cambria" pitchFamily="34" charset="-122"/>
+                <a:cs typeface="Cambria" pitchFamily="34" charset="-120"/>
+              </a:rPr>
+              <a:t>План до 07.09</a:t>
+            </a:r>
+            <a:endParaRPr lang="en-US" sz="1600" dirty="0"/>
+          </a:p>
+        </p:txBody>
+      </p:sp>
+      <p:sp>
+        <p:nvSpPr>
+          <p:cNvPr id="8" name="Text 6"/>
+          <p:cNvSpPr txBox="1"/>
+          <p:nvPr/>
+        </p:nvSpPr>
+        <p:spPr>
+          <a:xfrm>
+            <a:off x="6153912" y="1572768"/>
+            <a:ext cx="5367528" cy="2487168"/>
+          </a:xfrm>
+          <a:prstGeom prst="rect">
+            <a:avLst/>
+          </a:prstGeom>
+          <a:noFill/>
+          <a:ln/>
+        </p:spPr>
+        <p:txBody>
+          <a:bodyPr wrap="square" lIns="0" tIns="0" rIns="0" bIns="0" rtlCol="0" anchor="t"/>
+          <a:lstStyle/>
+          <a:p>
+            <a:pPr marL="342900" indent="-342900">
+              <a:lnSpc>
+                <a:spcPts val="1600"/>
+              </a:lnSpc>
+              <a:spcAft>
+                <a:spcPts val="400"/>
+              </a:spcAft>
+              <a:buSzPct val="100000"/>
+              <a:buChar char="•"/>
+            </a:pPr>
+            <a:r>
+              <a:rPr lang="en-US" sz="1150" dirty="0">
+                <a:solidFill>
+                  <a:srgbClr val="4E5966"/>
+                </a:solidFill>
+                <a:latin typeface="Calibri" pitchFamily="34" charset="0"/>
+                <a:ea typeface="Calibri" pitchFamily="34" charset="-122"/>
+                <a:cs typeface="Calibri" pitchFamily="34" charset="-120"/>
+              </a:rPr>
+              <a:t>Сделано: тексты уведомлений и отбор, макеты трёх компонентов, схема пути, устаревание сигнала</a:t>
+            </a:r>
+            <a:endParaRPr lang="en-US" sz="1150" dirty="0"/>
+          </a:p>
+          <a:p>
+            <a:pPr marL="342900" indent="-342900">
+              <a:lnSpc>
+                <a:spcPts val="1600"/>
+              </a:lnSpc>
+              <a:spcAft>
+                <a:spcPts val="400"/>
+              </a:spcAft>
+              <a:buSzPct val="100000"/>
+              <a:buChar char="•"/>
+            </a:pPr>
+            <a:r>
+              <a:rPr lang="en-US" sz="1150" dirty="0">
+                <a:solidFill>
+                  <a:srgbClr val="4E5966"/>
+                </a:solidFill>
+                <a:latin typeface="Calibri" pitchFamily="34" charset="0"/>
+                <a:ea typeface="Calibri" pitchFamily="34" charset="-122"/>
+                <a:cs typeface="Calibri" pitchFamily="34" charset="-120"/>
+              </a:rPr>
+              <a:t>Пт–Сб: signals.csv, правило комбинирования и добор до полосы частоты, экономика в рублях</a:t>
+            </a:r>
+            <a:endParaRPr lang="en-US" sz="1150" dirty="0"/>
+          </a:p>
+          <a:p>
+            <a:pPr marL="342900" indent="-342900">
+              <a:lnSpc>
+                <a:spcPts val="1600"/>
+              </a:lnSpc>
+              <a:spcAft>
+                <a:spcPts val="400"/>
+              </a:spcAft>
+              <a:buSzPct val="100000"/>
+              <a:buChar char="•"/>
+            </a:pPr>
+            <a:r>
+              <a:rPr lang="en-US" sz="1150" dirty="0">
+                <a:solidFill>
+                  <a:srgbClr val="4E5966"/>
+                </a:solidFill>
+                <a:latin typeface="Calibri" pitchFamily="34" charset="0"/>
+                <a:ea typeface="Calibri" pitchFamily="34" charset="-122"/>
+                <a:cs typeface="Calibri" pitchFamily="34" charset="-120"/>
+              </a:rPr>
+              <a:t>Сб: падежный словарь валют и праздников в коде, приветствия — у носителей языка</a:t>
+            </a:r>
+            <a:endParaRPr lang="en-US" sz="1150" dirty="0"/>
+          </a:p>
+          <a:p>
+            <a:pPr marL="342900" indent="-342900">
+              <a:lnSpc>
+                <a:spcPts val="1600"/>
+              </a:lnSpc>
+              <a:spcAft>
+                <a:spcPts val="400"/>
+              </a:spcAft>
+              <a:buSzPct val="100000"/>
+              <a:buChar char="•"/>
+            </a:pPr>
+            <a:r>
+              <a:rPr lang="en-US" sz="1150" dirty="0">
+                <a:solidFill>
+                  <a:srgbClr val="4E5966"/>
+                </a:solidFill>
+                <a:latin typeface="Calibri" pitchFamily="34" charset="0"/>
+                <a:ea typeface="Calibri" pitchFamily="34" charset="-122"/>
+                <a:cs typeface="Calibri" pitchFamily="34" charset="-120"/>
+              </a:rPr>
+              <a:t>Вс: сборка презентации, два прогона с таймером, финальный журнал допущений</a:t>
+            </a:r>
+            <a:endParaRPr lang="en-US" sz="1150" dirty="0"/>
+          </a:p>
+        </p:txBody>
+      </p:sp>
+      <p:sp>
+        <p:nvSpPr>
+          <p:cNvPr id="9" name="Shape 7"/>
           <p:cNvSpPr/>
           <p:nvPr/>
         </p:nvSpPr>
         <p:spPr>
           <a:xfrm>
-            <a:off x="640080" y="1188720"/>
-            <a:ext cx="10881360" cy="1444752"/>
+            <a:off x="640080" y="4224528"/>
+            <a:ext cx="10881360" cy="1828800"/>
           </a:xfrm>
           <a:prstGeom prst="roundRect">
             <a:avLst>
-              <a:gd name="adj" fmla="val 3797"/>
+              <a:gd name="adj" fmla="val 3000"/>
+            </a:avLst>
+          </a:prstGeom>
+          <a:solidFill>
+            <a:srgbClr val="1A2530"/>
+          </a:solidFill>
+          <a:ln/>
+        </p:spPr>
+      </p:sp>
+      <p:sp>
+        <p:nvSpPr>
+          <p:cNvPr id="10" name="Text 8"/>
+          <p:cNvSpPr txBox="1"/>
+          <p:nvPr/>
+        </p:nvSpPr>
+        <p:spPr>
+          <a:xfrm>
+            <a:off x="914400" y="4370832"/>
+            <a:ext cx="10332720" cy="347472"/>
+          </a:xfrm>
+          <a:prstGeom prst="rect">
+            <a:avLst/>
+          </a:prstGeom>
+          <a:noFill/>
+          <a:ln/>
+        </p:spPr>
+        <p:txBody>
+          <a:bodyPr wrap="square" lIns="0" tIns="0" rIns="0" bIns="0" rtlCol="0" anchor="ctr"/>
+          <a:lstStyle/>
+          <a:p>
+            <a:pPr indent="0" marL="0">
+              <a:buNone/>
+            </a:pPr>
+            <a:r>
+              <a:rPr lang="en-US" sz="1550" b="1" dirty="0">
+                <a:solidFill>
+                  <a:srgbClr val="9C5B12"/>
+                </a:solidFill>
+                <a:latin typeface="Cambria" pitchFamily="34" charset="0"/>
+                <a:ea typeface="Cambria" pitchFamily="34" charset="-122"/>
+                <a:cs typeface="Cambria" pitchFamily="34" charset="-120"/>
+              </a:rPr>
+              <a:t>Открытые вопросы, от которых зависит размер эффекта</a:t>
+            </a:r>
+            <a:endParaRPr lang="en-US" sz="1550" dirty="0"/>
+          </a:p>
+        </p:txBody>
+      </p:sp>
+      <p:sp>
+        <p:nvSpPr>
+          <p:cNvPr id="11" name="Text 9"/>
+          <p:cNvSpPr txBox="1"/>
+          <p:nvPr/>
+        </p:nvSpPr>
+        <p:spPr>
+          <a:xfrm>
+            <a:off x="914400" y="4754880"/>
+            <a:ext cx="10332720" cy="1188720"/>
+          </a:xfrm>
+          <a:prstGeom prst="rect">
+            <a:avLst/>
+          </a:prstGeom>
+          <a:noFill/>
+          <a:ln/>
+        </p:spPr>
+        <p:txBody>
+          <a:bodyPr wrap="square" lIns="0" tIns="0" rIns="0" bIns="0" rtlCol="0" anchor="ctr"/>
+          <a:lstStyle/>
+          <a:p>
+            <a:pPr indent="0" marL="0">
+              <a:lnSpc>
+                <a:spcPts val="1700"/>
+              </a:lnSpc>
+              <a:buNone/>
+            </a:pPr>
+            <a:r>
+              <a:rPr lang="en-US" sz="1200" dirty="0">
+                <a:solidFill>
+                  <a:srgbClr val="C7CFD8"/>
+                </a:solidFill>
+                <a:latin typeface="Calibri" pitchFamily="34" charset="0"/>
+                <a:ea typeface="Calibri" pitchFamily="34" charset="-122"/>
+                <a:cs typeface="Calibri" pitchFamily="34" charset="-120"/>
+              </a:rPr>
+              <a:t>Какова доля клиентов, способных отложить перевод? Если гибких 10 %, пилот на всей базе покажет ноль из-за разбавления.</a:t>
+            </a:r>
+            <a:endParaRPr lang="en-US" sz="1200" dirty="0"/>
+          </a:p>
+          <a:p>
+            <a:pPr indent="0" marL="0">
+              <a:lnSpc>
+                <a:spcPts val="1700"/>
+              </a:lnSpc>
+              <a:buNone/>
+            </a:pPr>
+            <a:endParaRPr lang="en-US" sz="1200" dirty="0"/>
+          </a:p>
+          <a:p>
+            <a:pPr indent="0" marL="0">
+              <a:lnSpc>
+                <a:spcPts val="1700"/>
+              </a:lnSpc>
+              <a:buNone/>
+            </a:pPr>
+            <a:r>
+              <a:rPr lang="en-US" sz="1200" dirty="0">
+                <a:solidFill>
+                  <a:srgbClr val="C7CFD8"/>
+                </a:solidFill>
+                <a:latin typeface="Calibri" pitchFamily="34" charset="0"/>
+                <a:ea typeface="Calibri" pitchFamily="34" charset="-122"/>
+                <a:cs typeface="Calibri" pitchFamily="34" charset="-120"/>
+              </a:rPr>
+              <a:t>Клиент фиксирует сумму отправки или получения? Если получения, лучший курс означает меньше отправленных рублей — знак влияния на выручку меняется.</a:t>
+            </a:r>
+            <a:endParaRPr lang="en-US" sz="1200" dirty="0"/>
+          </a:p>
+        </p:txBody>
+      </p:sp>
+    </p:spTree>
+  </p:cSld>
+  <p:clrMapOvr>
+    <a:masterClrMapping/>
+  </p:clrMapOvr>
+</p:sld>
+</file>
+
+<file path=ppt/slides/slide16.xml><?xml version="1.0" encoding="utf-8"?>
+<p:sld xmlns:a="http://schemas.openxmlformats.org/drawingml/2006/main" xmlns:r="http://schemas.openxmlformats.org/officeDocument/2006/relationships" xmlns:p="http://schemas.openxmlformats.org/presentationml/2006/main">
+  <p:cSld name="Slide 16">
+    <p:bg>
+      <p:bgPr>
+        <a:solidFill>
+          <a:srgbClr val="FFFFFF"/>
+        </a:solidFill>
+      </p:bgPr>
+    </p:bg>
+    <p:spTree>
+      <p:nvGrpSpPr>
+        <p:cNvPr id="1" name=""/>
+        <p:cNvGrpSpPr/>
+        <p:nvPr/>
+      </p:nvGrpSpPr>
+      <p:grpSpPr>
+        <a:xfrm>
+          <a:off x="0" y="0"/>
+          <a:ext cx="0" cy="0"/>
+          <a:chOff x="0" y="0"/>
+          <a:chExt cx="0" cy="0"/>
+        </a:xfrm>
+      </p:grpSpPr>
+      <p:sp>
+        <p:nvSpPr>
+          <p:cNvPr id="2" name="Shape 0"/>
+          <p:cNvSpPr/>
+          <p:nvPr/>
+        </p:nvSpPr>
+        <p:spPr>
+          <a:xfrm>
+            <a:off x="640080" y="475488"/>
+            <a:ext cx="384048" cy="384048"/>
+          </a:xfrm>
+          <a:prstGeom prst="ellipse">
+            <a:avLst/>
+          </a:prstGeom>
+          <a:solidFill>
+            <a:srgbClr val="9C5B12"/>
+          </a:solidFill>
+          <a:ln/>
+        </p:spPr>
+      </p:sp>
+      <p:sp>
+        <p:nvSpPr>
+          <p:cNvPr id="3" name="Text 1"/>
+          <p:cNvSpPr txBox="1"/>
+          <p:nvPr/>
+        </p:nvSpPr>
+        <p:spPr>
+          <a:xfrm>
+            <a:off x="640080" y="475488"/>
+            <a:ext cx="384048" cy="384048"/>
+          </a:xfrm>
+          <a:prstGeom prst="rect">
+            <a:avLst/>
+          </a:prstGeom>
+          <a:noFill/>
+          <a:ln/>
+        </p:spPr>
+        <p:txBody>
+          <a:bodyPr wrap="square" lIns="0" tIns="0" rIns="0" bIns="0" rtlCol="0" anchor="ctr"/>
+          <a:lstStyle/>
+          <a:p>
+            <a:pPr algn="ctr" indent="0" marL="0">
+              <a:buNone/>
+            </a:pPr>
+            <a:r>
+              <a:rPr lang="en-US" sz="1400" b="1" dirty="0">
+                <a:solidFill>
+                  <a:srgbClr val="FFFFFF"/>
+                </a:solidFill>
+                <a:latin typeface="Calibri" pitchFamily="34" charset="0"/>
+                <a:ea typeface="Calibri" pitchFamily="34" charset="-122"/>
+                <a:cs typeface="Calibri" pitchFamily="34" charset="-120"/>
+              </a:rPr>
+              <a:t>14</a:t>
+            </a:r>
+            <a:endParaRPr lang="en-US" sz="1400" dirty="0"/>
+          </a:p>
+        </p:txBody>
+      </p:sp>
+      <p:sp>
+        <p:nvSpPr>
+          <p:cNvPr id="4" name="Text 2"/>
+          <p:cNvSpPr txBox="1"/>
+          <p:nvPr/>
+        </p:nvSpPr>
+        <p:spPr>
+          <a:xfrm>
+            <a:off x="1170432" y="402336"/>
+            <a:ext cx="10332720" cy="566928"/>
+          </a:xfrm>
+          <a:prstGeom prst="rect">
+            <a:avLst/>
+          </a:prstGeom>
+          <a:noFill/>
+          <a:ln/>
+        </p:spPr>
+        <p:txBody>
+          <a:bodyPr wrap="square" lIns="0" tIns="0" rIns="0" bIns="0" rtlCol="0" anchor="ctr"/>
+          <a:lstStyle/>
+          <a:p>
+            <a:pPr indent="0" marL="0">
+              <a:buNone/>
+            </a:pPr>
+            <a:r>
+              <a:rPr lang="en-US" sz="2700" b="1" dirty="0">
+                <a:solidFill>
+                  <a:srgbClr val="1A2530"/>
+                </a:solidFill>
+                <a:latin typeface="Cambria" pitchFamily="34" charset="0"/>
+                <a:ea typeface="Cambria" pitchFamily="34" charset="-122"/>
+                <a:cs typeface="Cambria" pitchFamily="34" charset="-120"/>
+              </a:rPr>
+              <a:t>План пилота: две ветки, и они разной скорости</a:t>
+            </a:r>
+            <a:endParaRPr lang="en-US" sz="2700" dirty="0"/>
+          </a:p>
+        </p:txBody>
+      </p:sp>
+      <p:sp>
+        <p:nvSpPr>
+          <p:cNvPr id="5" name="Text 3"/>
+          <p:cNvSpPr txBox="1"/>
+          <p:nvPr/>
+        </p:nvSpPr>
+        <p:spPr>
+          <a:xfrm>
+            <a:off x="640080" y="1115568"/>
+            <a:ext cx="10881360" cy="457200"/>
+          </a:xfrm>
+          <a:prstGeom prst="rect">
+            <a:avLst/>
+          </a:prstGeom>
+          <a:noFill/>
+          <a:ln/>
+        </p:spPr>
+        <p:txBody>
+          <a:bodyPr wrap="square" lIns="0" tIns="0" rIns="0" bIns="0" rtlCol="0" anchor="ctr"/>
+          <a:lstStyle/>
+          <a:p>
+            <a:pPr indent="0" marL="0">
+              <a:lnSpc>
+                <a:spcPts val="1700"/>
+              </a:lnSpc>
+              <a:buNone/>
+            </a:pPr>
+            <a:r>
+              <a:rPr lang="en-US" sz="1300" dirty="0">
+                <a:solidFill>
+                  <a:srgbClr val="4E5966"/>
+                </a:solidFill>
+                <a:latin typeface="Calibri" pitchFamily="34" charset="0"/>
+                <a:ea typeface="Calibri" pitchFamily="34" charset="-122"/>
+                <a:cs typeface="Calibri" pitchFamily="34" charset="-120"/>
+              </a:rPr>
+              <a:t>Выгода курса — свойство СИГНАЛА, а не клиента: десять тысяч человек, следящих за одним коридором, дают одно наблюдение курса, а не десять тысяч. Когорта эту ветку не ускоряет.</a:t>
+            </a:r>
+            <a:endParaRPr lang="en-US" sz="1300" dirty="0"/>
+          </a:p>
+        </p:txBody>
+      </p:sp>
+      <p:sp>
+        <p:nvSpPr>
+          <p:cNvPr id="6" name="Shape 4"/>
+          <p:cNvSpPr/>
+          <p:nvPr/>
+        </p:nvSpPr>
+        <p:spPr>
+          <a:xfrm>
+            <a:off x="640080" y="1700784"/>
+            <a:ext cx="5367528" cy="2286000"/>
+          </a:xfrm>
+          <a:prstGeom prst="roundRect">
+            <a:avLst>
+              <a:gd name="adj" fmla="val 2400"/>
             </a:avLst>
           </a:prstGeom>
           <a:solidFill>
@@ -5353,14 +5163,14 @@
       </p:sp>
       <p:sp>
         <p:nvSpPr>
-          <p:cNvPr id="6" name="Text 4"/>
+          <p:cNvPr id="7" name="Text 5"/>
           <p:cNvSpPr txBox="1"/>
           <p:nvPr/>
         </p:nvSpPr>
         <p:spPr>
           <a:xfrm>
-            <a:off x="896112" y="1344168"/>
-            <a:ext cx="2468880" cy="329184"/>
+            <a:off x="896112" y="1883664"/>
+            <a:ext cx="4855464" cy="420624"/>
           </a:xfrm>
           <a:prstGeom prst="rect">
             <a:avLst/>
@@ -5376,30 +5186,30 @@
               <a:buNone/>
             </a:pPr>
             <a:r>
-              <a:rPr lang="en-US" sz="1500" b="1" dirty="0">
-                <a:solidFill>
-                  <a:srgbClr val="1A2530"/>
+              <a:rPr lang="en-US" sz="1550" b="1" dirty="0">
+                <a:solidFill>
+                  <a:srgbClr val="9E3226"/>
                 </a:solidFill>
                 <a:latin typeface="Cambria" pitchFamily="34" charset="0"/>
                 <a:ea typeface="Cambria" pitchFamily="34" charset="-122"/>
                 <a:cs typeface="Cambria" pitchFamily="34" charset="-120"/>
               </a:rPr>
-              <a:t>Александр Тармаев</a:t>
-            </a:r>
-            <a:endParaRPr lang="en-US" sz="1500" dirty="0"/>
-          </a:p>
-        </p:txBody>
-      </p:sp>
-      <p:sp>
-        <p:nvSpPr>
-          <p:cNvPr id="7" name="Text 5"/>
+              <a:t>Ветка 1 · выгода курса</a:t>
+            </a:r>
+            <a:endParaRPr lang="en-US" sz="1550" dirty="0"/>
+          </a:p>
+        </p:txBody>
+      </p:sp>
+      <p:sp>
+        <p:nvSpPr>
+          <p:cNvPr id="8" name="Text 6"/>
           <p:cNvSpPr txBox="1"/>
           <p:nvPr/>
         </p:nvSpPr>
         <p:spPr>
           <a:xfrm>
-            <a:off x="896112" y="1700784"/>
-            <a:ext cx="2468880" cy="292608"/>
+            <a:off x="896112" y="2322576"/>
+            <a:ext cx="4855464" cy="1463040"/>
           </a:xfrm>
           <a:prstGeom prst="rect">
             <a:avLst/>
@@ -5412,75 +5222,126 @@
           <a:lstStyle/>
           <a:p>
             <a:pPr indent="0" marL="0">
-              <a:buNone/>
-            </a:pPr>
-            <a:r>
-              <a:rPr lang="en-US" sz="1150" b="1" dirty="0">
-                <a:solidFill>
-                  <a:srgbClr val="9C5B12"/>
+              <a:lnSpc>
+                <a:spcPts val="1700"/>
+              </a:lnSpc>
+              <a:buNone/>
+            </a:pPr>
+            <a:r>
+              <a:rPr lang="en-US" sz="1250" dirty="0">
+                <a:solidFill>
+                  <a:srgbClr val="4E5966"/>
                 </a:solidFill>
                 <a:latin typeface="Calibri" pitchFamily="34" charset="0"/>
                 <a:ea typeface="Calibri" pitchFamily="34" charset="-122"/>
                 <a:cs typeface="Calibri" pitchFamily="34" charset="-120"/>
               </a:rPr>
-              <a:t>Product Engineer</a:t>
-            </a:r>
-            <a:endParaRPr lang="en-US" sz="1150" dirty="0"/>
-          </a:p>
-        </p:txBody>
-      </p:sp>
-      <p:sp>
-        <p:nvSpPr>
-          <p:cNvPr id="8" name="Text 6"/>
-          <p:cNvSpPr txBox="1"/>
-          <p:nvPr/>
-        </p:nvSpPr>
-        <p:spPr>
-          <a:xfrm>
-            <a:off x="896112" y="2011680"/>
-            <a:ext cx="2468880" cy="493776"/>
-          </a:xfrm>
-          <a:prstGeom prst="rect">
-            <a:avLst/>
-          </a:prstGeom>
-          <a:noFill/>
-          <a:ln/>
-        </p:spPr>
-        <p:txBody>
-          <a:bodyPr wrap="square" lIns="0" tIns="0" rIns="0" bIns="0" rtlCol="0" anchor="ctr"/>
-          <a:lstStyle/>
+              <a:t>Скорость задана календарём ЦБ. Чтобы отличить +63 бп от нуля с мощностью 80 %, нужно 437 срабатываний = 136 дней с сигналом = 146 НЕДЕЛЬ.</a:t>
+            </a:r>
+            <a:endParaRPr lang="en-US" sz="1250" dirty="0"/>
+          </a:p>
           <a:p>
             <a:pPr indent="0" marL="0">
               <a:lnSpc>
-                <a:spcPts val="1250"/>
+                <a:spcPts val="1700"/>
               </a:lnSpc>
               <a:buNone/>
             </a:pPr>
-            <a:r>
-              <a:rPr lang="en-US" sz="1000" dirty="0">
-                <a:solidFill>
-                  <a:srgbClr val="6E7A88"/>
+            <a:endParaRPr lang="en-US" sz="1250" dirty="0"/>
+          </a:p>
+          <a:p>
+            <a:pPr indent="0" marL="0">
+              <a:lnSpc>
+                <a:spcPts val="1700"/>
+              </a:lnSpc>
+              <a:buNone/>
+            </a:pPr>
+            <a:r>
+              <a:rPr lang="en-US" sz="1250" dirty="0">
+                <a:solidFill>
+                  <a:srgbClr val="4E5966"/>
                 </a:solidFill>
                 <a:latin typeface="Calibri" pitchFamily="34" charset="0"/>
                 <a:ea typeface="Calibri" pitchFamily="34" charset="-122"/>
                 <a:cs typeface="Calibri" pitchFamily="34" charset="-120"/>
               </a:rPr>
-              <a:t>Продуктовое видение, распределение работы, MVP</a:t>
-            </a:r>
-            <a:endParaRPr lang="en-US" sz="1000" dirty="0"/>
-          </a:p>
-        </p:txBody>
-      </p:sp>
-      <p:sp>
-        <p:nvSpPr>
-          <p:cNvPr id="9" name="Text 7"/>
+              <a:t>Пилот этого не успеет. Вердикт даёт бэктест на 296 неделях out-of-sample.</a:t>
+            </a:r>
+            <a:endParaRPr lang="en-US" sz="1250" dirty="0"/>
+          </a:p>
+        </p:txBody>
+      </p:sp>
+      <p:sp>
+        <p:nvSpPr>
+          <p:cNvPr id="9" name="Shape 7"/>
+          <p:cNvSpPr/>
+          <p:nvPr/>
+        </p:nvSpPr>
+        <p:spPr>
+          <a:xfrm>
+            <a:off x="6153912" y="1700784"/>
+            <a:ext cx="5367528" cy="2286000"/>
+          </a:xfrm>
+          <a:prstGeom prst="roundRect">
+            <a:avLst>
+              <a:gd name="adj" fmla="val 2400"/>
+            </a:avLst>
+          </a:prstGeom>
+          <a:solidFill>
+            <a:srgbClr val="F4F6F8"/>
+          </a:solidFill>
+          <a:ln/>
+        </p:spPr>
+      </p:sp>
+      <p:sp>
+        <p:nvSpPr>
+          <p:cNvPr id="10" name="Text 8"/>
           <p:cNvSpPr txBox="1"/>
           <p:nvPr/>
         </p:nvSpPr>
         <p:spPr>
           <a:xfrm>
-            <a:off x="3520440" y="1389888"/>
-            <a:ext cx="6720840" cy="1078992"/>
+            <a:off x="6409944" y="1883664"/>
+            <a:ext cx="4855464" cy="420624"/>
+          </a:xfrm>
+          <a:prstGeom prst="rect">
+            <a:avLst/>
+          </a:prstGeom>
+          <a:noFill/>
+          <a:ln/>
+        </p:spPr>
+        <p:txBody>
+          <a:bodyPr wrap="square" lIns="0" tIns="0" rIns="0" bIns="0" rtlCol="0" anchor="ctr"/>
+          <a:lstStyle/>
+          <a:p>
+            <a:pPr indent="0" marL="0">
+              <a:buNone/>
+            </a:pPr>
+            <a:r>
+              <a:rPr lang="en-US" sz="1550" b="1" dirty="0">
+                <a:solidFill>
+                  <a:srgbClr val="16674F"/>
+                </a:solidFill>
+                <a:latin typeface="Cambria" pitchFamily="34" charset="0"/>
+                <a:ea typeface="Cambria" pitchFamily="34" charset="-122"/>
+                <a:cs typeface="Cambria" pitchFamily="34" charset="-120"/>
+              </a:rPr>
+              <a:t>Ветка 2 · конверсия</a:t>
+            </a:r>
+            <a:endParaRPr lang="en-US" sz="1550" dirty="0"/>
+          </a:p>
+        </p:txBody>
+      </p:sp>
+      <p:sp>
+        <p:nvSpPr>
+          <p:cNvPr id="11" name="Text 9"/>
+          <p:cNvSpPr txBox="1"/>
+          <p:nvPr/>
+        </p:nvSpPr>
+        <p:spPr>
+          <a:xfrm>
+            <a:off x="6409944" y="2322576"/>
+            <a:ext cx="4855464" cy="1463040"/>
           </a:xfrm>
           <a:prstGeom prst="rect">
             <a:avLst/>
@@ -5494,12 +5355,12 @@
           <a:p>
             <a:pPr indent="0" marL="0">
               <a:lnSpc>
-                <a:spcPts val="1500"/>
+                <a:spcPts val="1700"/>
               </a:lnSpc>
               <a:buNone/>
             </a:pPr>
             <a:r>
-              <a:rPr lang="en-US" sz="1100" dirty="0">
+              <a:rPr lang="en-US" sz="1250" dirty="0">
                 <a:solidFill>
                   <a:srgbClr val="4E5966"/>
                 </a:solidFill>
@@ -5507,83 +5368,73 @@
                 <a:ea typeface="Calibri" pitchFamily="34" charset="-122"/>
                 <a:cs typeface="Calibri" pitchFamily="34" charset="-120"/>
               </a:rPr>
-              <a:t>Постановка продуктовой задачи и границы MVP · разбор девяти продуктовых гипотез · предложение клиентской метрики и её обоснование · журнал допущений и развилок · дизайн пилота · распределение работ</a:t>
-            </a:r>
-            <a:endParaRPr lang="en-US" sz="1100" dirty="0"/>
-          </a:p>
-        </p:txBody>
-      </p:sp>
-      <p:sp>
-        <p:nvSpPr>
-          <p:cNvPr id="10" name="Text 8"/>
-          <p:cNvSpPr txBox="1"/>
-          <p:nvPr/>
-        </p:nvSpPr>
-        <p:spPr>
-          <a:xfrm>
-            <a:off x="10378440" y="1737360"/>
-            <a:ext cx="960120" cy="347472"/>
-          </a:xfrm>
-          <a:prstGeom prst="rect">
-            <a:avLst/>
-          </a:prstGeom>
-          <a:noFill/>
-          <a:ln/>
-        </p:spPr>
-        <p:txBody>
-          <a:bodyPr wrap="square" lIns="0" tIns="0" rIns="0" bIns="0" rtlCol="0" anchor="ctr"/>
-          <a:lstStyle/>
-          <a:p>
-            <a:pPr algn="ctr" indent="0" marL="0">
-              <a:buNone/>
-            </a:pPr>
-            <a:r>
-              <a:rPr lang="en-US" sz="1400" b="1" dirty="0">
-                <a:solidFill>
-                  <a:srgbClr val="9C5B12"/>
+              <a:t>Единица наблюдения — пара «клиент x пуш», и вот её когорта ускоряет.</a:t>
+            </a:r>
+            <a:endParaRPr lang="en-US" sz="1250" dirty="0"/>
+          </a:p>
+          <a:p>
+            <a:pPr indent="0" marL="0">
+              <a:lnSpc>
+                <a:spcPts val="1700"/>
+              </a:lnSpc>
+              <a:buNone/>
+            </a:pPr>
+            <a:endParaRPr lang="en-US" sz="1250" dirty="0"/>
+          </a:p>
+          <a:p>
+            <a:pPr indent="0" marL="0">
+              <a:lnSpc>
+                <a:spcPts val="1700"/>
+              </a:lnSpc>
+              <a:buNone/>
+            </a:pPr>
+            <a:r>
+              <a:rPr lang="en-US" sz="1250" dirty="0">
+                <a:solidFill>
+                  <a:srgbClr val="4E5966"/>
                 </a:solidFill>
                 <a:latin typeface="Calibri" pitchFamily="34" charset="0"/>
                 <a:ea typeface="Calibri" pitchFamily="34" charset="-122"/>
                 <a:cs typeface="Calibri" pitchFamily="34" charset="-120"/>
               </a:rPr>
-              <a:t>33 %</a:t>
-            </a:r>
-            <a:endParaRPr lang="en-US" sz="1400" dirty="0"/>
-          </a:p>
-        </p:txBody>
-      </p:sp>
-      <p:sp>
-        <p:nvSpPr>
-          <p:cNvPr id="11" name="Shape 9"/>
+              <a:t>При базовой конверсии 5 % и росте +20 %: 16 315 пар — это 5 недель на 5 000 клиентов. Базовая конверсия стоит параметром: данных о коммуникациях нет.</a:t>
+            </a:r>
+            <a:endParaRPr lang="en-US" sz="1250" dirty="0"/>
+          </a:p>
+        </p:txBody>
+      </p:sp>
+      <p:sp>
+        <p:nvSpPr>
+          <p:cNvPr id="12" name="Shape 10"/>
           <p:cNvSpPr/>
           <p:nvPr/>
         </p:nvSpPr>
         <p:spPr>
           <a:xfrm>
-            <a:off x="640080" y="2788920"/>
-            <a:ext cx="10881360" cy="1444752"/>
+            <a:off x="640080" y="4169664"/>
+            <a:ext cx="10881360" cy="1883664"/>
           </a:xfrm>
           <a:prstGeom prst="roundRect">
             <a:avLst>
-              <a:gd name="adj" fmla="val 3797"/>
+              <a:gd name="adj" fmla="val 2913"/>
             </a:avLst>
           </a:prstGeom>
           <a:solidFill>
-            <a:srgbClr val="F4F6F8"/>
+            <a:srgbClr val="1A2530"/>
           </a:solidFill>
           <a:ln/>
         </p:spPr>
       </p:sp>
       <p:sp>
         <p:nvSpPr>
-          <p:cNvPr id="12" name="Text 10"/>
+          <p:cNvPr id="13" name="Text 11"/>
           <p:cNvSpPr txBox="1"/>
           <p:nvPr/>
         </p:nvSpPr>
         <p:spPr>
           <a:xfrm>
-            <a:off x="896112" y="2944368"/>
-            <a:ext cx="2468880" cy="329184"/>
+            <a:off x="914400" y="4315968"/>
+            <a:ext cx="10332720" cy="347472"/>
           </a:xfrm>
           <a:prstGeom prst="rect">
             <a:avLst/>
@@ -5599,30 +5450,30 @@
               <a:buNone/>
             </a:pPr>
             <a:r>
-              <a:rPr lang="en-US" sz="1500" b="1" dirty="0">
-                <a:solidFill>
-                  <a:srgbClr val="1A2530"/>
+              <a:rPr lang="en-US" sz="1550" b="1" dirty="0">
+                <a:solidFill>
+                  <a:srgbClr val="9C5B12"/>
                 </a:solidFill>
                 <a:latin typeface="Cambria" pitchFamily="34" charset="0"/>
                 <a:ea typeface="Cambria" pitchFamily="34" charset="-122"/>
                 <a:cs typeface="Cambria" pitchFamily="34" charset="-120"/>
               </a:rPr>
-              <a:t>Даниил Недайборщ</a:t>
-            </a:r>
-            <a:endParaRPr lang="en-US" sz="1500" dirty="0"/>
-          </a:p>
-        </p:txBody>
-      </p:sp>
-      <p:sp>
-        <p:nvSpPr>
-          <p:cNvPr id="13" name="Text 11"/>
+              <a:t>Что из этого следует для плана</a:t>
+            </a:r>
+            <a:endParaRPr lang="en-US" sz="1550" dirty="0"/>
+          </a:p>
+        </p:txBody>
+      </p:sp>
+      <p:sp>
+        <p:nvSpPr>
+          <p:cNvPr id="14" name="Text 12"/>
           <p:cNvSpPr txBox="1"/>
           <p:nvPr/>
         </p:nvSpPr>
         <p:spPr>
           <a:xfrm>
-            <a:off x="896112" y="3300984"/>
-            <a:ext cx="2468880" cy="292608"/>
+            <a:off x="914400" y="4700016"/>
+            <a:ext cx="10332720" cy="1243584"/>
           </a:xfrm>
           <a:prstGeom prst="rect">
             <a:avLst/>
@@ -5635,405 +5486,52 @@
           <a:lstStyle/>
           <a:p>
             <a:pPr indent="0" marL="0">
-              <a:buNone/>
-            </a:pPr>
-            <a:r>
-              <a:rPr lang="en-US" sz="1150" b="1" dirty="0">
-                <a:solidFill>
-                  <a:srgbClr val="9C5B12"/>
+              <a:lnSpc>
+                <a:spcPts val="1700"/>
+              </a:lnSpc>
+              <a:buNone/>
+            </a:pPr>
+            <a:r>
+              <a:rPr lang="en-US" sz="1200" dirty="0">
+                <a:solidFill>
+                  <a:srgbClr val="C7CFD8"/>
                 </a:solidFill>
                 <a:latin typeface="Calibri" pitchFamily="34" charset="0"/>
                 <a:ea typeface="Calibri" pitchFamily="34" charset="-122"/>
                 <a:cs typeface="Calibri" pitchFamily="34" charset="-120"/>
               </a:rPr>
-              <a:t>AI Engineer · разработка</a:t>
-            </a:r>
-            <a:endParaRPr lang="en-US" sz="1150" dirty="0"/>
-          </a:p>
-        </p:txBody>
-      </p:sp>
-      <p:sp>
-        <p:nvSpPr>
-          <p:cNvPr id="14" name="Text 12"/>
-          <p:cNvSpPr txBox="1"/>
-          <p:nvPr/>
-        </p:nvSpPr>
-        <p:spPr>
-          <a:xfrm>
-            <a:off x="896112" y="3611880"/>
-            <a:ext cx="2468880" cy="493776"/>
-          </a:xfrm>
-          <a:prstGeom prst="rect">
-            <a:avLst/>
-          </a:prstGeom>
-          <a:noFill/>
-          <a:ln/>
-        </p:spPr>
-        <p:txBody>
-          <a:bodyPr wrap="square" lIns="0" tIns="0" rIns="0" bIns="0" rtlCol="0" anchor="ctr"/>
-          <a:lstStyle/>
+              <a:t>Планировать пилот надо по конверсии, а курсовую выгоду не перепроверять, а принять из бэктеста — иначе пилот запланирован на три года.</a:t>
+            </a:r>
+            <a:endParaRPr lang="en-US" sz="1200" dirty="0"/>
+          </a:p>
           <a:p>
             <a:pPr indent="0" marL="0">
               <a:lnSpc>
-                <a:spcPts val="1250"/>
+                <a:spcPts val="1700"/>
               </a:lnSpc>
               <a:buNone/>
             </a:pPr>
-            <a:r>
-              <a:rPr lang="en-US" sz="1000" dirty="0">
-                <a:solidFill>
-                  <a:srgbClr val="6E7A88"/>
+            <a:endParaRPr lang="en-US" sz="1200" dirty="0"/>
+          </a:p>
+          <a:p>
+            <a:pPr indent="0" marL="0">
+              <a:lnSpc>
+                <a:spcPts val="1700"/>
+              </a:lnSpc>
+              <a:buNone/>
+            </a:pPr>
+            <a:r>
+              <a:rPr lang="en-US" sz="1200" dirty="0">
+                <a:solidFill>
+                  <a:srgbClr val="C7CFD8"/>
                 </a:solidFill>
                 <a:latin typeface="Calibri" pitchFamily="34" charset="0"/>
                 <a:ea typeface="Calibri" pitchFamily="34" charset="-122"/>
                 <a:cs typeface="Calibri" pitchFamily="34" charset="-120"/>
               </a:rPr>
-              <a:t>Данные, признаки, инфраструктура честности</a:t>
-            </a:r>
-            <a:endParaRPr lang="en-US" sz="1000" dirty="0"/>
-          </a:p>
-        </p:txBody>
-      </p:sp>
-      <p:sp>
-        <p:nvSpPr>
-          <p:cNvPr id="15" name="Text 13"/>
-          <p:cNvSpPr txBox="1"/>
-          <p:nvPr/>
-        </p:nvSpPr>
-        <p:spPr>
-          <a:xfrm>
-            <a:off x="3520440" y="2990088"/>
-            <a:ext cx="6720840" cy="1078992"/>
-          </a:xfrm>
-          <a:prstGeom prst="rect">
-            <a:avLst/>
-          </a:prstGeom>
-          <a:noFill/>
-          <a:ln/>
-        </p:spPr>
-        <p:txBody>
-          <a:bodyPr wrap="square" lIns="0" tIns="0" rIns="0" bIns="0" rtlCol="0" anchor="ctr"/>
-          <a:lstStyle/>
-          <a:p>
-            <a:pPr indent="0" marL="0">
-              <a:lnSpc>
-                <a:spcPts val="1500"/>
-              </a:lnSpc>
-              <a:buNone/>
-            </a:pPr>
-            <a:r>
-              <a:rPr lang="en-US" sz="1100" dirty="0">
-                <a:solidFill>
-                  <a:srgbClr val="4E5966"/>
-                </a:solidFill>
-                <a:latin typeface="Calibri" pitchFamily="34" charset="0"/>
-                <a:ea typeface="Calibri" pitchFamily="34" charset="-122"/>
-                <a:cs typeface="Calibri" pitchFamily="34" charset="-120"/>
-              </a:rPr>
-              <a:t>Загрузчик ЦБ с построчной нормировкой номинала · 83 признака только по прошлому · доказательство отсутствия заглядывания в будущее и 44 автотеста · walk-forward с очисткой в публикациях · signals_as_of(T) · воспроизводимость репозитория</a:t>
-            </a:r>
-            <a:endParaRPr lang="en-US" sz="1100" dirty="0"/>
-          </a:p>
-        </p:txBody>
-      </p:sp>
-      <p:sp>
-        <p:nvSpPr>
-          <p:cNvPr id="16" name="Text 14"/>
-          <p:cNvSpPr txBox="1"/>
-          <p:nvPr/>
-        </p:nvSpPr>
-        <p:spPr>
-          <a:xfrm>
-            <a:off x="10378440" y="3337560"/>
-            <a:ext cx="960120" cy="347472"/>
-          </a:xfrm>
-          <a:prstGeom prst="rect">
-            <a:avLst/>
-          </a:prstGeom>
-          <a:noFill/>
-          <a:ln/>
-        </p:spPr>
-        <p:txBody>
-          <a:bodyPr wrap="square" lIns="0" tIns="0" rIns="0" bIns="0" rtlCol="0" anchor="ctr"/>
-          <a:lstStyle/>
-          <a:p>
-            <a:pPr algn="ctr" indent="0" marL="0">
-              <a:buNone/>
-            </a:pPr>
-            <a:r>
-              <a:rPr lang="en-US" sz="1400" b="1" dirty="0">
-                <a:solidFill>
-                  <a:srgbClr val="9C5B12"/>
-                </a:solidFill>
-                <a:latin typeface="Calibri" pitchFamily="34" charset="0"/>
-                <a:ea typeface="Calibri" pitchFamily="34" charset="-122"/>
-                <a:cs typeface="Calibri" pitchFamily="34" charset="-120"/>
-              </a:rPr>
-              <a:t>33 %</a:t>
-            </a:r>
-            <a:endParaRPr lang="en-US" sz="1400" dirty="0"/>
-          </a:p>
-        </p:txBody>
-      </p:sp>
-      <p:sp>
-        <p:nvSpPr>
-          <p:cNvPr id="17" name="Shape 15"/>
-          <p:cNvSpPr/>
-          <p:nvPr/>
-        </p:nvSpPr>
-        <p:spPr>
-          <a:xfrm>
-            <a:off x="640080" y="4389120"/>
-            <a:ext cx="10881360" cy="1444752"/>
-          </a:xfrm>
-          <a:prstGeom prst="roundRect">
-            <a:avLst>
-              <a:gd name="adj" fmla="val 3797"/>
-            </a:avLst>
-          </a:prstGeom>
-          <a:solidFill>
-            <a:srgbClr val="F4F6F8"/>
-          </a:solidFill>
-          <a:ln/>
-        </p:spPr>
-      </p:sp>
-      <p:sp>
-        <p:nvSpPr>
-          <p:cNvPr id="18" name="Text 16"/>
-          <p:cNvSpPr txBox="1"/>
-          <p:nvPr/>
-        </p:nvSpPr>
-        <p:spPr>
-          <a:xfrm>
-            <a:off x="896112" y="4544568"/>
-            <a:ext cx="2468880" cy="329184"/>
-          </a:xfrm>
-          <a:prstGeom prst="rect">
-            <a:avLst/>
-          </a:prstGeom>
-          <a:noFill/>
-          <a:ln/>
-        </p:spPr>
-        <p:txBody>
-          <a:bodyPr wrap="square" lIns="0" tIns="0" rIns="0" bIns="0" rtlCol="0" anchor="ctr"/>
-          <a:lstStyle/>
-          <a:p>
-            <a:pPr indent="0" marL="0">
-              <a:buNone/>
-            </a:pPr>
-            <a:r>
-              <a:rPr lang="en-US" sz="1500" b="1" dirty="0">
-                <a:solidFill>
-                  <a:srgbClr val="1A2530"/>
-                </a:solidFill>
-                <a:latin typeface="Cambria" pitchFamily="34" charset="0"/>
-                <a:ea typeface="Cambria" pitchFamily="34" charset="-122"/>
-                <a:cs typeface="Cambria" pitchFamily="34" charset="-120"/>
-              </a:rPr>
-              <a:t>Иван Калинин</a:t>
-            </a:r>
-            <a:endParaRPr lang="en-US" sz="1500" dirty="0"/>
-          </a:p>
-        </p:txBody>
-      </p:sp>
-      <p:sp>
-        <p:nvSpPr>
-          <p:cNvPr id="19" name="Text 17"/>
-          <p:cNvSpPr txBox="1"/>
-          <p:nvPr/>
-        </p:nvSpPr>
-        <p:spPr>
-          <a:xfrm>
-            <a:off x="896112" y="4901184"/>
-            <a:ext cx="2468880" cy="292608"/>
-          </a:xfrm>
-          <a:prstGeom prst="rect">
-            <a:avLst/>
-          </a:prstGeom>
-          <a:noFill/>
-          <a:ln/>
-        </p:spPr>
-        <p:txBody>
-          <a:bodyPr wrap="square" lIns="0" tIns="0" rIns="0" bIns="0" rtlCol="0" anchor="ctr"/>
-          <a:lstStyle/>
-          <a:p>
-            <a:pPr indent="0" marL="0">
-              <a:buNone/>
-            </a:pPr>
-            <a:r>
-              <a:rPr lang="en-US" sz="1150" b="1" dirty="0">
-                <a:solidFill>
-                  <a:srgbClr val="9C5B12"/>
-                </a:solidFill>
-                <a:latin typeface="Calibri" pitchFamily="34" charset="0"/>
-                <a:ea typeface="Calibri" pitchFamily="34" charset="-122"/>
-                <a:cs typeface="Calibri" pitchFamily="34" charset="-120"/>
-              </a:rPr>
-              <a:t>AI Engineer · машинное обучение</a:t>
-            </a:r>
-            <a:endParaRPr lang="en-US" sz="1150" dirty="0"/>
-          </a:p>
-        </p:txBody>
-      </p:sp>
-      <p:sp>
-        <p:nvSpPr>
-          <p:cNvPr id="20" name="Text 18"/>
-          <p:cNvSpPr txBox="1"/>
-          <p:nvPr/>
-        </p:nvSpPr>
-        <p:spPr>
-          <a:xfrm>
-            <a:off x="896112" y="5212080"/>
-            <a:ext cx="2468880" cy="493776"/>
-          </a:xfrm>
-          <a:prstGeom prst="rect">
-            <a:avLst/>
-          </a:prstGeom>
-          <a:noFill/>
-          <a:ln/>
-        </p:spPr>
-        <p:txBody>
-          <a:bodyPr wrap="square" lIns="0" tIns="0" rIns="0" bIns="0" rtlCol="0" anchor="ctr"/>
-          <a:lstStyle/>
-          <a:p>
-            <a:pPr indent="0" marL="0">
-              <a:lnSpc>
-                <a:spcPts val="1250"/>
-              </a:lnSpc>
-              <a:buNone/>
-            </a:pPr>
-            <a:r>
-              <a:rPr lang="en-US" sz="1000" dirty="0">
-                <a:solidFill>
-                  <a:srgbClr val="6E7A88"/>
-                </a:solidFill>
-                <a:latin typeface="Calibri" pitchFamily="34" charset="0"/>
-                <a:ea typeface="Calibri" pitchFamily="34" charset="-122"/>
-                <a:cs typeface="Calibri" pitchFamily="34" charset="-120"/>
-              </a:rPr>
-              <a:t>Модели, отбор признаков, валидация результата</a:t>
-            </a:r>
-            <a:endParaRPr lang="en-US" sz="1000" dirty="0"/>
-          </a:p>
-        </p:txBody>
-      </p:sp>
-      <p:sp>
-        <p:nvSpPr>
-          <p:cNvPr id="21" name="Text 19"/>
-          <p:cNvSpPr txBox="1"/>
-          <p:nvPr/>
-        </p:nvSpPr>
-        <p:spPr>
-          <a:xfrm>
-            <a:off x="3520440" y="4590288"/>
-            <a:ext cx="6720840" cy="1078992"/>
-          </a:xfrm>
-          <a:prstGeom prst="rect">
-            <a:avLst/>
-          </a:prstGeom>
-          <a:noFill/>
-          <a:ln/>
-        </p:spPr>
-        <p:txBody>
-          <a:bodyPr wrap="square" lIns="0" tIns="0" rIns="0" bIns="0" rtlCol="0" anchor="ctr"/>
-          <a:lstStyle/>
-          <a:p>
-            <a:pPr indent="0" marL="0">
-              <a:lnSpc>
-                <a:spcPts val="1500"/>
-              </a:lnSpc>
-              <a:buNone/>
-            </a:pPr>
-            <a:r>
-              <a:rPr lang="en-US" sz="1100" dirty="0">
-                <a:solidFill>
-                  <a:srgbClr val="4E5966"/>
-                </a:solidFill>
-                <a:latin typeface="Calibri" pitchFamily="34" charset="0"/>
-                <a:ea typeface="Calibri" pitchFamily="34" charset="-122"/>
-                <a:cs typeface="Calibri" pitchFamily="34" charset="-120"/>
-              </a:rPr>
-              <a:t>Пять семейств моделей, включая CatBoost и XGBoost · честный отбор признаков · подбор конфигураций и диагностика провала на всех признаках · две модели под две метрики · испытания результата</a:t>
-            </a:r>
-            <a:endParaRPr lang="en-US" sz="1100" dirty="0"/>
-          </a:p>
-        </p:txBody>
-      </p:sp>
-      <p:sp>
-        <p:nvSpPr>
-          <p:cNvPr id="22" name="Text 20"/>
-          <p:cNvSpPr txBox="1"/>
-          <p:nvPr/>
-        </p:nvSpPr>
-        <p:spPr>
-          <a:xfrm>
-            <a:off x="10378440" y="4937760"/>
-            <a:ext cx="960120" cy="347472"/>
-          </a:xfrm>
-          <a:prstGeom prst="rect">
-            <a:avLst/>
-          </a:prstGeom>
-          <a:noFill/>
-          <a:ln/>
-        </p:spPr>
-        <p:txBody>
-          <a:bodyPr wrap="square" lIns="0" tIns="0" rIns="0" bIns="0" rtlCol="0" anchor="ctr"/>
-          <a:lstStyle/>
-          <a:p>
-            <a:pPr algn="ctr" indent="0" marL="0">
-              <a:buNone/>
-            </a:pPr>
-            <a:r>
-              <a:rPr lang="en-US" sz="1400" b="1" dirty="0">
-                <a:solidFill>
-                  <a:srgbClr val="9C5B12"/>
-                </a:solidFill>
-                <a:latin typeface="Calibri" pitchFamily="34" charset="0"/>
-                <a:ea typeface="Calibri" pitchFamily="34" charset="-122"/>
-                <a:cs typeface="Calibri" pitchFamily="34" charset="-120"/>
-              </a:rPr>
-              <a:t>33 %</a:t>
-            </a:r>
-            <a:endParaRPr lang="en-US" sz="1400" dirty="0"/>
-          </a:p>
-        </p:txBody>
-      </p:sp>
-      <p:sp>
-        <p:nvSpPr>
-          <p:cNvPr id="23" name="Text 21"/>
-          <p:cNvSpPr txBox="1"/>
-          <p:nvPr/>
-        </p:nvSpPr>
-        <p:spPr>
-          <a:xfrm>
-            <a:off x="640080" y="6272784"/>
-            <a:ext cx="10881360" cy="310896"/>
-          </a:xfrm>
-          <a:prstGeom prst="rect">
-            <a:avLst/>
-          </a:prstGeom>
-          <a:noFill/>
-          <a:ln/>
-        </p:spPr>
-        <p:txBody>
-          <a:bodyPr wrap="square" lIns="0" tIns="0" rIns="0" bIns="0" rtlCol="0" anchor="ctr"/>
-          <a:lstStyle/>
-          <a:p>
-            <a:pPr indent="0" marL="0">
-              <a:buNone/>
-            </a:pPr>
-            <a:r>
-              <a:rPr lang="en-US" sz="1050" i="1" dirty="0">
-                <a:solidFill>
-                  <a:srgbClr val="6E7A88"/>
-                </a:solidFill>
-                <a:latin typeface="Calibri" pitchFamily="34" charset="0"/>
-                <a:ea typeface="Calibri" pitchFamily="34" charset="-122"/>
-                <a:cs typeface="Calibri" pitchFamily="34" charset="-120"/>
-              </a:rPr>
-              <a:t>Работа велась совместно, роли разделены по зонам ответственности; вклад участников сопоставим.</a:t>
-            </a:r>
-            <a:endParaRPr lang="en-US" sz="1050" dirty="0"/>
+              <a:t>От банка нужны: доля коммуникационного лимита, курс исполнения для метрики деградации, холдаут и согласование текстов. Ускорить первую ветку можно только расширением списка коридоров.</a:t>
+            </a:r>
+            <a:endParaRPr lang="en-US" sz="1200" dirty="0"/>
           </a:p>
         </p:txBody>
       </p:sp>
@@ -6047,7 +5545,845 @@
 
 <file path=ppt/slides/slide17.xml><?xml version="1.0" encoding="utf-8"?>
 <p:sld xmlns:a="http://schemas.openxmlformats.org/drawingml/2006/main" xmlns:r="http://schemas.openxmlformats.org/officeDocument/2006/relationships" xmlns:p="http://schemas.openxmlformats.org/presentationml/2006/main">
-  <p:cSld name="Slide 16">
+  <p:cSld name="Slide 17">
+    <p:bg>
+      <p:bgPr>
+        <a:solidFill>
+          <a:srgbClr val="FFFFFF"/>
+        </a:solidFill>
+      </p:bgPr>
+    </p:bg>
+    <p:spTree>
+      <p:nvGrpSpPr>
+        <p:cNvPr id="1" name=""/>
+        <p:cNvGrpSpPr/>
+        <p:nvPr/>
+      </p:nvGrpSpPr>
+      <p:grpSpPr>
+        <a:xfrm>
+          <a:off x="0" y="0"/>
+          <a:ext cx="0" cy="0"/>
+          <a:chOff x="0" y="0"/>
+          <a:chExt cx="0" cy="0"/>
+        </a:xfrm>
+      </p:grpSpPr>
+      <p:sp>
+        <p:nvSpPr>
+          <p:cNvPr id="2" name="Shape 0"/>
+          <p:cNvSpPr/>
+          <p:nvPr/>
+        </p:nvSpPr>
+        <p:spPr>
+          <a:xfrm>
+            <a:off x="640080" y="475488"/>
+            <a:ext cx="384048" cy="384048"/>
+          </a:xfrm>
+          <a:prstGeom prst="ellipse">
+            <a:avLst/>
+          </a:prstGeom>
+          <a:solidFill>
+            <a:srgbClr val="9C5B12"/>
+          </a:solidFill>
+          <a:ln/>
+        </p:spPr>
+      </p:sp>
+      <p:sp>
+        <p:nvSpPr>
+          <p:cNvPr id="3" name="Text 1"/>
+          <p:cNvSpPr txBox="1"/>
+          <p:nvPr/>
+        </p:nvSpPr>
+        <p:spPr>
+          <a:xfrm>
+            <a:off x="640080" y="475488"/>
+            <a:ext cx="384048" cy="384048"/>
+          </a:xfrm>
+          <a:prstGeom prst="rect">
+            <a:avLst/>
+          </a:prstGeom>
+          <a:noFill/>
+          <a:ln/>
+        </p:spPr>
+        <p:txBody>
+          <a:bodyPr wrap="square" lIns="0" tIns="0" rIns="0" bIns="0" rtlCol="0" anchor="ctr"/>
+          <a:lstStyle/>
+          <a:p>
+            <a:pPr algn="ctr" indent="0" marL="0">
+              <a:buNone/>
+            </a:pPr>
+            <a:r>
+              <a:rPr lang="en-US" sz="1400" b="1" dirty="0">
+                <a:solidFill>
+                  <a:srgbClr val="FFFFFF"/>
+                </a:solidFill>
+                <a:latin typeface="Calibri" pitchFamily="34" charset="0"/>
+                <a:ea typeface="Calibri" pitchFamily="34" charset="-122"/>
+                <a:cs typeface="Calibri" pitchFamily="34" charset="-120"/>
+              </a:rPr>
+              <a:t>15</a:t>
+            </a:r>
+            <a:endParaRPr lang="en-US" sz="1400" dirty="0"/>
+          </a:p>
+        </p:txBody>
+      </p:sp>
+      <p:sp>
+        <p:nvSpPr>
+          <p:cNvPr id="4" name="Text 2"/>
+          <p:cNvSpPr txBox="1"/>
+          <p:nvPr/>
+        </p:nvSpPr>
+        <p:spPr>
+          <a:xfrm>
+            <a:off x="1170432" y="402336"/>
+            <a:ext cx="10332720" cy="566928"/>
+          </a:xfrm>
+          <a:prstGeom prst="rect">
+            <a:avLst/>
+          </a:prstGeom>
+          <a:noFill/>
+          <a:ln/>
+        </p:spPr>
+        <p:txBody>
+          <a:bodyPr wrap="square" lIns="0" tIns="0" rIns="0" bIns="0" rtlCol="0" anchor="ctr"/>
+          <a:lstStyle/>
+          <a:p>
+            <a:pPr indent="0" marL="0">
+              <a:buNone/>
+            </a:pPr>
+            <a:r>
+              <a:rPr lang="en-US" sz="2700" b="1" dirty="0">
+                <a:solidFill>
+                  <a:srgbClr val="1A2530"/>
+                </a:solidFill>
+                <a:latin typeface="Cambria" pitchFamily="34" charset="0"/>
+                <a:ea typeface="Cambria" pitchFamily="34" charset="-122"/>
+                <a:cs typeface="Cambria" pitchFamily="34" charset="-120"/>
+              </a:rPr>
+              <a:t>Команда и распределение задач</a:t>
+            </a:r>
+            <a:endParaRPr lang="en-US" sz="2700" dirty="0"/>
+          </a:p>
+        </p:txBody>
+      </p:sp>
+      <p:sp>
+        <p:nvSpPr>
+          <p:cNvPr id="5" name="Shape 3"/>
+          <p:cNvSpPr/>
+          <p:nvPr/>
+        </p:nvSpPr>
+        <p:spPr>
+          <a:xfrm>
+            <a:off x="640080" y="1188720"/>
+            <a:ext cx="10881360" cy="1444752"/>
+          </a:xfrm>
+          <a:prstGeom prst="roundRect">
+            <a:avLst>
+              <a:gd name="adj" fmla="val 3797"/>
+            </a:avLst>
+          </a:prstGeom>
+          <a:solidFill>
+            <a:srgbClr val="F4F6F8"/>
+          </a:solidFill>
+          <a:ln/>
+        </p:spPr>
+      </p:sp>
+      <p:sp>
+        <p:nvSpPr>
+          <p:cNvPr id="6" name="Text 4"/>
+          <p:cNvSpPr txBox="1"/>
+          <p:nvPr/>
+        </p:nvSpPr>
+        <p:spPr>
+          <a:xfrm>
+            <a:off x="896112" y="1344168"/>
+            <a:ext cx="2468880" cy="329184"/>
+          </a:xfrm>
+          <a:prstGeom prst="rect">
+            <a:avLst/>
+          </a:prstGeom>
+          <a:noFill/>
+          <a:ln/>
+        </p:spPr>
+        <p:txBody>
+          <a:bodyPr wrap="square" lIns="0" tIns="0" rIns="0" bIns="0" rtlCol="0" anchor="ctr"/>
+          <a:lstStyle/>
+          <a:p>
+            <a:pPr indent="0" marL="0">
+              <a:buNone/>
+            </a:pPr>
+            <a:r>
+              <a:rPr lang="en-US" sz="1500" b="1" dirty="0">
+                <a:solidFill>
+                  <a:srgbClr val="1A2530"/>
+                </a:solidFill>
+                <a:latin typeface="Cambria" pitchFamily="34" charset="0"/>
+                <a:ea typeface="Cambria" pitchFamily="34" charset="-122"/>
+                <a:cs typeface="Cambria" pitchFamily="34" charset="-120"/>
+              </a:rPr>
+              <a:t>Александр Тармаев</a:t>
+            </a:r>
+            <a:endParaRPr lang="en-US" sz="1500" dirty="0"/>
+          </a:p>
+        </p:txBody>
+      </p:sp>
+      <p:sp>
+        <p:nvSpPr>
+          <p:cNvPr id="7" name="Text 5"/>
+          <p:cNvSpPr txBox="1"/>
+          <p:nvPr/>
+        </p:nvSpPr>
+        <p:spPr>
+          <a:xfrm>
+            <a:off x="896112" y="1700784"/>
+            <a:ext cx="2468880" cy="292608"/>
+          </a:xfrm>
+          <a:prstGeom prst="rect">
+            <a:avLst/>
+          </a:prstGeom>
+          <a:noFill/>
+          <a:ln/>
+        </p:spPr>
+        <p:txBody>
+          <a:bodyPr wrap="square" lIns="0" tIns="0" rIns="0" bIns="0" rtlCol="0" anchor="ctr"/>
+          <a:lstStyle/>
+          <a:p>
+            <a:pPr indent="0" marL="0">
+              <a:buNone/>
+            </a:pPr>
+            <a:r>
+              <a:rPr lang="en-US" sz="1150" b="1" dirty="0">
+                <a:solidFill>
+                  <a:srgbClr val="9C5B12"/>
+                </a:solidFill>
+                <a:latin typeface="Calibri" pitchFamily="34" charset="0"/>
+                <a:ea typeface="Calibri" pitchFamily="34" charset="-122"/>
+                <a:cs typeface="Calibri" pitchFamily="34" charset="-120"/>
+              </a:rPr>
+              <a:t>Product Engineer</a:t>
+            </a:r>
+            <a:endParaRPr lang="en-US" sz="1150" dirty="0"/>
+          </a:p>
+        </p:txBody>
+      </p:sp>
+      <p:sp>
+        <p:nvSpPr>
+          <p:cNvPr id="8" name="Text 6"/>
+          <p:cNvSpPr txBox="1"/>
+          <p:nvPr/>
+        </p:nvSpPr>
+        <p:spPr>
+          <a:xfrm>
+            <a:off x="896112" y="2011680"/>
+            <a:ext cx="2468880" cy="493776"/>
+          </a:xfrm>
+          <a:prstGeom prst="rect">
+            <a:avLst/>
+          </a:prstGeom>
+          <a:noFill/>
+          <a:ln/>
+        </p:spPr>
+        <p:txBody>
+          <a:bodyPr wrap="square" lIns="0" tIns="0" rIns="0" bIns="0" rtlCol="0" anchor="ctr"/>
+          <a:lstStyle/>
+          <a:p>
+            <a:pPr indent="0" marL="0">
+              <a:lnSpc>
+                <a:spcPts val="1250"/>
+              </a:lnSpc>
+              <a:buNone/>
+            </a:pPr>
+            <a:r>
+              <a:rPr lang="en-US" sz="1000" dirty="0">
+                <a:solidFill>
+                  <a:srgbClr val="6E7A88"/>
+                </a:solidFill>
+                <a:latin typeface="Calibri" pitchFamily="34" charset="0"/>
+                <a:ea typeface="Calibri" pitchFamily="34" charset="-122"/>
+                <a:cs typeface="Calibri" pitchFamily="34" charset="-120"/>
+              </a:rPr>
+              <a:t>Продуктовое видение, распределение работы, MVP</a:t>
+            </a:r>
+            <a:endParaRPr lang="en-US" sz="1000" dirty="0"/>
+          </a:p>
+        </p:txBody>
+      </p:sp>
+      <p:sp>
+        <p:nvSpPr>
+          <p:cNvPr id="9" name="Text 7"/>
+          <p:cNvSpPr txBox="1"/>
+          <p:nvPr/>
+        </p:nvSpPr>
+        <p:spPr>
+          <a:xfrm>
+            <a:off x="3520440" y="1389888"/>
+            <a:ext cx="6720840" cy="1078992"/>
+          </a:xfrm>
+          <a:prstGeom prst="rect">
+            <a:avLst/>
+          </a:prstGeom>
+          <a:noFill/>
+          <a:ln/>
+        </p:spPr>
+        <p:txBody>
+          <a:bodyPr wrap="square" lIns="0" tIns="0" rIns="0" bIns="0" rtlCol="0" anchor="ctr"/>
+          <a:lstStyle/>
+          <a:p>
+            <a:pPr indent="0" marL="0">
+              <a:lnSpc>
+                <a:spcPts val="1500"/>
+              </a:lnSpc>
+              <a:buNone/>
+            </a:pPr>
+            <a:r>
+              <a:rPr lang="en-US" sz="1100" dirty="0">
+                <a:solidFill>
+                  <a:srgbClr val="4E5966"/>
+                </a:solidFill>
+                <a:latin typeface="Calibri" pitchFamily="34" charset="0"/>
+                <a:ea typeface="Calibri" pitchFamily="34" charset="-122"/>
+                <a:cs typeface="Calibri" pitchFamily="34" charset="-120"/>
+              </a:rPr>
+              <a:t>Постановка продуктовой задачи и границы MVP · разбор девяти продуктовых гипотез · предложение клиентской метрики и её обоснование · журнал допущений и развилок · дизайн пилота · распределение работ</a:t>
+            </a:r>
+            <a:endParaRPr lang="en-US" sz="1100" dirty="0"/>
+          </a:p>
+        </p:txBody>
+      </p:sp>
+      <p:sp>
+        <p:nvSpPr>
+          <p:cNvPr id="10" name="Text 8"/>
+          <p:cNvSpPr txBox="1"/>
+          <p:nvPr/>
+        </p:nvSpPr>
+        <p:spPr>
+          <a:xfrm>
+            <a:off x="10378440" y="1737360"/>
+            <a:ext cx="960120" cy="347472"/>
+          </a:xfrm>
+          <a:prstGeom prst="rect">
+            <a:avLst/>
+          </a:prstGeom>
+          <a:noFill/>
+          <a:ln/>
+        </p:spPr>
+        <p:txBody>
+          <a:bodyPr wrap="square" lIns="0" tIns="0" rIns="0" bIns="0" rtlCol="0" anchor="ctr"/>
+          <a:lstStyle/>
+          <a:p>
+            <a:pPr algn="ctr" indent="0" marL="0">
+              <a:buNone/>
+            </a:pPr>
+            <a:r>
+              <a:rPr lang="en-US" sz="1400" b="1" dirty="0">
+                <a:solidFill>
+                  <a:srgbClr val="9C5B12"/>
+                </a:solidFill>
+                <a:latin typeface="Calibri" pitchFamily="34" charset="0"/>
+                <a:ea typeface="Calibri" pitchFamily="34" charset="-122"/>
+                <a:cs typeface="Calibri" pitchFamily="34" charset="-120"/>
+              </a:rPr>
+              <a:t>33 %</a:t>
+            </a:r>
+            <a:endParaRPr lang="en-US" sz="1400" dirty="0"/>
+          </a:p>
+        </p:txBody>
+      </p:sp>
+      <p:sp>
+        <p:nvSpPr>
+          <p:cNvPr id="11" name="Shape 9"/>
+          <p:cNvSpPr/>
+          <p:nvPr/>
+        </p:nvSpPr>
+        <p:spPr>
+          <a:xfrm>
+            <a:off x="640080" y="2788920"/>
+            <a:ext cx="10881360" cy="1444752"/>
+          </a:xfrm>
+          <a:prstGeom prst="roundRect">
+            <a:avLst>
+              <a:gd name="adj" fmla="val 3797"/>
+            </a:avLst>
+          </a:prstGeom>
+          <a:solidFill>
+            <a:srgbClr val="F4F6F8"/>
+          </a:solidFill>
+          <a:ln/>
+        </p:spPr>
+      </p:sp>
+      <p:sp>
+        <p:nvSpPr>
+          <p:cNvPr id="12" name="Text 10"/>
+          <p:cNvSpPr txBox="1"/>
+          <p:nvPr/>
+        </p:nvSpPr>
+        <p:spPr>
+          <a:xfrm>
+            <a:off x="896112" y="2944368"/>
+            <a:ext cx="2468880" cy="329184"/>
+          </a:xfrm>
+          <a:prstGeom prst="rect">
+            <a:avLst/>
+          </a:prstGeom>
+          <a:noFill/>
+          <a:ln/>
+        </p:spPr>
+        <p:txBody>
+          <a:bodyPr wrap="square" lIns="0" tIns="0" rIns="0" bIns="0" rtlCol="0" anchor="ctr"/>
+          <a:lstStyle/>
+          <a:p>
+            <a:pPr indent="0" marL="0">
+              <a:buNone/>
+            </a:pPr>
+            <a:r>
+              <a:rPr lang="en-US" sz="1500" b="1" dirty="0">
+                <a:solidFill>
+                  <a:srgbClr val="1A2530"/>
+                </a:solidFill>
+                <a:latin typeface="Cambria" pitchFamily="34" charset="0"/>
+                <a:ea typeface="Cambria" pitchFamily="34" charset="-122"/>
+                <a:cs typeface="Cambria" pitchFamily="34" charset="-120"/>
+              </a:rPr>
+              <a:t>Даниил Недайборщ</a:t>
+            </a:r>
+            <a:endParaRPr lang="en-US" sz="1500" dirty="0"/>
+          </a:p>
+        </p:txBody>
+      </p:sp>
+      <p:sp>
+        <p:nvSpPr>
+          <p:cNvPr id="13" name="Text 11"/>
+          <p:cNvSpPr txBox="1"/>
+          <p:nvPr/>
+        </p:nvSpPr>
+        <p:spPr>
+          <a:xfrm>
+            <a:off x="896112" y="3300984"/>
+            <a:ext cx="2468880" cy="292608"/>
+          </a:xfrm>
+          <a:prstGeom prst="rect">
+            <a:avLst/>
+          </a:prstGeom>
+          <a:noFill/>
+          <a:ln/>
+        </p:spPr>
+        <p:txBody>
+          <a:bodyPr wrap="square" lIns="0" tIns="0" rIns="0" bIns="0" rtlCol="0" anchor="ctr"/>
+          <a:lstStyle/>
+          <a:p>
+            <a:pPr indent="0" marL="0">
+              <a:buNone/>
+            </a:pPr>
+            <a:r>
+              <a:rPr lang="en-US" sz="1150" b="1" dirty="0">
+                <a:solidFill>
+                  <a:srgbClr val="9C5B12"/>
+                </a:solidFill>
+                <a:latin typeface="Calibri" pitchFamily="34" charset="0"/>
+                <a:ea typeface="Calibri" pitchFamily="34" charset="-122"/>
+                <a:cs typeface="Calibri" pitchFamily="34" charset="-120"/>
+              </a:rPr>
+              <a:t>AI Engineer · разработка</a:t>
+            </a:r>
+            <a:endParaRPr lang="en-US" sz="1150" dirty="0"/>
+          </a:p>
+        </p:txBody>
+      </p:sp>
+      <p:sp>
+        <p:nvSpPr>
+          <p:cNvPr id="14" name="Text 12"/>
+          <p:cNvSpPr txBox="1"/>
+          <p:nvPr/>
+        </p:nvSpPr>
+        <p:spPr>
+          <a:xfrm>
+            <a:off x="896112" y="3611880"/>
+            <a:ext cx="2468880" cy="493776"/>
+          </a:xfrm>
+          <a:prstGeom prst="rect">
+            <a:avLst/>
+          </a:prstGeom>
+          <a:noFill/>
+          <a:ln/>
+        </p:spPr>
+        <p:txBody>
+          <a:bodyPr wrap="square" lIns="0" tIns="0" rIns="0" bIns="0" rtlCol="0" anchor="ctr"/>
+          <a:lstStyle/>
+          <a:p>
+            <a:pPr indent="0" marL="0">
+              <a:lnSpc>
+                <a:spcPts val="1250"/>
+              </a:lnSpc>
+              <a:buNone/>
+            </a:pPr>
+            <a:r>
+              <a:rPr lang="en-US" sz="1000" dirty="0">
+                <a:solidFill>
+                  <a:srgbClr val="6E7A88"/>
+                </a:solidFill>
+                <a:latin typeface="Calibri" pitchFamily="34" charset="0"/>
+                <a:ea typeface="Calibri" pitchFamily="34" charset="-122"/>
+                <a:cs typeface="Calibri" pitchFamily="34" charset="-120"/>
+              </a:rPr>
+              <a:t>Данные, признаки, инфраструктура честности</a:t>
+            </a:r>
+            <a:endParaRPr lang="en-US" sz="1000" dirty="0"/>
+          </a:p>
+        </p:txBody>
+      </p:sp>
+      <p:sp>
+        <p:nvSpPr>
+          <p:cNvPr id="15" name="Text 13"/>
+          <p:cNvSpPr txBox="1"/>
+          <p:nvPr/>
+        </p:nvSpPr>
+        <p:spPr>
+          <a:xfrm>
+            <a:off x="3520440" y="2990088"/>
+            <a:ext cx="6720840" cy="1078992"/>
+          </a:xfrm>
+          <a:prstGeom prst="rect">
+            <a:avLst/>
+          </a:prstGeom>
+          <a:noFill/>
+          <a:ln/>
+        </p:spPr>
+        <p:txBody>
+          <a:bodyPr wrap="square" lIns="0" tIns="0" rIns="0" bIns="0" rtlCol="0" anchor="ctr"/>
+          <a:lstStyle/>
+          <a:p>
+            <a:pPr indent="0" marL="0">
+              <a:lnSpc>
+                <a:spcPts val="1500"/>
+              </a:lnSpc>
+              <a:buNone/>
+            </a:pPr>
+            <a:r>
+              <a:rPr lang="en-US" sz="1100" dirty="0">
+                <a:solidFill>
+                  <a:srgbClr val="4E5966"/>
+                </a:solidFill>
+                <a:latin typeface="Calibri" pitchFamily="34" charset="0"/>
+                <a:ea typeface="Calibri" pitchFamily="34" charset="-122"/>
+                <a:cs typeface="Calibri" pitchFamily="34" charset="-120"/>
+              </a:rPr>
+              <a:t>Загрузчик ЦБ с построчной нормировкой номинала · 83 признака только по прошлому · доказательство отсутствия заглядывания в будущее и 44 автотеста · walk-forward с очисткой в публикациях · signals_as_of(T) · воспроизводимость репозитория</a:t>
+            </a:r>
+            <a:endParaRPr lang="en-US" sz="1100" dirty="0"/>
+          </a:p>
+        </p:txBody>
+      </p:sp>
+      <p:sp>
+        <p:nvSpPr>
+          <p:cNvPr id="16" name="Text 14"/>
+          <p:cNvSpPr txBox="1"/>
+          <p:nvPr/>
+        </p:nvSpPr>
+        <p:spPr>
+          <a:xfrm>
+            <a:off x="10378440" y="3337560"/>
+            <a:ext cx="960120" cy="347472"/>
+          </a:xfrm>
+          <a:prstGeom prst="rect">
+            <a:avLst/>
+          </a:prstGeom>
+          <a:noFill/>
+          <a:ln/>
+        </p:spPr>
+        <p:txBody>
+          <a:bodyPr wrap="square" lIns="0" tIns="0" rIns="0" bIns="0" rtlCol="0" anchor="ctr"/>
+          <a:lstStyle/>
+          <a:p>
+            <a:pPr algn="ctr" indent="0" marL="0">
+              <a:buNone/>
+            </a:pPr>
+            <a:r>
+              <a:rPr lang="en-US" sz="1400" b="1" dirty="0">
+                <a:solidFill>
+                  <a:srgbClr val="9C5B12"/>
+                </a:solidFill>
+                <a:latin typeface="Calibri" pitchFamily="34" charset="0"/>
+                <a:ea typeface="Calibri" pitchFamily="34" charset="-122"/>
+                <a:cs typeface="Calibri" pitchFamily="34" charset="-120"/>
+              </a:rPr>
+              <a:t>33 %</a:t>
+            </a:r>
+            <a:endParaRPr lang="en-US" sz="1400" dirty="0"/>
+          </a:p>
+        </p:txBody>
+      </p:sp>
+      <p:sp>
+        <p:nvSpPr>
+          <p:cNvPr id="17" name="Shape 15"/>
+          <p:cNvSpPr/>
+          <p:nvPr/>
+        </p:nvSpPr>
+        <p:spPr>
+          <a:xfrm>
+            <a:off x="640080" y="4389120"/>
+            <a:ext cx="10881360" cy="1444752"/>
+          </a:xfrm>
+          <a:prstGeom prst="roundRect">
+            <a:avLst>
+              <a:gd name="adj" fmla="val 3797"/>
+            </a:avLst>
+          </a:prstGeom>
+          <a:solidFill>
+            <a:srgbClr val="F4F6F8"/>
+          </a:solidFill>
+          <a:ln/>
+        </p:spPr>
+      </p:sp>
+      <p:sp>
+        <p:nvSpPr>
+          <p:cNvPr id="18" name="Text 16"/>
+          <p:cNvSpPr txBox="1"/>
+          <p:nvPr/>
+        </p:nvSpPr>
+        <p:spPr>
+          <a:xfrm>
+            <a:off x="896112" y="4544568"/>
+            <a:ext cx="2468880" cy="329184"/>
+          </a:xfrm>
+          <a:prstGeom prst="rect">
+            <a:avLst/>
+          </a:prstGeom>
+          <a:noFill/>
+          <a:ln/>
+        </p:spPr>
+        <p:txBody>
+          <a:bodyPr wrap="square" lIns="0" tIns="0" rIns="0" bIns="0" rtlCol="0" anchor="ctr"/>
+          <a:lstStyle/>
+          <a:p>
+            <a:pPr indent="0" marL="0">
+              <a:buNone/>
+            </a:pPr>
+            <a:r>
+              <a:rPr lang="en-US" sz="1500" b="1" dirty="0">
+                <a:solidFill>
+                  <a:srgbClr val="1A2530"/>
+                </a:solidFill>
+                <a:latin typeface="Cambria" pitchFamily="34" charset="0"/>
+                <a:ea typeface="Cambria" pitchFamily="34" charset="-122"/>
+                <a:cs typeface="Cambria" pitchFamily="34" charset="-120"/>
+              </a:rPr>
+              <a:t>Иван Калинин</a:t>
+            </a:r>
+            <a:endParaRPr lang="en-US" sz="1500" dirty="0"/>
+          </a:p>
+        </p:txBody>
+      </p:sp>
+      <p:sp>
+        <p:nvSpPr>
+          <p:cNvPr id="19" name="Text 17"/>
+          <p:cNvSpPr txBox="1"/>
+          <p:nvPr/>
+        </p:nvSpPr>
+        <p:spPr>
+          <a:xfrm>
+            <a:off x="896112" y="4901184"/>
+            <a:ext cx="2468880" cy="292608"/>
+          </a:xfrm>
+          <a:prstGeom prst="rect">
+            <a:avLst/>
+          </a:prstGeom>
+          <a:noFill/>
+          <a:ln/>
+        </p:spPr>
+        <p:txBody>
+          <a:bodyPr wrap="square" lIns="0" tIns="0" rIns="0" bIns="0" rtlCol="0" anchor="ctr"/>
+          <a:lstStyle/>
+          <a:p>
+            <a:pPr indent="0" marL="0">
+              <a:buNone/>
+            </a:pPr>
+            <a:r>
+              <a:rPr lang="en-US" sz="1150" b="1" dirty="0">
+                <a:solidFill>
+                  <a:srgbClr val="9C5B12"/>
+                </a:solidFill>
+                <a:latin typeface="Calibri" pitchFamily="34" charset="0"/>
+                <a:ea typeface="Calibri" pitchFamily="34" charset="-122"/>
+                <a:cs typeface="Calibri" pitchFamily="34" charset="-120"/>
+              </a:rPr>
+              <a:t>AI Engineer · машинное обучение</a:t>
+            </a:r>
+            <a:endParaRPr lang="en-US" sz="1150" dirty="0"/>
+          </a:p>
+        </p:txBody>
+      </p:sp>
+      <p:sp>
+        <p:nvSpPr>
+          <p:cNvPr id="20" name="Text 18"/>
+          <p:cNvSpPr txBox="1"/>
+          <p:nvPr/>
+        </p:nvSpPr>
+        <p:spPr>
+          <a:xfrm>
+            <a:off x="896112" y="5212080"/>
+            <a:ext cx="2468880" cy="493776"/>
+          </a:xfrm>
+          <a:prstGeom prst="rect">
+            <a:avLst/>
+          </a:prstGeom>
+          <a:noFill/>
+          <a:ln/>
+        </p:spPr>
+        <p:txBody>
+          <a:bodyPr wrap="square" lIns="0" tIns="0" rIns="0" bIns="0" rtlCol="0" anchor="ctr"/>
+          <a:lstStyle/>
+          <a:p>
+            <a:pPr indent="0" marL="0">
+              <a:lnSpc>
+                <a:spcPts val="1250"/>
+              </a:lnSpc>
+              <a:buNone/>
+            </a:pPr>
+            <a:r>
+              <a:rPr lang="en-US" sz="1000" dirty="0">
+                <a:solidFill>
+                  <a:srgbClr val="6E7A88"/>
+                </a:solidFill>
+                <a:latin typeface="Calibri" pitchFamily="34" charset="0"/>
+                <a:ea typeface="Calibri" pitchFamily="34" charset="-122"/>
+                <a:cs typeface="Calibri" pitchFamily="34" charset="-120"/>
+              </a:rPr>
+              <a:t>Модели, отбор признаков, валидация результата</a:t>
+            </a:r>
+            <a:endParaRPr lang="en-US" sz="1000" dirty="0"/>
+          </a:p>
+        </p:txBody>
+      </p:sp>
+      <p:sp>
+        <p:nvSpPr>
+          <p:cNvPr id="21" name="Text 19"/>
+          <p:cNvSpPr txBox="1"/>
+          <p:nvPr/>
+        </p:nvSpPr>
+        <p:spPr>
+          <a:xfrm>
+            <a:off x="3520440" y="4590288"/>
+            <a:ext cx="6720840" cy="1078992"/>
+          </a:xfrm>
+          <a:prstGeom prst="rect">
+            <a:avLst/>
+          </a:prstGeom>
+          <a:noFill/>
+          <a:ln/>
+        </p:spPr>
+        <p:txBody>
+          <a:bodyPr wrap="square" lIns="0" tIns="0" rIns="0" bIns="0" rtlCol="0" anchor="ctr"/>
+          <a:lstStyle/>
+          <a:p>
+            <a:pPr indent="0" marL="0">
+              <a:lnSpc>
+                <a:spcPts val="1500"/>
+              </a:lnSpc>
+              <a:buNone/>
+            </a:pPr>
+            <a:r>
+              <a:rPr lang="en-US" sz="1100" dirty="0">
+                <a:solidFill>
+                  <a:srgbClr val="4E5966"/>
+                </a:solidFill>
+                <a:latin typeface="Calibri" pitchFamily="34" charset="0"/>
+                <a:ea typeface="Calibri" pitchFamily="34" charset="-122"/>
+                <a:cs typeface="Calibri" pitchFamily="34" charset="-120"/>
+              </a:rPr>
+              <a:t>Пять семейств моделей, включая CatBoost и XGBoost · честный отбор признаков · подбор конфигураций и диагностика провала на всех признаках · две модели под две метрики · испытания результата</a:t>
+            </a:r>
+            <a:endParaRPr lang="en-US" sz="1100" dirty="0"/>
+          </a:p>
+        </p:txBody>
+      </p:sp>
+      <p:sp>
+        <p:nvSpPr>
+          <p:cNvPr id="22" name="Text 20"/>
+          <p:cNvSpPr txBox="1"/>
+          <p:nvPr/>
+        </p:nvSpPr>
+        <p:spPr>
+          <a:xfrm>
+            <a:off x="10378440" y="4937760"/>
+            <a:ext cx="960120" cy="347472"/>
+          </a:xfrm>
+          <a:prstGeom prst="rect">
+            <a:avLst/>
+          </a:prstGeom>
+          <a:noFill/>
+          <a:ln/>
+        </p:spPr>
+        <p:txBody>
+          <a:bodyPr wrap="square" lIns="0" tIns="0" rIns="0" bIns="0" rtlCol="0" anchor="ctr"/>
+          <a:lstStyle/>
+          <a:p>
+            <a:pPr algn="ctr" indent="0" marL="0">
+              <a:buNone/>
+            </a:pPr>
+            <a:r>
+              <a:rPr lang="en-US" sz="1400" b="1" dirty="0">
+                <a:solidFill>
+                  <a:srgbClr val="9C5B12"/>
+                </a:solidFill>
+                <a:latin typeface="Calibri" pitchFamily="34" charset="0"/>
+                <a:ea typeface="Calibri" pitchFamily="34" charset="-122"/>
+                <a:cs typeface="Calibri" pitchFamily="34" charset="-120"/>
+              </a:rPr>
+              <a:t>33 %</a:t>
+            </a:r>
+            <a:endParaRPr lang="en-US" sz="1400" dirty="0"/>
+          </a:p>
+        </p:txBody>
+      </p:sp>
+      <p:sp>
+        <p:nvSpPr>
+          <p:cNvPr id="23" name="Text 21"/>
+          <p:cNvSpPr txBox="1"/>
+          <p:nvPr/>
+        </p:nvSpPr>
+        <p:spPr>
+          <a:xfrm>
+            <a:off x="640080" y="6272784"/>
+            <a:ext cx="10881360" cy="310896"/>
+          </a:xfrm>
+          <a:prstGeom prst="rect">
+            <a:avLst/>
+          </a:prstGeom>
+          <a:noFill/>
+          <a:ln/>
+        </p:spPr>
+        <p:txBody>
+          <a:bodyPr wrap="square" lIns="0" tIns="0" rIns="0" bIns="0" rtlCol="0" anchor="ctr"/>
+          <a:lstStyle/>
+          <a:p>
+            <a:pPr indent="0" marL="0">
+              <a:buNone/>
+            </a:pPr>
+            <a:r>
+              <a:rPr lang="en-US" sz="1050" i="1" dirty="0">
+                <a:solidFill>
+                  <a:srgbClr val="6E7A88"/>
+                </a:solidFill>
+                <a:latin typeface="Calibri" pitchFamily="34" charset="0"/>
+                <a:ea typeface="Calibri" pitchFamily="34" charset="-122"/>
+                <a:cs typeface="Calibri" pitchFamily="34" charset="-120"/>
+              </a:rPr>
+              <a:t>Работа велась совместно, роли разделены по зонам ответственности; вклад участников сопоставим.</a:t>
+            </a:r>
+            <a:endParaRPr lang="en-US" sz="1050" dirty="0"/>
+          </a:p>
+        </p:txBody>
+      </p:sp>
+    </p:spTree>
+  </p:cSld>
+  <p:clrMapOvr>
+    <a:masterClrMapping/>
+  </p:clrMapOvr>
+</p:sld>
+</file>
+
+<file path=ppt/slides/slide18.xml><?xml version="1.0" encoding="utf-8"?>
+<p:sld xmlns:a="http://schemas.openxmlformats.org/drawingml/2006/main" xmlns:r="http://schemas.openxmlformats.org/officeDocument/2006/relationships" xmlns:p="http://schemas.openxmlformats.org/presentationml/2006/main">
+  <p:cSld name="Slide 18">
     <p:spTree>
       <p:nvGrpSpPr>
         <p:cNvPr id="1" name=""/>
@@ -11024,7 +11360,7 @@
                 <a:ea typeface="Calibri" pitchFamily="34" charset="-122"/>
                 <a:cs typeface="Calibri" pitchFamily="34" charset="-120"/>
               </a:rPr>
-              <a:t>signals.csv в финальном формате, правило комбинирования и добор до полосы частоты, тексты уведомлений, прототип экрана, дизайн пилота.</a:t>
+              <a:t>signals.csv в финальном формате, правило комбинирования и добор до полосы частоты, падежный словарь в коде, проверка приветствий носителями.</a:t>
             </a:r>
             <a:endParaRPr lang="en-US" sz="1250" dirty="0"/>
           </a:p>

--- a/submission/prezentaciya-promezhutochnaya.pptx
+++ b/submission/prezentaciya-promezhutochnaya.pptx
@@ -9157,7 +9157,7 @@
                 <a:ea typeface="Calibri" pitchFamily="34" charset="-122"/>
                 <a:cs typeface="Calibri" pitchFamily="34" charset="-120"/>
               </a:rPr>
-              <a:t>И у максимума нет допустимого текста: он срабатывает на 99-м процентиле квартального диапазона.</a:t>
+              <a:t>И у максимума нет допустимого текста: он срабатывает на 99-м перцентиле квартального диапазона.</a:t>
             </a:r>
             <a:endParaRPr lang="en-US" sz="1500" dirty="0"/>
           </a:p>
